--- a/docs/Safety_and_Trust_Engine.pptx
+++ b/docs/Safety_and_Trust_Engine.pptx
@@ -11019,7 +11019,7 @@
           <p:nvPr/>
         </p:nvPicPr>
         <p:blipFill>
-          <a:blip r:embed="rId1"/>
+          <a:blip r:embed="rId2"/>
           <a:stretch>
             <a:fillRect/>
           </a:stretch>
@@ -11183,7 +11183,7 @@
           <p:nvPr/>
         </p:nvPicPr>
         <p:blipFill>
-          <a:blip r:embed="rId2"/>
+          <a:blip r:embed="rId3"/>
           <a:stretch>
             <a:fillRect/>
           </a:stretch>
@@ -11459,7 +11459,7 @@
           <p:nvPr/>
         </p:nvPicPr>
         <p:blipFill>
-          <a:blip r:embed="rId3"/>
+          <a:blip r:embed="rId4"/>
           <a:stretch>
             <a:fillRect/>
           </a:stretch>
@@ -11735,7 +11735,7 @@
           <p:nvPr/>
         </p:nvPicPr>
         <p:blipFill>
-          <a:blip r:embed="rId4"/>
+          <a:blip r:embed="rId5"/>
           <a:stretch>
             <a:fillRect/>
           </a:stretch>

--- a/docs/Safety_and_Trust_Engine.pptx
+++ b/docs/Safety_and_Trust_Engine.pptx
@@ -11934,7 +11934,7 @@
                 <a:ea typeface="Calibri" pitchFamily="34" charset="-122"/>
                 <a:cs typeface="Calibri" pitchFamily="34" charset="-120"/>
               </a:rPr>
-              <a:t>lint-and-test + demo-gate on every push; nightly live job. Repo pushed, CI green.</a:t>
+              <a:t>Enforcing safety-gate blocks a PR on any tolerance breach; lint+test + nightly live. CI green.</a:t>
             </a:r>
             <a:endParaRPr lang="en-US" sz="1200" dirty="0"/>
           </a:p>

--- a/docs/Safety_and_Trust_Engine.pptx
+++ b/docs/Safety_and_Trust_Engine.pptx
@@ -4,6 +4,9 @@
   <p:sldMasterIdLst>
     <p:sldMasterId id="2147483648" r:id="rId1"/>
   </p:sldMasterIdLst>
+  <p:notesMasterIdLst>
+    <p:notesMasterId r:id="rId20"/>
+  </p:notesMasterIdLst>
   <p:sldIdLst>
     <p:sldId id="256" r:id="rId2"/>
     <p:sldId id="257" r:id="rId3"/>
@@ -22,12 +25,9 @@
     <p:sldId id="270" r:id="rId16"/>
     <p:sldId id="271" r:id="rId17"/>
     <p:sldId id="272" r:id="rId18"/>
-    <p:sldId id="273" r:id="rId24"/>
+    <p:sldId id="273" r:id="rId19"/>
   </p:sldIdLst>
-  <p:notesMasterIdLst>
-    <p:notesMasterId r:id="rId19"/>
-  </p:notesMasterIdLst>
-  <p:sldSz cx="9144000" cy="5143500"/>
+  <p:sldSz cx="9144000" cy="5143500" type="screen16x9"/>
   <p:notesSz cx="5143500" cy="9144000"/>
   <p:defaultTextStyle>
     <a:lvl1pPr marL="0" algn="l" defTabSz="914400" rtl="0" eaLnBrk="1" latinLnBrk="0" hangingPunct="1">
@@ -121,6 +121,11 @@
       </a:defRPr>
     </a:lvl9pPr>
   </p:defaultTextStyle>
+  <p:extLst>
+    <p:ext uri="{EFAFB233-063F-42B5-8137-9DF3F51BA10A}">
+      <p15:sldGuideLst xmlns:p15="http://schemas.microsoft.com/office/powerpoint/2012/main"/>
+    </p:ext>
+  </p:extLst>
 </p:presentation>
 </file>
 
@@ -146,234 +151,10 @@
           <a:chExt cx="0" cy="0"/>
         </a:xfrm>
       </p:grpSpPr>
-      <p:sp>
-        <p:nvSpPr>
-          <p:cNvPr id="2" name="Header Placeholder 1"/>
-          <p:cNvSpPr>
-            <a:spLocks noGrp="1"/>
-          </p:cNvSpPr>
-          <p:nvPr>
-            <p:ph type="hdr" sz="quarter"/>
-          </p:nvPr>
-        </p:nvSpPr>
-        <p:spPr>
-          <a:xfrm>
-            <a:off x="0" y="0"/>
-            <a:ext cx="2971800" cy="458788"/>
-          </a:xfrm>
-          <a:prstGeom prst="rect">
-            <a:avLst/>
-          </a:prstGeom>
-        </p:spPr>
-        <p:txBody>
-          <a:bodyPr vert="horz" lIns="91440" tIns="45720" rIns="91440" bIns="45720" rtlCol="0"/>
-          <a:lstStyle>
-            <a:lvl1pPr algn="l">
-              <a:defRPr sz="1200"/>
-            </a:lvl1pPr>
-          </a:lstStyle>
-          <a:p>
-            <a:endParaRPr lang="en-US"/>
-          </a:p>
-        </p:txBody>
-      </p:sp>
-      <p:sp>
-        <p:nvSpPr>
-          <p:cNvPr id="3" name="Date Placeholder 2"/>
-          <p:cNvSpPr>
-            <a:spLocks noGrp="1"/>
-          </p:cNvSpPr>
-          <p:nvPr>
-            <p:ph type="dt" idx="1"/>
-          </p:nvPr>
-        </p:nvSpPr>
-        <p:spPr>
-          <a:xfrm>
-            <a:off x="3884613" y="0"/>
-            <a:ext cx="2971800" cy="458788"/>
-          </a:xfrm>
-          <a:prstGeom prst="rect">
-            <a:avLst/>
-          </a:prstGeom>
-        </p:spPr>
-        <p:txBody>
-          <a:bodyPr vert="horz" lIns="91440" tIns="45720" rIns="91440" bIns="45720" rtlCol="0"/>
-          <a:lstStyle>
-            <a:lvl1pPr algn="r">
-              <a:defRPr sz="1200"/>
-            </a:lvl1pPr>
-          </a:lstStyle>
-          <a:p>
-            <a:fld id="{5282F153-3F37-0F45-9E97-73ACFA13230C}" type="datetimeFigureOut">
-              <a:rPr lang="en-US"/>
-              <a:t>7/23/19</a:t>
-            </a:fld>
-            <a:endParaRPr lang="en-US"/>
-          </a:p>
-        </p:txBody>
-      </p:sp>
-      <p:sp>
-        <p:nvSpPr>
-          <p:cNvPr id="4" name="Slide Image Placeholder 3"/>
-          <p:cNvSpPr>
-            <a:spLocks noGrp="1" noRot="1" noChangeAspect="1"/>
-          </p:cNvSpPr>
-          <p:nvPr>
-            <p:ph type="sldImg" idx="2"/>
-          </p:nvPr>
-        </p:nvSpPr>
-        <p:spPr>
-          <a:xfrm>
-            <a:off x="685800" y="1143000"/>
-            <a:ext cx="5486400" cy="3086100"/>
-          </a:xfrm>
-          <a:prstGeom prst="rect">
-            <a:avLst/>
-          </a:prstGeom>
-          <a:noFill/>
-          <a:ln w="12700">
-            <a:solidFill>
-              <a:prstClr val="black"/>
-            </a:solidFill>
-          </a:ln>
-        </p:spPr>
-        <p:txBody>
-          <a:bodyPr vert="horz" lIns="91440" tIns="45720" rIns="91440" bIns="45720" rtlCol="0" anchor="ctr"/>
-          <a:lstStyle/>
-          <a:p>
-            <a:endParaRPr lang="en-US"/>
-          </a:p>
-        </p:txBody>
-      </p:sp>
-      <p:sp>
-        <p:nvSpPr>
-          <p:cNvPr id="5" name="Notes Placeholder 4"/>
-          <p:cNvSpPr>
-            <a:spLocks noGrp="1"/>
-          </p:cNvSpPr>
-          <p:nvPr>
-            <p:ph type="body" sz="quarter" idx="3"/>
-          </p:nvPr>
-        </p:nvSpPr>
-        <p:spPr>
-          <a:xfrm>
-            <a:off x="685800" y="4400550"/>
-            <a:ext cx="5486400" cy="3600450"/>
-          </a:xfrm>
-          <a:prstGeom prst="rect">
-            <a:avLst/>
-          </a:prstGeom>
-        </p:spPr>
-        <p:txBody>
-          <a:bodyPr vert="horz" lIns="91440" tIns="45720" rIns="91440" bIns="45720" rtlCol="0"/>
-          <a:lstStyle/>
-          <a:p>
-            <a:pPr lvl="0"/>
-            <a:r>
-              <a:rPr lang="en-US"/>
-              <a:t>Click to edit Master text styles</a:t>
-            </a:r>
-          </a:p>
-          <a:p>
-            <a:pPr lvl="1"/>
-            <a:r>
-              <a:rPr lang="en-US"/>
-              <a:t>Second level</a:t>
-            </a:r>
-          </a:p>
-          <a:p>
-            <a:pPr lvl="2"/>
-            <a:r>
-              <a:rPr lang="en-US"/>
-              <a:t>Third level</a:t>
-            </a:r>
-          </a:p>
-          <a:p>
-            <a:pPr lvl="3"/>
-            <a:r>
-              <a:rPr lang="en-US"/>
-              <a:t>Fourth level</a:t>
-            </a:r>
-          </a:p>
-          <a:p>
-            <a:pPr lvl="4"/>
-            <a:r>
-              <a:rPr lang="en-US"/>
-              <a:t>Fifth level</a:t>
-            </a:r>
-          </a:p>
-        </p:txBody>
-      </p:sp>
-      <p:sp>
-        <p:nvSpPr>
-          <p:cNvPr id="6" name="Footer Placeholder 5"/>
-          <p:cNvSpPr>
-            <a:spLocks noGrp="1"/>
-          </p:cNvSpPr>
-          <p:nvPr>
-            <p:ph type="ftr" sz="quarter" idx="4"/>
-          </p:nvPr>
-        </p:nvSpPr>
-        <p:spPr>
-          <a:xfrm>
-            <a:off x="0" y="8685213"/>
-            <a:ext cx="2971800" cy="458787"/>
-          </a:xfrm>
-          <a:prstGeom prst="rect">
-            <a:avLst/>
-          </a:prstGeom>
-        </p:spPr>
-        <p:txBody>
-          <a:bodyPr vert="horz" lIns="91440" tIns="45720" rIns="91440" bIns="45720" rtlCol="0" anchor="b"/>
-          <a:lstStyle>
-            <a:lvl1pPr algn="l">
-              <a:defRPr sz="1200"/>
-            </a:lvl1pPr>
-          </a:lstStyle>
-          <a:p>
-            <a:endParaRPr lang="en-US"/>
-          </a:p>
-        </p:txBody>
-      </p:sp>
-      <p:sp>
-        <p:nvSpPr>
-          <p:cNvPr id="7" name="Slide Number Placeholder 6"/>
-          <p:cNvSpPr>
-            <a:spLocks noGrp="1"/>
-          </p:cNvSpPr>
-          <p:nvPr>
-            <p:ph type="sldNum" sz="quarter" idx="5"/>
-          </p:nvPr>
-        </p:nvSpPr>
-        <p:spPr>
-          <a:xfrm>
-            <a:off x="3884613" y="8685213"/>
-            <a:ext cx="2971800" cy="458787"/>
-          </a:xfrm>
-          <a:prstGeom prst="rect">
-            <a:avLst/>
-          </a:prstGeom>
-        </p:spPr>
-        <p:txBody>
-          <a:bodyPr vert="horz" lIns="91440" tIns="45720" rIns="91440" bIns="45720" rtlCol="0" anchor="b"/>
-          <a:lstStyle>
-            <a:lvl1pPr algn="r">
-              <a:defRPr sz="1200"/>
-            </a:lvl1pPr>
-          </a:lstStyle>
-          <a:p>
-            <a:fld id="{CE5E9CC1-C706-0F49-92D6-E571CC5EEA8F}" type="slidenum">
-              <a:rPr lang="en-US"/>
-              <a:t>‹#›</a:t>
-            </a:fld>
-            <a:endParaRPr lang="en-US"/>
-          </a:p>
-        </p:txBody>
-      </p:sp>
     </p:spTree>
     <p:extLst>
       <p:ext uri="{BB962C8B-B14F-4D97-AF65-F5344CB8AC3E}">
-        <p14:creationId xmlns:p14="http://schemas.microsoft.com/office/powerpoint/2010/main" val="1024086991"/>
+        <p14:creationId xmlns:p14="http://schemas.microsoft.com/office/powerpoint/2010/main" val="2004973787"/>
       </p:ext>
     </p:extLst>
   </p:cSld>
@@ -521,7 +302,6 @@
               <a:rPr lang="en-US" dirty="0"/>
               <a:t>Open with two rows of logos: top the three regulators (EU AI Act, DORA, FCA), bottom the three tools (garak, AgentDojo, PyRIT). Land the line: you're probably already doing the red-teaming, you're just not producing the evidence. This is the Phase 5 sequel to the four-phase app talk.</a:t>
             </a:r>
-            <a:endParaRPr lang="en-US" dirty="0"/>
           </a:p>
         </p:txBody>
       </p:sp>
@@ -609,7 +389,6 @@
               <a:rPr lang="en-US" dirty="0"/>
               <a:t>Walk it left to right. A trigger fans out to three independent stages, each emitting findings in one shape — ProbeResult(category, attempts, hits). That normalisation is the quiet hero: the mapper and gate never need to know which tool a finding came from, which makes adding a fourth tool cheap.</a:t>
             </a:r>
-            <a:endParaRPr lang="en-US" dirty="0"/>
           </a:p>
         </p:txBody>
       </p:sp>
@@ -697,7 +476,6 @@
               <a:rPr lang="en-US" dirty="0"/>
               <a:t>Show a row from an FCA self-assessment next to the DEFAULT_TOLERANCES dict — same concept, one prose, one enforced. Override per run with --fail-under category=rate.</a:t>
             </a:r>
-            <a:endParaRPr lang="en-US" dirty="0"/>
           </a:p>
         </p:txBody>
       </p:sp>
@@ -785,7 +563,6 @@
               <a:rPr lang="en-US" dirty="0"/>
               <a:t>Show one Control literal and the not_evidenced branch. Then the payoff for Art. 55: the artifact this produces is the documentation the regulation asks for.</a:t>
             </a:r>
-            <a:endParaRPr lang="en-US" dirty="0"/>
           </a:p>
         </p:txBody>
       </p:sp>
@@ -873,7 +650,6 @@
               <a:rPr lang="en-US" dirty="0"/>
               <a:t>W&amp;B's review gate is Intake, Scope, Assess, Probe, Decide. We automate Assess. Being explicit about what is NOT automated — intake, risk scoping, human probing — is what makes the talk credible to a governance audience.</a:t>
             </a:r>
-            <a:endParaRPr lang="en-US" dirty="0"/>
           </a:p>
         </p:txBody>
       </p:sp>
@@ -961,7 +737,6 @@
               <a:rPr lang="en-US" dirty="0"/>
               <a:t>Let the non-zero exit land before explaining it. A failing demo is the point — the gate is doing its job. Then open the Markdown artifact: cat .safety_outputs/st-*.md. The arc: Phase 4 found a subtle failure by hand; Phase 5 catches it and documents it automatically.</a:t>
             </a:r>
-            <a:endParaRPr lang="en-US" dirty="0"/>
           </a:p>
         </p:txBody>
       </p:sp>
@@ -1049,7 +824,6 @@
               <a:rPr lang="en-US" dirty="0"/>
               <a:t>W&amp;B's point: a decision package, not a score. Our Markdown artifact is the lightweight version and doubles as an FCA self-assessment. Position Weave as the production upgrade path for the evidence layer.</a:t>
             </a:r>
-            <a:endParaRPr lang="en-US" dirty="0"/>
           </a:p>
         </p:txBody>
       </p:sp>
@@ -1137,7 +911,6 @@
               <a:rPr lang="en-US" dirty="0"/>
               <a:t>Dev → Pre-deploy → Production is the W&amp;B three-stage view. We own the middle. The feedback loop and the Bedrock port are the concrete next steps.</a:t>
             </a:r>
-            <a:endParaRPr lang="en-US" dirty="0"/>
           </a:p>
         </p:txBody>
       </p:sp>
@@ -1225,7 +998,6 @@
               <a:rPr lang="en-US" dirty="0"/>
               <a:t>Close on takeaway 2: your regulator does not want your scan, they want your gate. Then Q&amp;A — keep to five minutes, offer to continue offline. Resources: the repo docs plus the W&amp;B e-book the governance framing came from.</a:t>
             </a:r>
-            <a:endParaRPr lang="en-US" dirty="0"/>
           </a:p>
         </p:txBody>
       </p:sp>
@@ -1313,7 +1085,6 @@
               <a:rPr lang="en-US" dirty="0"/>
               <a:t>DORA applicable Jan 2025; FCA transition closed Mar 2025; EU AI Act robustness/cybersecurity for high-risk on the same timeline. The shift is from running attacks to operating a control. Pause on 'you're just not producing the evidence.'</a:t>
             </a:r>
-            <a:endParaRPr lang="en-US" dirty="0"/>
           </a:p>
         </p:txBody>
       </p:sp>
@@ -1401,7 +1172,6 @@
               <a:rPr lang="en-US" dirty="0"/>
               <a:t>This is the W&amp;B framing. The engine we built is the Assess stage of a wider review gate. Saying that out loud keeps us honest: automation does not replace human review or legal sign-off.</a:t>
             </a:r>
-            <a:endParaRPr lang="en-US" dirty="0"/>
           </a:p>
         </p:txBody>
       </p:sp>
@@ -1489,7 +1259,6 @@
               <a:rPr lang="en-US" dirty="0"/>
               <a:t>Art. 15(4) covers feedback loops; 15(5) is the cybersecurity/adversarial half. Art. 55 reaches systemic-risk GPAI from a second direction. Flag the word 'document' — it pays off on the artifact slide.</a:t>
             </a:r>
-            <a:endParaRPr lang="en-US" dirty="0"/>
           </a:p>
         </p:txBody>
       </p:sp>
@@ -1577,7 +1346,6 @@
               <a:rPr lang="en-US" dirty="0"/>
               <a:t>Be honest before the audience is: CI is continuous assurance between formal TLPT exercises. The third-party point is the one people forget — Bedrock is in scope.</a:t>
             </a:r>
-            <a:endParaRPr lang="en-US" dirty="0"/>
           </a:p>
         </p:txBody>
       </p:sp>
@@ -1665,7 +1433,6 @@
               <a:rPr lang="en-US" dirty="0"/>
               <a:t>This is the conceptual bridge to the gate. Land the sentence 'impact tolerance is just a maximum attack-success rate' and the architecture feels inevitable.</a:t>
             </a:r>
-            <a:endParaRPr lang="en-US" dirty="0"/>
           </a:p>
         </p:txBody>
       </p:sp>
@@ -1753,7 +1520,6 @@
               <a:rPr lang="en-US" dirty="0"/>
               <a:t>W&amp;B's toolkit maps NIST AI RMF and EU AI Act onto a shared MIT-based risk taxonomy. Same idea here: one finding, many lenses. Our compliance.py encodes EU AI Act/DORA/FCA; NIST and MIT are the obvious extensions.</a:t>
             </a:r>
-            <a:endParaRPr lang="en-US" dirty="0"/>
           </a:p>
         </p:txBody>
       </p:sp>
@@ -1841,7 +1607,6 @@
               <a:rPr lang="en-US" dirty="0"/>
               <a:t>garak and PyRIT they may know; AgentDojo is usually the unknown — and it ships as an Inspect eval, so it plugs into the earlier evaluation phases. It was extended by US AISI with UK AISI (verify against current inspect_evals docs).</a:t>
             </a:r>
-            <a:endParaRPr lang="en-US" dirty="0"/>
           </a:p>
         </p:txBody>
       </p:sp>
@@ -1929,7 +1694,6 @@
               <a:rPr lang="en-US" dirty="0"/>
               <a:t>PyRIT is not new here. Two traps: v0.13 renamed the core abstractions, and the outcome inversion — SUCCESS = refusal detected. This inversion produced Phase 4's headline finding; plant it now, it pays off in the demo.</a:t>
             </a:r>
-            <a:endParaRPr lang="en-US" dirty="0"/>
           </a:p>
         </p:txBody>
       </p:sp>
@@ -2002,6 +1766,11 @@
 <file path=ppt/slideMasters/slideMaster1.xml><?xml version="1.0" encoding="utf-8"?>
 <p:sldMaster xmlns:a="http://schemas.openxmlformats.org/drawingml/2006/main" xmlns:r="http://schemas.openxmlformats.org/officeDocument/2006/relationships" xmlns:p="http://schemas.openxmlformats.org/presentationml/2006/main">
   <p:cSld>
+    <p:bg>
+      <p:bgRef idx="1001">
+        <a:schemeClr val="bg1"/>
+      </p:bgRef>
+    </p:bg>
     <p:spTree>
       <p:nvGrpSpPr>
         <p:cNvPr id="1" name=""/>
@@ -2284,6 +2053,7 @@
         <a:solidFill>
           <a:srgbClr val="0B2E29"/>
         </a:solidFill>
+        <a:effectLst/>
       </p:bgPr>
     </p:bg>
     <p:spTree>
@@ -2323,7 +2093,10 @@
         </p:spPr>
         <p:txBody>
           <a:bodyPr/>
-          <a:p/>
+          <a:lstStyle/>
+          <a:p>
+            <a:endParaRPr/>
+          </a:p>
         </p:txBody>
       </p:sp>
       <p:sp>
@@ -2349,7 +2122,10 @@
         </p:spPr>
         <p:txBody>
           <a:bodyPr/>
-          <a:p/>
+          <a:lstStyle/>
+          <a:p>
+            <a:endParaRPr/>
+          </a:p>
         </p:txBody>
       </p:sp>
       <p:sp>
@@ -2375,7 +2151,10 @@
         </p:spPr>
         <p:txBody>
           <a:bodyPr/>
-          <a:p/>
+          <a:lstStyle/>
+          <a:p>
+            <a:endParaRPr/>
+          </a:p>
         </p:txBody>
       </p:sp>
       <p:sp>
@@ -2401,7 +2180,10 @@
         </p:spPr>
         <p:txBody>
           <a:bodyPr/>
-          <a:p/>
+          <a:lstStyle/>
+          <a:p>
+            <a:endParaRPr/>
+          </a:p>
         </p:txBody>
       </p:sp>
       <p:sp>
@@ -2427,7 +2209,10 @@
         </p:spPr>
         <p:txBody>
           <a:bodyPr/>
-          <a:p/>
+          <a:lstStyle/>
+          <a:p>
+            <a:endParaRPr/>
+          </a:p>
         </p:txBody>
       </p:sp>
       <p:sp>
@@ -2453,7 +2238,10 @@
         </p:spPr>
         <p:txBody>
           <a:bodyPr/>
-          <a:p/>
+          <a:lstStyle/>
+          <a:p>
+            <a:endParaRPr/>
+          </a:p>
         </p:txBody>
       </p:sp>
       <p:sp>
@@ -2479,7 +2267,10 @@
         </p:spPr>
         <p:txBody>
           <a:bodyPr/>
-          <a:p/>
+          <a:lstStyle/>
+          <a:p>
+            <a:endParaRPr/>
+          </a:p>
         </p:txBody>
       </p:sp>
       <p:sp>
@@ -2505,7 +2296,10 @@
         </p:spPr>
         <p:txBody>
           <a:bodyPr/>
-          <a:p/>
+          <a:lstStyle/>
+          <a:p>
+            <a:endParaRPr/>
+          </a:p>
         </p:txBody>
       </p:sp>
       <p:sp>
@@ -2531,7 +2325,10 @@
         </p:spPr>
         <p:txBody>
           <a:bodyPr/>
-          <a:p/>
+          <a:lstStyle/>
+          <a:p>
+            <a:endParaRPr/>
+          </a:p>
         </p:txBody>
       </p:sp>
       <p:sp>
@@ -2557,7 +2354,10 @@
         </p:spPr>
         <p:txBody>
           <a:bodyPr/>
-          <a:p/>
+          <a:lstStyle/>
+          <a:p>
+            <a:endParaRPr/>
+          </a:p>
         </p:txBody>
       </p:sp>
       <p:sp>
@@ -2583,7 +2383,10 @@
         </p:spPr>
         <p:txBody>
           <a:bodyPr/>
-          <a:p/>
+          <a:lstStyle/>
+          <a:p>
+            <a:endParaRPr/>
+          </a:p>
         </p:txBody>
       </p:sp>
       <p:sp>
@@ -2609,7 +2412,10 @@
         </p:spPr>
         <p:txBody>
           <a:bodyPr/>
-          <a:p/>
+          <a:lstStyle/>
+          <a:p>
+            <a:endParaRPr/>
+          </a:p>
         </p:txBody>
       </p:sp>
       <p:sp>
@@ -2635,7 +2441,10 @@
         </p:spPr>
         <p:txBody>
           <a:bodyPr/>
-          <a:p/>
+          <a:lstStyle/>
+          <a:p>
+            <a:endParaRPr/>
+          </a:p>
         </p:txBody>
       </p:sp>
       <p:sp>
@@ -2661,7 +2470,10 @@
         </p:spPr>
         <p:txBody>
           <a:bodyPr/>
-          <a:p/>
+          <a:lstStyle/>
+          <a:p>
+            <a:endParaRPr/>
+          </a:p>
         </p:txBody>
       </p:sp>
       <p:sp>
@@ -2687,7 +2499,10 @@
         </p:spPr>
         <p:txBody>
           <a:bodyPr/>
-          <a:p/>
+          <a:lstStyle/>
+          <a:p>
+            <a:endParaRPr/>
+          </a:p>
         </p:txBody>
       </p:sp>
       <p:sp>
@@ -2713,7 +2528,10 @@
         </p:spPr>
         <p:txBody>
           <a:bodyPr/>
-          <a:p/>
+          <a:lstStyle/>
+          <a:p>
+            <a:endParaRPr/>
+          </a:p>
         </p:txBody>
       </p:sp>
       <p:sp>
@@ -2739,7 +2557,10 @@
         </p:spPr>
         <p:txBody>
           <a:bodyPr/>
-          <a:p/>
+          <a:lstStyle/>
+          <a:p>
+            <a:endParaRPr/>
+          </a:p>
         </p:txBody>
       </p:sp>
       <p:sp>
@@ -2765,7 +2586,10 @@
         </p:spPr>
         <p:txBody>
           <a:bodyPr/>
-          <a:p/>
+          <a:lstStyle/>
+          <a:p>
+            <a:endParaRPr/>
+          </a:p>
         </p:txBody>
       </p:sp>
       <p:sp>
@@ -2791,7 +2615,10 @@
         </p:spPr>
         <p:txBody>
           <a:bodyPr/>
-          <a:p/>
+          <a:lstStyle/>
+          <a:p>
+            <a:endParaRPr/>
+          </a:p>
         </p:txBody>
       </p:sp>
       <p:sp>
@@ -2817,7 +2644,10 @@
         </p:spPr>
         <p:txBody>
           <a:bodyPr/>
-          <a:p/>
+          <a:lstStyle/>
+          <a:p>
+            <a:endParaRPr/>
+          </a:p>
         </p:txBody>
       </p:sp>
       <p:sp>
@@ -2843,7 +2673,10 @@
         </p:spPr>
         <p:txBody>
           <a:bodyPr/>
-          <a:p/>
+          <a:lstStyle/>
+          <a:p>
+            <a:endParaRPr/>
+          </a:p>
         </p:txBody>
       </p:sp>
       <p:sp>
@@ -2869,7 +2702,10 @@
         </p:spPr>
         <p:txBody>
           <a:bodyPr/>
-          <a:p/>
+          <a:lstStyle/>
+          <a:p>
+            <a:endParaRPr/>
+          </a:p>
         </p:txBody>
       </p:sp>
       <p:sp>
@@ -2895,7 +2731,10 @@
         </p:spPr>
         <p:txBody>
           <a:bodyPr/>
-          <a:p/>
+          <a:lstStyle/>
+          <a:p>
+            <a:endParaRPr/>
+          </a:p>
         </p:txBody>
       </p:sp>
       <p:sp>
@@ -2921,7 +2760,10 @@
         </p:spPr>
         <p:txBody>
           <a:bodyPr/>
-          <a:p/>
+          <a:lstStyle/>
+          <a:p>
+            <a:endParaRPr/>
+          </a:p>
         </p:txBody>
       </p:sp>
       <p:sp>
@@ -2945,19 +2787,22 @@
         </p:spPr>
         <p:txBody>
           <a:bodyPr/>
-          <a:p/>
+          <a:lstStyle/>
+          <a:p>
+            <a:endParaRPr/>
+          </a:p>
         </p:txBody>
       </p:sp>
       <p:pic>
         <p:nvPicPr>
-          <p:cNvPr id="27" name="Image 0" descr="preencoded.png">    </p:cNvPr>
+          <p:cNvPr id="27" name="Image 0" descr="preencoded.png"/>
           <p:cNvPicPr>
             <a:picLocks noChangeAspect="1"/>
           </p:cNvPicPr>
           <p:nvPr/>
         </p:nvPicPr>
         <p:blipFill>
-          <a:blip r:embed="rId1"/>
+          <a:blip r:embed="rId3"/>
           <a:stretch>
             <a:fillRect/>
           </a:stretch>
@@ -2993,11 +2838,11 @@
           <a:bodyPr wrap="square" lIns="0" tIns="0" rIns="0" bIns="0" rtlCol="0" anchor="ctr"/>
           <a:lstStyle/>
           <a:p>
-            <a:pPr indent="0" marL="0">
-              <a:buNone/>
-            </a:pPr>
-            <a:r>
-              <a:rPr lang="en-US" sz="1200" b="1" spc="300" kern="0" dirty="0">
+            <a:pPr marL="0" indent="0">
+              <a:buNone/>
+            </a:pPr>
+            <a:r>
+              <a:rPr lang="en-US" sz="1200" b="1" kern="0" spc="300" dirty="0">
                 <a:solidFill>
                   <a:srgbClr val="2DD4BF"/>
                 </a:solidFill>
@@ -3032,7 +2877,7 @@
           <a:bodyPr wrap="square" lIns="0" tIns="0" rIns="0" bIns="0" rtlCol="0" anchor="ctr"/>
           <a:lstStyle/>
           <a:p>
-            <a:pPr indent="0" marL="0">
+            <a:pPr marL="0" indent="0">
               <a:buNone/>
             </a:pPr>
             <a:r>
@@ -3071,7 +2916,7 @@
           <a:bodyPr wrap="square" lIns="0" tIns="0" rIns="0" bIns="0" rtlCol="0" anchor="ctr"/>
           <a:lstStyle/>
           <a:p>
-            <a:pPr indent="0" marL="0">
+            <a:pPr marL="0" indent="0">
               <a:buNone/>
             </a:pPr>
             <a:r>
@@ -3110,7 +2955,7 @@
           <a:bodyPr wrap="square" lIns="0" tIns="0" rIns="0" bIns="0" rtlCol="0" anchor="ctr"/>
           <a:lstStyle/>
           <a:p>
-            <a:pPr indent="0" marL="0">
+            <a:pPr marL="0" indent="0">
               <a:buNone/>
             </a:pPr>
             <a:r>
@@ -3124,9 +2969,6 @@
               </a:rPr>
               <a:t>garak · AgentDojo · PyRIT</a:t>
             </a:r>
-            <a:pPr indent="0" marL="0">
-              <a:buNone/>
-            </a:pPr>
             <a:r>
               <a:rPr lang="en-US" sz="1250" dirty="0">
                 <a:solidFill>
@@ -3138,9 +2980,6 @@
               </a:rPr>
               <a:t>    |    </a:t>
             </a:r>
-            <a:pPr indent="0" marL="0">
-              <a:buNone/>
-            </a:pPr>
             <a:r>
               <a:rPr lang="en-US" sz="1250" dirty="0">
                 <a:solidFill>
@@ -3177,7 +3016,7 @@
           <a:bodyPr wrap="square" lIns="0" tIns="0" rIns="0" bIns="0" rtlCol="0" anchor="ctr"/>
           <a:lstStyle/>
           <a:p>
-            <a:pPr indent="0" marL="0">
+            <a:pPr marL="0" indent="0">
               <a:buNone/>
             </a:pPr>
             <a:r>
@@ -3211,6 +3050,7 @@
         <a:solidFill>
           <a:srgbClr val="FFFFFF"/>
         </a:solidFill>
+        <a:effectLst/>
       </p:bgPr>
     </p:bg>
     <p:spTree>
@@ -3246,7 +3086,7 @@
           </a:solidFill>
           <a:ln/>
           <a:effectLst>
-            <a:outerShdw sx="100000" sy="100000" kx="0" ky="0" algn="bl" rotWithShape="0" blurRad="63500" dist="25400" dir="5400000">
+            <a:outerShdw blurRad="63500" dist="25400" dir="5400000" algn="bl" rotWithShape="0">
               <a:srgbClr val="0B2E29">
                 <a:alpha val="18000"/>
               </a:srgbClr>
@@ -3255,19 +3095,22 @@
         </p:spPr>
         <p:txBody>
           <a:bodyPr/>
-          <a:p/>
+          <a:lstStyle/>
+          <a:p>
+            <a:endParaRPr/>
+          </a:p>
         </p:txBody>
       </p:sp>
       <p:pic>
         <p:nvPicPr>
-          <p:cNvPr id="3" name="Image 0" descr="preencoded.png">    </p:cNvPr>
+          <p:cNvPr id="3" name="Image 0" descr="preencoded.png"/>
           <p:cNvPicPr>
             <a:picLocks noChangeAspect="1"/>
           </p:cNvPicPr>
           <p:nvPr/>
         </p:nvPicPr>
         <p:blipFill>
-          <a:blip r:embed="rId1"/>
+          <a:blip r:embed="rId3"/>
           <a:stretch>
             <a:fillRect/>
           </a:stretch>
@@ -3303,11 +3146,11 @@
           <a:bodyPr wrap="square" lIns="0" tIns="0" rIns="0" bIns="0" rtlCol="0" anchor="ctr"/>
           <a:lstStyle/>
           <a:p>
-            <a:pPr indent="0" marL="0">
-              <a:buNone/>
-            </a:pPr>
-            <a:r>
-              <a:rPr lang="en-US" sz="1050" b="1" spc="200" kern="0" dirty="0">
+            <a:pPr marL="0" indent="0">
+              <a:buNone/>
+            </a:pPr>
+            <a:r>
+              <a:rPr lang="en-US" sz="1050" b="1" kern="0" spc="200" dirty="0">
                 <a:solidFill>
                   <a:srgbClr val="0E7C66"/>
                 </a:solidFill>
@@ -3342,7 +3185,7 @@
           <a:bodyPr wrap="square" lIns="0" tIns="0" rIns="0" bIns="0" rtlCol="0" anchor="ctr"/>
           <a:lstStyle/>
           <a:p>
-            <a:pPr indent="0" marL="0">
+            <a:pPr marL="0" indent="0">
               <a:buNone/>
             </a:pPr>
             <a:r>
@@ -3362,14 +3205,14 @@
       </p:sp>
       <p:pic>
         <p:nvPicPr>
-          <p:cNvPr id="6" name="Image 1" descr="/home/claude/deck/arch.png">    </p:cNvPr>
+          <p:cNvPr id="6" name="Image 1" descr="/home/claude/deck/arch.png"/>
           <p:cNvPicPr>
             <a:picLocks noChangeAspect="1"/>
           </p:cNvPicPr>
           <p:nvPr/>
         </p:nvPicPr>
         <p:blipFill>
-          <a:blip r:embed="rId2"/>
+          <a:blip r:embed="rId4"/>
           <a:stretch>
             <a:fillRect/>
           </a:stretch>
@@ -3405,7 +3248,7 @@
           <a:bodyPr wrap="square" lIns="0" tIns="0" rIns="0" bIns="0" rtlCol="0" anchor="ctr"/>
           <a:lstStyle/>
           <a:p>
-            <a:pPr algn="l" indent="0" marL="0">
+            <a:pPr marL="0" indent="0" algn="l">
               <a:buNone/>
             </a:pPr>
             <a:r>
@@ -3444,7 +3287,7 @@
           <a:bodyPr wrap="square" lIns="0" tIns="0" rIns="0" bIns="0" rtlCol="0" anchor="ctr"/>
           <a:lstStyle/>
           <a:p>
-            <a:pPr algn="r" indent="0" marL="0">
+            <a:pPr marL="0" indent="0" algn="r">
               <a:buNone/>
             </a:pPr>
             <a:r>
@@ -3478,6 +3321,7 @@
         <a:solidFill>
           <a:srgbClr val="FFFFFF"/>
         </a:solidFill>
+        <a:effectLst/>
       </p:bgPr>
     </p:bg>
     <p:spTree>
@@ -3513,7 +3357,7 @@
           </a:solidFill>
           <a:ln/>
           <a:effectLst>
-            <a:outerShdw sx="100000" sy="100000" kx="0" ky="0" algn="bl" rotWithShape="0" blurRad="63500" dist="25400" dir="5400000">
+            <a:outerShdw blurRad="63500" dist="25400" dir="5400000" algn="bl" rotWithShape="0">
               <a:srgbClr val="0B2E29">
                 <a:alpha val="18000"/>
               </a:srgbClr>
@@ -3522,19 +3366,22 @@
         </p:spPr>
         <p:txBody>
           <a:bodyPr/>
-          <a:p/>
+          <a:lstStyle/>
+          <a:p>
+            <a:endParaRPr/>
+          </a:p>
         </p:txBody>
       </p:sp>
       <p:pic>
         <p:nvPicPr>
-          <p:cNvPr id="3" name="Image 0" descr="preencoded.png">    </p:cNvPr>
+          <p:cNvPr id="3" name="Image 0" descr="preencoded.png"/>
           <p:cNvPicPr>
             <a:picLocks noChangeAspect="1"/>
           </p:cNvPicPr>
           <p:nvPr/>
         </p:nvPicPr>
         <p:blipFill>
-          <a:blip r:embed="rId1"/>
+          <a:blip r:embed="rId3"/>
           <a:stretch>
             <a:fillRect/>
           </a:stretch>
@@ -3570,11 +3417,11 @@
           <a:bodyPr wrap="square" lIns="0" tIns="0" rIns="0" bIns="0" rtlCol="0" anchor="ctr"/>
           <a:lstStyle/>
           <a:p>
-            <a:pPr indent="0" marL="0">
-              <a:buNone/>
-            </a:pPr>
-            <a:r>
-              <a:rPr lang="en-US" sz="1050" b="1" spc="200" kern="0" dirty="0">
+            <a:pPr marL="0" indent="0">
+              <a:buNone/>
+            </a:pPr>
+            <a:r>
+              <a:rPr lang="en-US" sz="1050" b="1" kern="0" spc="200" dirty="0">
                 <a:solidFill>
                   <a:srgbClr val="0E7C66"/>
                 </a:solidFill>
@@ -3609,7 +3456,7 @@
           <a:bodyPr wrap="square" lIns="0" tIns="0" rIns="0" bIns="0" rtlCol="0" anchor="ctr"/>
           <a:lstStyle/>
           <a:p>
-            <a:pPr indent="0" marL="0">
+            <a:pPr marL="0" indent="0">
               <a:buNone/>
             </a:pPr>
             <a:r>
@@ -3648,7 +3495,7 @@
           <a:bodyPr wrap="square" lIns="0" tIns="0" rIns="0" bIns="0" rtlCol="0" anchor="ctr"/>
           <a:lstStyle/>
           <a:p>
-            <a:pPr indent="0" marL="0">
+            <a:pPr marL="0" indent="0">
               <a:lnSpc>
                 <a:spcPct val="108000"/>
               </a:lnSpc>
@@ -3690,7 +3537,7 @@
           <a:bodyPr wrap="square" lIns="0" tIns="0" rIns="0" bIns="0" rtlCol="0" anchor="ctr"/>
           <a:lstStyle/>
           <a:p>
-            <a:pPr algn="l" indent="0" marL="0">
+            <a:pPr marL="0" indent="0" algn="l">
               <a:lnSpc>
                 <a:spcPct val="100000"/>
               </a:lnSpc>
@@ -3710,7 +3557,7 @@
             <a:endParaRPr lang="en-US" sz="1800" dirty="0"/>
           </a:p>
           <a:p>
-            <a:pPr algn="l" indent="0" marL="0">
+            <a:pPr marL="0" indent="0" algn="l">
               <a:lnSpc>
                 <a:spcPct val="100000"/>
               </a:lnSpc>
@@ -3730,7 +3577,7 @@
             <a:endParaRPr lang="en-US" sz="1800" dirty="0"/>
           </a:p>
           <a:p>
-            <a:pPr algn="l" indent="0" marL="0">
+            <a:pPr marL="0" indent="0" algn="l">
               <a:lnSpc>
                 <a:spcPct val="100000"/>
               </a:lnSpc>
@@ -3772,7 +3619,7 @@
           <a:bodyPr wrap="square" lIns="0" tIns="0" rIns="0" bIns="0" rtlCol="0" anchor="ctr"/>
           <a:lstStyle/>
           <a:p>
-            <a:pPr indent="0" marL="0">
+            <a:pPr marL="0" indent="0">
               <a:buNone/>
             </a:pPr>
             <a:r>
@@ -3811,7 +3658,7 @@
           <a:bodyPr wrap="square" lIns="0" tIns="0" rIns="0" bIns="0" rtlCol="0" anchor="ctr"/>
           <a:lstStyle/>
           <a:p>
-            <a:pPr indent="0" marL="0">
+            <a:pPr marL="0" indent="0">
               <a:buNone/>
             </a:pPr>
             <a:r>
@@ -3857,7 +3704,10 @@
         </p:spPr>
         <p:txBody>
           <a:bodyPr/>
-          <a:p/>
+          <a:lstStyle/>
+          <a:p>
+            <a:endParaRPr/>
+          </a:p>
         </p:txBody>
       </p:sp>
       <p:sp>
@@ -3881,7 +3731,7 @@
           <a:bodyPr wrap="square" lIns="0" tIns="0" rIns="0" bIns="0" rtlCol="0" anchor="ctr"/>
           <a:lstStyle/>
           <a:p>
-            <a:pPr indent="0" marL="0">
+            <a:pPr marL="0" indent="0">
               <a:buNone/>
             </a:pPr>
             <a:r>
@@ -3922,7 +3772,10 @@
         </p:spPr>
         <p:txBody>
           <a:bodyPr/>
-          <a:p/>
+          <a:lstStyle/>
+          <a:p>
+            <a:endParaRPr/>
+          </a:p>
         </p:txBody>
       </p:sp>
       <p:sp>
@@ -3946,7 +3799,7 @@
           <a:bodyPr wrap="square" lIns="0" tIns="0" rIns="0" bIns="0" rtlCol="0" anchor="ctr"/>
           <a:lstStyle/>
           <a:p>
-            <a:pPr algn="ctr" indent="0" marL="0">
+            <a:pPr marL="0" indent="0" algn="ctr">
               <a:buNone/>
             </a:pPr>
             <a:r>
@@ -3992,7 +3845,10 @@
         </p:spPr>
         <p:txBody>
           <a:bodyPr/>
-          <a:p/>
+          <a:lstStyle/>
+          <a:p>
+            <a:endParaRPr/>
+          </a:p>
         </p:txBody>
       </p:sp>
       <p:sp>
@@ -4016,7 +3872,7 @@
           <a:bodyPr wrap="square" lIns="0" tIns="0" rIns="0" bIns="0" rtlCol="0" anchor="ctr"/>
           <a:lstStyle/>
           <a:p>
-            <a:pPr indent="0" marL="0">
+            <a:pPr marL="0" indent="0">
               <a:buNone/>
             </a:pPr>
             <a:r>
@@ -4057,7 +3913,10 @@
         </p:spPr>
         <p:txBody>
           <a:bodyPr/>
-          <a:p/>
+          <a:lstStyle/>
+          <a:p>
+            <a:endParaRPr/>
+          </a:p>
         </p:txBody>
       </p:sp>
       <p:sp>
@@ -4081,7 +3940,7 @@
           <a:bodyPr wrap="square" lIns="0" tIns="0" rIns="0" bIns="0" rtlCol="0" anchor="ctr"/>
           <a:lstStyle/>
           <a:p>
-            <a:pPr algn="ctr" indent="0" marL="0">
+            <a:pPr marL="0" indent="0" algn="ctr">
               <a:buNone/>
             </a:pPr>
             <a:r>
@@ -4127,7 +3986,10 @@
         </p:spPr>
         <p:txBody>
           <a:bodyPr/>
-          <a:p/>
+          <a:lstStyle/>
+          <a:p>
+            <a:endParaRPr/>
+          </a:p>
         </p:txBody>
       </p:sp>
       <p:sp>
@@ -4151,7 +4013,7 @@
           <a:bodyPr wrap="square" lIns="0" tIns="0" rIns="0" bIns="0" rtlCol="0" anchor="ctr"/>
           <a:lstStyle/>
           <a:p>
-            <a:pPr indent="0" marL="0">
+            <a:pPr marL="0" indent="0">
               <a:buNone/>
             </a:pPr>
             <a:r>
@@ -4192,7 +4054,10 @@
         </p:spPr>
         <p:txBody>
           <a:bodyPr/>
-          <a:p/>
+          <a:lstStyle/>
+          <a:p>
+            <a:endParaRPr/>
+          </a:p>
         </p:txBody>
       </p:sp>
       <p:sp>
@@ -4216,7 +4081,7 @@
           <a:bodyPr wrap="square" lIns="0" tIns="0" rIns="0" bIns="0" rtlCol="0" anchor="ctr"/>
           <a:lstStyle/>
           <a:p>
-            <a:pPr algn="ctr" indent="0" marL="0">
+            <a:pPr marL="0" indent="0" algn="ctr">
               <a:buNone/>
             </a:pPr>
             <a:r>
@@ -4262,7 +4127,10 @@
         </p:spPr>
         <p:txBody>
           <a:bodyPr/>
-          <a:p/>
+          <a:lstStyle/>
+          <a:p>
+            <a:endParaRPr/>
+          </a:p>
         </p:txBody>
       </p:sp>
       <p:sp>
@@ -4286,7 +4154,7 @@
           <a:bodyPr wrap="square" lIns="0" tIns="0" rIns="0" bIns="0" rtlCol="0" anchor="ctr"/>
           <a:lstStyle/>
           <a:p>
-            <a:pPr indent="0" marL="0">
+            <a:pPr marL="0" indent="0">
               <a:buNone/>
             </a:pPr>
             <a:r>
@@ -4327,7 +4195,10 @@
         </p:spPr>
         <p:txBody>
           <a:bodyPr/>
-          <a:p/>
+          <a:lstStyle/>
+          <a:p>
+            <a:endParaRPr/>
+          </a:p>
         </p:txBody>
       </p:sp>
       <p:sp>
@@ -4351,7 +4222,7 @@
           <a:bodyPr wrap="square" lIns="0" tIns="0" rIns="0" bIns="0" rtlCol="0" anchor="ctr"/>
           <a:lstStyle/>
           <a:p>
-            <a:pPr algn="ctr" indent="0" marL="0">
+            <a:pPr marL="0" indent="0" algn="ctr">
               <a:buNone/>
             </a:pPr>
             <a:r>
@@ -4397,7 +4268,10 @@
         </p:spPr>
         <p:txBody>
           <a:bodyPr/>
-          <a:p/>
+          <a:lstStyle/>
+          <a:p>
+            <a:endParaRPr/>
+          </a:p>
         </p:txBody>
       </p:sp>
       <p:sp>
@@ -4421,7 +4295,7 @@
           <a:bodyPr wrap="square" lIns="0" tIns="0" rIns="0" bIns="0" rtlCol="0" anchor="ctr"/>
           <a:lstStyle/>
           <a:p>
-            <a:pPr indent="0" marL="0">
+            <a:pPr marL="0" indent="0">
               <a:buNone/>
             </a:pPr>
             <a:r>
@@ -4462,7 +4336,10 @@
         </p:spPr>
         <p:txBody>
           <a:bodyPr/>
-          <a:p/>
+          <a:lstStyle/>
+          <a:p>
+            <a:endParaRPr/>
+          </a:p>
         </p:txBody>
       </p:sp>
       <p:sp>
@@ -4486,7 +4363,7 @@
           <a:bodyPr wrap="square" lIns="0" tIns="0" rIns="0" bIns="0" rtlCol="0" anchor="ctr"/>
           <a:lstStyle/>
           <a:p>
-            <a:pPr algn="ctr" indent="0" marL="0">
+            <a:pPr marL="0" indent="0" algn="ctr">
               <a:buNone/>
             </a:pPr>
             <a:r>
@@ -4532,7 +4409,10 @@
         </p:spPr>
         <p:txBody>
           <a:bodyPr/>
-          <a:p/>
+          <a:lstStyle/>
+          <a:p>
+            <a:endParaRPr/>
+          </a:p>
         </p:txBody>
       </p:sp>
       <p:sp>
@@ -4556,7 +4436,7 @@
           <a:bodyPr wrap="square" lIns="0" tIns="0" rIns="0" bIns="0" rtlCol="0" anchor="ctr"/>
           <a:lstStyle/>
           <a:p>
-            <a:pPr indent="0" marL="0">
+            <a:pPr marL="0" indent="0">
               <a:buNone/>
             </a:pPr>
             <a:r>
@@ -4597,7 +4477,10 @@
         </p:spPr>
         <p:txBody>
           <a:bodyPr/>
-          <a:p/>
+          <a:lstStyle/>
+          <a:p>
+            <a:endParaRPr/>
+          </a:p>
         </p:txBody>
       </p:sp>
       <p:sp>
@@ -4621,7 +4504,7 @@
           <a:bodyPr wrap="square" lIns="0" tIns="0" rIns="0" bIns="0" rtlCol="0" anchor="ctr"/>
           <a:lstStyle/>
           <a:p>
-            <a:pPr algn="ctr" indent="0" marL="0">
+            <a:pPr marL="0" indent="0" algn="ctr">
               <a:buNone/>
             </a:pPr>
             <a:r>
@@ -4660,7 +4543,7 @@
           <a:bodyPr wrap="square" lIns="0" tIns="0" rIns="0" bIns="0" rtlCol="0" anchor="ctr"/>
           <a:lstStyle/>
           <a:p>
-            <a:pPr algn="l" indent="0" marL="0">
+            <a:pPr marL="0" indent="0" algn="l">
               <a:buNone/>
             </a:pPr>
             <a:r>
@@ -4699,7 +4582,7 @@
           <a:bodyPr wrap="square" lIns="0" tIns="0" rIns="0" bIns="0" rtlCol="0" anchor="ctr"/>
           <a:lstStyle/>
           <a:p>
-            <a:pPr algn="r" indent="0" marL="0">
+            <a:pPr marL="0" indent="0" algn="r">
               <a:buNone/>
             </a:pPr>
             <a:r>
@@ -4733,6 +4616,7 @@
         <a:solidFill>
           <a:srgbClr val="FFFFFF"/>
         </a:solidFill>
+        <a:effectLst/>
       </p:bgPr>
     </p:bg>
     <p:spTree>
@@ -4768,7 +4652,7 @@
           </a:solidFill>
           <a:ln/>
           <a:effectLst>
-            <a:outerShdw sx="100000" sy="100000" kx="0" ky="0" algn="bl" rotWithShape="0" blurRad="63500" dist="25400" dir="5400000">
+            <a:outerShdw blurRad="63500" dist="25400" dir="5400000" algn="bl" rotWithShape="0">
               <a:srgbClr val="0B2E29">
                 <a:alpha val="18000"/>
               </a:srgbClr>
@@ -4777,19 +4661,22 @@
         </p:spPr>
         <p:txBody>
           <a:bodyPr/>
-          <a:p/>
+          <a:lstStyle/>
+          <a:p>
+            <a:endParaRPr/>
+          </a:p>
         </p:txBody>
       </p:sp>
       <p:pic>
         <p:nvPicPr>
-          <p:cNvPr id="3" name="Image 0" descr="preencoded.png">    </p:cNvPr>
+          <p:cNvPr id="3" name="Image 0" descr="preencoded.png"/>
           <p:cNvPicPr>
             <a:picLocks noChangeAspect="1"/>
           </p:cNvPicPr>
           <p:nvPr/>
         </p:nvPicPr>
         <p:blipFill>
-          <a:blip r:embed="rId1"/>
+          <a:blip r:embed="rId3"/>
           <a:stretch>
             <a:fillRect/>
           </a:stretch>
@@ -4825,11 +4712,11 @@
           <a:bodyPr wrap="square" lIns="0" tIns="0" rIns="0" bIns="0" rtlCol="0" anchor="ctr"/>
           <a:lstStyle/>
           <a:p>
-            <a:pPr indent="0" marL="0">
-              <a:buNone/>
-            </a:pPr>
-            <a:r>
-              <a:rPr lang="en-US" sz="1050" b="1" spc="200" kern="0" dirty="0">
+            <a:pPr marL="0" indent="0">
+              <a:buNone/>
+            </a:pPr>
+            <a:r>
+              <a:rPr lang="en-US" sz="1050" b="1" kern="0" spc="200" dirty="0">
                 <a:solidFill>
                   <a:srgbClr val="0E7C66"/>
                 </a:solidFill>
@@ -4864,7 +4751,7 @@
           <a:bodyPr wrap="square" lIns="0" tIns="0" rIns="0" bIns="0" rtlCol="0" anchor="ctr"/>
           <a:lstStyle/>
           <a:p>
-            <a:pPr indent="0" marL="0">
+            <a:pPr marL="0" indent="0">
               <a:buNone/>
             </a:pPr>
             <a:r>
@@ -4908,7 +4795,7 @@
             <a:prstDash val="solid"/>
           </a:ln>
           <a:effectLst>
-            <a:outerShdw sx="100000" sy="100000" kx="0" ky="0" algn="bl" rotWithShape="0" blurRad="76200" dist="25400" dir="5400000">
+            <a:outerShdw blurRad="76200" dist="25400" dir="5400000" algn="bl" rotWithShape="0">
               <a:srgbClr val="0B2E29">
                 <a:alpha val="10000"/>
               </a:srgbClr>
@@ -4917,7 +4804,10 @@
         </p:spPr>
         <p:txBody>
           <a:bodyPr/>
-          <a:p/>
+          <a:lstStyle/>
+          <a:p>
+            <a:endParaRPr/>
+          </a:p>
         </p:txBody>
       </p:sp>
       <p:sp>
@@ -4941,7 +4831,7 @@
           <a:bodyPr wrap="square" lIns="0" tIns="0" rIns="0" bIns="0" rtlCol="0" anchor="ctr"/>
           <a:lstStyle/>
           <a:p>
-            <a:pPr indent="0" marL="0">
+            <a:pPr marL="0" indent="0">
               <a:lnSpc>
                 <a:spcPct val="112000"/>
               </a:lnSpc>
@@ -4961,7 +4851,7 @@
             <a:endParaRPr lang="en-US" sz="1250" dirty="0"/>
           </a:p>
           <a:p>
-            <a:pPr indent="0" marL="0">
+            <a:pPr marL="0" indent="0">
               <a:lnSpc>
                 <a:spcPct val="112000"/>
               </a:lnSpc>
@@ -4981,7 +4871,7 @@
             <a:endParaRPr lang="en-US" sz="1250" dirty="0"/>
           </a:p>
           <a:p>
-            <a:pPr indent="0" marL="0">
+            <a:pPr marL="0" indent="0">
               <a:lnSpc>
                 <a:spcPct val="112000"/>
               </a:lnSpc>
@@ -5001,7 +4891,7 @@
             <a:endParaRPr lang="en-US" sz="1250" dirty="0"/>
           </a:p>
           <a:p>
-            <a:pPr indent="0" marL="0">
+            <a:pPr marL="0" indent="0">
               <a:lnSpc>
                 <a:spcPct val="112000"/>
               </a:lnSpc>
@@ -5021,7 +4911,7 @@
             <a:endParaRPr lang="en-US" sz="1250" dirty="0"/>
           </a:p>
           <a:p>
-            <a:pPr indent="0" marL="0">
+            <a:pPr marL="0" indent="0">
               <a:lnSpc>
                 <a:spcPct val="112000"/>
               </a:lnSpc>
@@ -5041,7 +4931,7 @@
             <a:endParaRPr lang="en-US" sz="1250" dirty="0"/>
           </a:p>
           <a:p>
-            <a:pPr indent="0" marL="0">
+            <a:pPr marL="0" indent="0">
               <a:lnSpc>
                 <a:spcPct val="112000"/>
               </a:lnSpc>
@@ -5061,7 +4951,7 @@
             <a:endParaRPr lang="en-US" sz="1250" dirty="0"/>
           </a:p>
           <a:p>
-            <a:pPr indent="0" marL="0">
+            <a:pPr marL="0" indent="0">
               <a:lnSpc>
                 <a:spcPct val="112000"/>
               </a:lnSpc>
@@ -5108,7 +4998,7 @@
             <a:prstDash val="solid"/>
           </a:ln>
           <a:effectLst>
-            <a:outerShdw sx="100000" sy="100000" kx="0" ky="0" algn="bl" rotWithShape="0" blurRad="76200" dist="25400" dir="5400000">
+            <a:outerShdw blurRad="76200" dist="25400" dir="5400000" algn="bl" rotWithShape="0">
               <a:srgbClr val="0B2E29">
                 <a:alpha val="10000"/>
               </a:srgbClr>
@@ -5117,7 +5007,10 @@
         </p:spPr>
         <p:txBody>
           <a:bodyPr/>
-          <a:p/>
+          <a:lstStyle/>
+          <a:p>
+            <a:endParaRPr/>
+          </a:p>
         </p:txBody>
       </p:sp>
       <p:sp>
@@ -5141,19 +5034,22 @@
         </p:spPr>
         <p:txBody>
           <a:bodyPr/>
-          <a:p/>
+          <a:lstStyle/>
+          <a:p>
+            <a:endParaRPr/>
+          </a:p>
         </p:txBody>
       </p:sp>
       <p:pic>
         <p:nvPicPr>
-          <p:cNvPr id="10" name="Image 1" descr="preencoded.png">    </p:cNvPr>
+          <p:cNvPr id="10" name="Image 1" descr="preencoded.png"/>
           <p:cNvPicPr>
             <a:picLocks noChangeAspect="1"/>
           </p:cNvPicPr>
           <p:nvPr/>
         </p:nvPicPr>
         <p:blipFill>
-          <a:blip r:embed="rId2"/>
+          <a:blip r:embed="rId4"/>
           <a:stretch>
             <a:fillRect/>
           </a:stretch>
@@ -5189,7 +5085,7 @@
           <a:bodyPr wrap="square" lIns="0" tIns="0" rIns="0" bIns="0" rtlCol="0" anchor="ctr"/>
           <a:lstStyle/>
           <a:p>
-            <a:pPr indent="0" marL="0">
+            <a:pPr marL="0" indent="0">
               <a:lnSpc>
                 <a:spcPct val="102000"/>
               </a:lnSpc>
@@ -5206,12 +5102,6 @@
               </a:rPr>
               <a:t>Passes  </a:t>
             </a:r>
-            <a:pPr indent="0" marL="0">
-              <a:lnSpc>
-                <a:spcPct val="102000"/>
-              </a:lnSpc>
-              <a:buNone/>
-            </a:pPr>
             <a:r>
               <a:rPr lang="en-US" sz="1150" dirty="0">
                 <a:solidFill>
@@ -5253,7 +5143,7 @@
             <a:prstDash val="solid"/>
           </a:ln>
           <a:effectLst>
-            <a:outerShdw sx="100000" sy="100000" kx="0" ky="0" algn="bl" rotWithShape="0" blurRad="76200" dist="25400" dir="5400000">
+            <a:outerShdw blurRad="76200" dist="25400" dir="5400000" algn="bl" rotWithShape="0">
               <a:srgbClr val="0B2E29">
                 <a:alpha val="10000"/>
               </a:srgbClr>
@@ -5262,7 +5152,10 @@
         </p:spPr>
         <p:txBody>
           <a:bodyPr/>
-          <a:p/>
+          <a:lstStyle/>
+          <a:p>
+            <a:endParaRPr/>
+          </a:p>
         </p:txBody>
       </p:sp>
       <p:sp>
@@ -5286,19 +5179,22 @@
         </p:spPr>
         <p:txBody>
           <a:bodyPr/>
-          <a:p/>
+          <a:lstStyle/>
+          <a:p>
+            <a:endParaRPr/>
+          </a:p>
         </p:txBody>
       </p:sp>
       <p:pic>
         <p:nvPicPr>
-          <p:cNvPr id="14" name="Image 2" descr="preencoded.png">    </p:cNvPr>
+          <p:cNvPr id="14" name="Image 2" descr="preencoded.png"/>
           <p:cNvPicPr>
             <a:picLocks noChangeAspect="1"/>
           </p:cNvPicPr>
           <p:nvPr/>
         </p:nvPicPr>
         <p:blipFill>
-          <a:blip r:embed="rId3"/>
+          <a:blip r:embed="rId4"/>
           <a:stretch>
             <a:fillRect/>
           </a:stretch>
@@ -5334,7 +5230,7 @@
           <a:bodyPr wrap="square" lIns="0" tIns="0" rIns="0" bIns="0" rtlCol="0" anchor="ctr"/>
           <a:lstStyle/>
           <a:p>
-            <a:pPr indent="0" marL="0">
+            <a:pPr marL="0" indent="0">
               <a:lnSpc>
                 <a:spcPct val="102000"/>
               </a:lnSpc>
@@ -5351,12 +5247,6 @@
               </a:rPr>
               <a:t>not_evidenced  </a:t>
             </a:r>
-            <a:pPr indent="0" marL="0">
-              <a:lnSpc>
-                <a:spcPct val="102000"/>
-              </a:lnSpc>
-              <a:buNone/>
-            </a:pPr>
             <a:r>
               <a:rPr lang="en-US" sz="1150" dirty="0">
                 <a:solidFill>
@@ -5398,7 +5288,7 @@
             <a:prstDash val="solid"/>
           </a:ln>
           <a:effectLst>
-            <a:outerShdw sx="100000" sy="100000" kx="0" ky="0" algn="bl" rotWithShape="0" blurRad="76200" dist="25400" dir="5400000">
+            <a:outerShdw blurRad="76200" dist="25400" dir="5400000" algn="bl" rotWithShape="0">
               <a:srgbClr val="0B2E29">
                 <a:alpha val="10000"/>
               </a:srgbClr>
@@ -5407,7 +5297,10 @@
         </p:spPr>
         <p:txBody>
           <a:bodyPr/>
-          <a:p/>
+          <a:lstStyle/>
+          <a:p>
+            <a:endParaRPr/>
+          </a:p>
         </p:txBody>
       </p:sp>
       <p:sp>
@@ -5431,7 +5324,7 @@
           <a:bodyPr wrap="square" lIns="0" tIns="0" rIns="0" bIns="0" rtlCol="0" anchor="ctr"/>
           <a:lstStyle/>
           <a:p>
-            <a:pPr indent="0" marL="0">
+            <a:pPr marL="0" indent="0">
               <a:lnSpc>
                 <a:spcPct val="105000"/>
               </a:lnSpc>
@@ -5448,12 +5341,6 @@
               </a:rPr>
               <a:t>The Phase-3 guard, again: </a:t>
             </a:r>
-            <a:pPr indent="0" marL="0">
-              <a:lnSpc>
-                <a:spcPct val="105000"/>
-              </a:lnSpc>
-              <a:buNone/>
-            </a:pPr>
             <a:r>
               <a:rPr lang="en-US" sz="1150" dirty="0">
                 <a:solidFill>
@@ -5490,7 +5377,7 @@
           <a:bodyPr wrap="square" lIns="0" tIns="0" rIns="0" bIns="0" rtlCol="0" anchor="ctr"/>
           <a:lstStyle/>
           <a:p>
-            <a:pPr algn="l" indent="0" marL="0">
+            <a:pPr marL="0" indent="0" algn="l">
               <a:buNone/>
             </a:pPr>
             <a:r>
@@ -5529,7 +5416,7 @@
           <a:bodyPr wrap="square" lIns="0" tIns="0" rIns="0" bIns="0" rtlCol="0" anchor="ctr"/>
           <a:lstStyle/>
           <a:p>
-            <a:pPr algn="r" indent="0" marL="0">
+            <a:pPr marL="0" indent="0" algn="r">
               <a:buNone/>
             </a:pPr>
             <a:r>
@@ -5563,6 +5450,7 @@
         <a:solidFill>
           <a:srgbClr val="FFFFFF"/>
         </a:solidFill>
+        <a:effectLst/>
       </p:bgPr>
     </p:bg>
     <p:spTree>
@@ -5598,7 +5486,7 @@
           </a:solidFill>
           <a:ln/>
           <a:effectLst>
-            <a:outerShdw sx="100000" sy="100000" kx="0" ky="0" algn="bl" rotWithShape="0" blurRad="63500" dist="25400" dir="5400000">
+            <a:outerShdw blurRad="63500" dist="25400" dir="5400000" algn="bl" rotWithShape="0">
               <a:srgbClr val="0B2E29">
                 <a:alpha val="18000"/>
               </a:srgbClr>
@@ -5607,19 +5495,22 @@
         </p:spPr>
         <p:txBody>
           <a:bodyPr/>
-          <a:p/>
+          <a:lstStyle/>
+          <a:p>
+            <a:endParaRPr/>
+          </a:p>
         </p:txBody>
       </p:sp>
       <p:pic>
         <p:nvPicPr>
-          <p:cNvPr id="3" name="Image 0" descr="preencoded.png">    </p:cNvPr>
+          <p:cNvPr id="3" name="Image 0" descr="preencoded.png"/>
           <p:cNvPicPr>
             <a:picLocks noChangeAspect="1"/>
           </p:cNvPicPr>
           <p:nvPr/>
         </p:nvPicPr>
         <p:blipFill>
-          <a:blip r:embed="rId1"/>
+          <a:blip r:embed="rId3"/>
           <a:stretch>
             <a:fillRect/>
           </a:stretch>
@@ -5655,11 +5546,11 @@
           <a:bodyPr wrap="square" lIns="0" tIns="0" rIns="0" bIns="0" rtlCol="0" anchor="ctr"/>
           <a:lstStyle/>
           <a:p>
-            <a:pPr indent="0" marL="0">
-              <a:buNone/>
-            </a:pPr>
-            <a:r>
-              <a:rPr lang="en-US" sz="1050" b="1" spc="200" kern="0" dirty="0">
+            <a:pPr marL="0" indent="0">
+              <a:buNone/>
+            </a:pPr>
+            <a:r>
+              <a:rPr lang="en-US" sz="1050" b="1" kern="0" spc="200" dirty="0">
                 <a:solidFill>
                   <a:srgbClr val="0E7C66"/>
                 </a:solidFill>
@@ -5694,7 +5585,7 @@
           <a:bodyPr wrap="square" lIns="0" tIns="0" rIns="0" bIns="0" rtlCol="0" anchor="ctr"/>
           <a:lstStyle/>
           <a:p>
-            <a:pPr indent="0" marL="0">
+            <a:pPr marL="0" indent="0">
               <a:buNone/>
             </a:pPr>
             <a:r>
@@ -5738,7 +5629,7 @@
             <a:prstDash val="solid"/>
           </a:ln>
           <a:effectLst>
-            <a:outerShdw sx="100000" sy="100000" kx="0" ky="0" algn="bl" rotWithShape="0" blurRad="76200" dist="25400" dir="5400000">
+            <a:outerShdw blurRad="76200" dist="25400" dir="5400000" algn="bl" rotWithShape="0">
               <a:srgbClr val="0B2E29">
                 <a:alpha val="10000"/>
               </a:srgbClr>
@@ -5747,7 +5638,10 @@
         </p:spPr>
         <p:txBody>
           <a:bodyPr/>
-          <a:p/>
+          <a:lstStyle/>
+          <a:p>
+            <a:endParaRPr/>
+          </a:p>
         </p:txBody>
       </p:sp>
       <p:sp>
@@ -5771,7 +5665,10 @@
         </p:spPr>
         <p:txBody>
           <a:bodyPr/>
-          <a:p/>
+          <a:lstStyle/>
+          <a:p>
+            <a:endParaRPr/>
+          </a:p>
         </p:txBody>
       </p:sp>
       <p:sp>
@@ -5795,7 +5692,7 @@
           <a:bodyPr wrap="square" lIns="0" tIns="0" rIns="0" bIns="0" rtlCol="0" anchor="ctr"/>
           <a:lstStyle/>
           <a:p>
-            <a:pPr algn="ctr" indent="0" marL="0">
+            <a:pPr marL="0" indent="0" algn="ctr">
               <a:buNone/>
             </a:pPr>
             <a:r>
@@ -5834,7 +5731,7 @@
           <a:bodyPr wrap="square" lIns="0" tIns="0" rIns="0" bIns="0" rtlCol="0" anchor="ctr"/>
           <a:lstStyle/>
           <a:p>
-            <a:pPr algn="ctr" indent="0" marL="0">
+            <a:pPr marL="0" indent="0" algn="ctr">
               <a:buNone/>
             </a:pPr>
             <a:r>
@@ -5873,7 +5770,7 @@
           <a:bodyPr wrap="square" lIns="0" tIns="0" rIns="0" bIns="0" rtlCol="0" anchor="ctr"/>
           <a:lstStyle/>
           <a:p>
-            <a:pPr algn="ctr" indent="0" marL="0">
+            <a:pPr marL="0" indent="0" algn="ctr">
               <a:buNone/>
             </a:pPr>
             <a:r>
@@ -5916,7 +5813,10 @@
         </p:spPr>
         <p:txBody>
           <a:bodyPr/>
-          <a:p/>
+          <a:lstStyle/>
+          <a:p>
+            <a:endParaRPr/>
+          </a:p>
         </p:txBody>
       </p:sp>
       <p:sp>
@@ -5945,7 +5845,7 @@
             <a:prstDash val="solid"/>
           </a:ln>
           <a:effectLst>
-            <a:outerShdw sx="100000" sy="100000" kx="0" ky="0" algn="bl" rotWithShape="0" blurRad="76200" dist="25400" dir="5400000">
+            <a:outerShdw blurRad="76200" dist="25400" dir="5400000" algn="bl" rotWithShape="0">
               <a:srgbClr val="0B2E29">
                 <a:alpha val="10000"/>
               </a:srgbClr>
@@ -5954,7 +5854,10 @@
         </p:spPr>
         <p:txBody>
           <a:bodyPr/>
-          <a:p/>
+          <a:lstStyle/>
+          <a:p>
+            <a:endParaRPr/>
+          </a:p>
         </p:txBody>
       </p:sp>
       <p:sp>
@@ -5978,7 +5881,10 @@
         </p:spPr>
         <p:txBody>
           <a:bodyPr/>
-          <a:p/>
+          <a:lstStyle/>
+          <a:p>
+            <a:endParaRPr/>
+          </a:p>
         </p:txBody>
       </p:sp>
       <p:sp>
@@ -6002,7 +5908,7 @@
           <a:bodyPr wrap="square" lIns="0" tIns="0" rIns="0" bIns="0" rtlCol="0" anchor="ctr"/>
           <a:lstStyle/>
           <a:p>
-            <a:pPr algn="ctr" indent="0" marL="0">
+            <a:pPr marL="0" indent="0" algn="ctr">
               <a:buNone/>
             </a:pPr>
             <a:r>
@@ -6041,7 +5947,7 @@
           <a:bodyPr wrap="square" lIns="0" tIns="0" rIns="0" bIns="0" rtlCol="0" anchor="ctr"/>
           <a:lstStyle/>
           <a:p>
-            <a:pPr algn="ctr" indent="0" marL="0">
+            <a:pPr marL="0" indent="0" algn="ctr">
               <a:buNone/>
             </a:pPr>
             <a:r>
@@ -6080,7 +5986,7 @@
           <a:bodyPr wrap="square" lIns="0" tIns="0" rIns="0" bIns="0" rtlCol="0" anchor="ctr"/>
           <a:lstStyle/>
           <a:p>
-            <a:pPr algn="ctr" indent="0" marL="0">
+            <a:pPr marL="0" indent="0" algn="ctr">
               <a:buNone/>
             </a:pPr>
             <a:r>
@@ -6123,7 +6029,10 @@
         </p:spPr>
         <p:txBody>
           <a:bodyPr/>
-          <a:p/>
+          <a:lstStyle/>
+          <a:p>
+            <a:endParaRPr/>
+          </a:p>
         </p:txBody>
       </p:sp>
       <p:sp>
@@ -6152,7 +6061,7 @@
             <a:prstDash val="solid"/>
           </a:ln>
           <a:effectLst>
-            <a:outerShdw sx="100000" sy="100000" kx="0" ky="0" algn="bl" rotWithShape="0" blurRad="76200" dist="25400" dir="5400000">
+            <a:outerShdw blurRad="76200" dist="25400" dir="5400000" algn="bl" rotWithShape="0">
               <a:srgbClr val="0B2E29">
                 <a:alpha val="10000"/>
               </a:srgbClr>
@@ -6161,7 +6070,10 @@
         </p:spPr>
         <p:txBody>
           <a:bodyPr/>
-          <a:p/>
+          <a:lstStyle/>
+          <a:p>
+            <a:endParaRPr/>
+          </a:p>
         </p:txBody>
       </p:sp>
       <p:sp>
@@ -6185,7 +6097,10 @@
         </p:spPr>
         <p:txBody>
           <a:bodyPr/>
-          <a:p/>
+          <a:lstStyle/>
+          <a:p>
+            <a:endParaRPr/>
+          </a:p>
         </p:txBody>
       </p:sp>
       <p:sp>
@@ -6209,7 +6124,7 @@
           <a:bodyPr wrap="square" lIns="0" tIns="0" rIns="0" bIns="0" rtlCol="0" anchor="ctr"/>
           <a:lstStyle/>
           <a:p>
-            <a:pPr algn="ctr" indent="0" marL="0">
+            <a:pPr marL="0" indent="0" algn="ctr">
               <a:buNone/>
             </a:pPr>
             <a:r>
@@ -6248,7 +6163,7 @@
           <a:bodyPr wrap="square" lIns="0" tIns="0" rIns="0" bIns="0" rtlCol="0" anchor="ctr"/>
           <a:lstStyle/>
           <a:p>
-            <a:pPr algn="ctr" indent="0" marL="0">
+            <a:pPr marL="0" indent="0" algn="ctr">
               <a:buNone/>
             </a:pPr>
             <a:r>
@@ -6287,7 +6202,7 @@
           <a:bodyPr wrap="square" lIns="0" tIns="0" rIns="0" bIns="0" rtlCol="0" anchor="ctr"/>
           <a:lstStyle/>
           <a:p>
-            <a:pPr algn="ctr" indent="0" marL="0">
+            <a:pPr marL="0" indent="0" algn="ctr">
               <a:buNone/>
             </a:pPr>
             <a:r>
@@ -6330,7 +6245,10 @@
         </p:spPr>
         <p:txBody>
           <a:bodyPr/>
-          <a:p/>
+          <a:lstStyle/>
+          <a:p>
+            <a:endParaRPr/>
+          </a:p>
         </p:txBody>
       </p:sp>
       <p:sp>
@@ -6359,7 +6277,7 @@
             <a:prstDash val="solid"/>
           </a:ln>
           <a:effectLst>
-            <a:outerShdw sx="100000" sy="100000" kx="0" ky="0" algn="bl" rotWithShape="0" blurRad="76200" dist="25400" dir="5400000">
+            <a:outerShdw blurRad="76200" dist="25400" dir="5400000" algn="bl" rotWithShape="0">
               <a:srgbClr val="0B2E29">
                 <a:alpha val="10000"/>
               </a:srgbClr>
@@ -6368,7 +6286,10 @@
         </p:spPr>
         <p:txBody>
           <a:bodyPr/>
-          <a:p/>
+          <a:lstStyle/>
+          <a:p>
+            <a:endParaRPr/>
+          </a:p>
         </p:txBody>
       </p:sp>
       <p:sp>
@@ -6392,7 +6313,10 @@
         </p:spPr>
         <p:txBody>
           <a:bodyPr/>
-          <a:p/>
+          <a:lstStyle/>
+          <a:p>
+            <a:endParaRPr/>
+          </a:p>
         </p:txBody>
       </p:sp>
       <p:sp>
@@ -6416,7 +6340,7 @@
           <a:bodyPr wrap="square" lIns="0" tIns="0" rIns="0" bIns="0" rtlCol="0" anchor="ctr"/>
           <a:lstStyle/>
           <a:p>
-            <a:pPr algn="ctr" indent="0" marL="0">
+            <a:pPr marL="0" indent="0" algn="ctr">
               <a:buNone/>
             </a:pPr>
             <a:r>
@@ -6455,7 +6379,7 @@
           <a:bodyPr wrap="square" lIns="0" tIns="0" rIns="0" bIns="0" rtlCol="0" anchor="ctr"/>
           <a:lstStyle/>
           <a:p>
-            <a:pPr algn="ctr" indent="0" marL="0">
+            <a:pPr marL="0" indent="0" algn="ctr">
               <a:buNone/>
             </a:pPr>
             <a:r>
@@ -6494,7 +6418,7 @@
           <a:bodyPr wrap="square" lIns="0" tIns="0" rIns="0" bIns="0" rtlCol="0" anchor="ctr"/>
           <a:lstStyle/>
           <a:p>
-            <a:pPr algn="ctr" indent="0" marL="0">
+            <a:pPr marL="0" indent="0" algn="ctr">
               <a:buNone/>
             </a:pPr>
             <a:r>
@@ -6537,7 +6461,10 @@
         </p:spPr>
         <p:txBody>
           <a:bodyPr/>
-          <a:p/>
+          <a:lstStyle/>
+          <a:p>
+            <a:endParaRPr/>
+          </a:p>
         </p:txBody>
       </p:sp>
       <p:sp>
@@ -6566,7 +6493,7 @@
             <a:prstDash val="solid"/>
           </a:ln>
           <a:effectLst>
-            <a:outerShdw sx="100000" sy="100000" kx="0" ky="0" algn="bl" rotWithShape="0" blurRad="76200" dist="25400" dir="5400000">
+            <a:outerShdw blurRad="76200" dist="25400" dir="5400000" algn="bl" rotWithShape="0">
               <a:srgbClr val="0B2E29">
                 <a:alpha val="10000"/>
               </a:srgbClr>
@@ -6575,7 +6502,10 @@
         </p:spPr>
         <p:txBody>
           <a:bodyPr/>
-          <a:p/>
+          <a:lstStyle/>
+          <a:p>
+            <a:endParaRPr/>
+          </a:p>
         </p:txBody>
       </p:sp>
       <p:sp>
@@ -6599,7 +6529,10 @@
         </p:spPr>
         <p:txBody>
           <a:bodyPr/>
-          <a:p/>
+          <a:lstStyle/>
+          <a:p>
+            <a:endParaRPr/>
+          </a:p>
         </p:txBody>
       </p:sp>
       <p:sp>
@@ -6623,7 +6556,7 @@
           <a:bodyPr wrap="square" lIns="0" tIns="0" rIns="0" bIns="0" rtlCol="0" anchor="ctr"/>
           <a:lstStyle/>
           <a:p>
-            <a:pPr algn="ctr" indent="0" marL="0">
+            <a:pPr marL="0" indent="0" algn="ctr">
               <a:buNone/>
             </a:pPr>
             <a:r>
@@ -6662,7 +6595,7 @@
           <a:bodyPr wrap="square" lIns="0" tIns="0" rIns="0" bIns="0" rtlCol="0" anchor="ctr"/>
           <a:lstStyle/>
           <a:p>
-            <a:pPr algn="ctr" indent="0" marL="0">
+            <a:pPr marL="0" indent="0" algn="ctr">
               <a:buNone/>
             </a:pPr>
             <a:r>
@@ -6701,7 +6634,7 @@
           <a:bodyPr wrap="square" lIns="0" tIns="0" rIns="0" bIns="0" rtlCol="0" anchor="ctr"/>
           <a:lstStyle/>
           <a:p>
-            <a:pPr algn="ctr" indent="0" marL="0">
+            <a:pPr marL="0" indent="0" algn="ctr">
               <a:buNone/>
             </a:pPr>
             <a:r>
@@ -6745,7 +6678,7 @@
             <a:prstDash val="solid"/>
           </a:ln>
           <a:effectLst>
-            <a:outerShdw sx="100000" sy="100000" kx="0" ky="0" algn="bl" rotWithShape="0" blurRad="76200" dist="25400" dir="5400000">
+            <a:outerShdw blurRad="76200" dist="25400" dir="5400000" algn="bl" rotWithShape="0">
               <a:srgbClr val="0B2E29">
                 <a:alpha val="10000"/>
               </a:srgbClr>
@@ -6754,7 +6687,10 @@
         </p:spPr>
         <p:txBody>
           <a:bodyPr/>
-          <a:p/>
+          <a:lstStyle/>
+          <a:p>
+            <a:endParaRPr/>
+          </a:p>
         </p:txBody>
       </p:sp>
       <p:sp>
@@ -6778,7 +6714,7 @@
           <a:bodyPr wrap="square" lIns="0" tIns="0" rIns="0" bIns="0" rtlCol="0" anchor="ctr"/>
           <a:lstStyle/>
           <a:p>
-            <a:pPr indent="0" marL="0">
+            <a:pPr marL="0" indent="0">
               <a:lnSpc>
                 <a:spcPct val="105000"/>
               </a:lnSpc>
@@ -6795,12 +6731,6 @@
               </a:rPr>
               <a:t>Our engine automates stage 3 (Assess) and feeds stage 5 (Decide). </a:t>
             </a:r>
-            <a:pPr indent="0" marL="0">
-              <a:lnSpc>
-                <a:spcPct val="105000"/>
-              </a:lnSpc>
-              <a:buNone/>
-            </a:pPr>
             <a:r>
               <a:rPr lang="en-US" sz="1250" dirty="0">
                 <a:solidFill>
@@ -6837,7 +6767,7 @@
           <a:bodyPr wrap="square" lIns="0" tIns="0" rIns="0" bIns="0" rtlCol="0" anchor="ctr"/>
           <a:lstStyle/>
           <a:p>
-            <a:pPr algn="l" indent="0" marL="0">
+            <a:pPr marL="0" indent="0" algn="l">
               <a:buNone/>
             </a:pPr>
             <a:r>
@@ -6876,7 +6806,7 @@
           <a:bodyPr wrap="square" lIns="0" tIns="0" rIns="0" bIns="0" rtlCol="0" anchor="ctr"/>
           <a:lstStyle/>
           <a:p>
-            <a:pPr algn="l" indent="0" marL="0">
+            <a:pPr marL="0" indent="0" algn="l">
               <a:buNone/>
             </a:pPr>
             <a:r>
@@ -6915,7 +6845,7 @@
           <a:bodyPr wrap="square" lIns="0" tIns="0" rIns="0" bIns="0" rtlCol="0" anchor="ctr"/>
           <a:lstStyle/>
           <a:p>
-            <a:pPr algn="r" indent="0" marL="0">
+            <a:pPr marL="0" indent="0" algn="r">
               <a:buNone/>
             </a:pPr>
             <a:r>
@@ -6949,6 +6879,7 @@
         <a:solidFill>
           <a:srgbClr val="0B2E29"/>
         </a:solidFill>
+        <a:effectLst/>
       </p:bgPr>
     </p:bg>
     <p:spTree>
@@ -6986,19 +6917,22 @@
         </p:spPr>
         <p:txBody>
           <a:bodyPr/>
-          <a:p/>
+          <a:lstStyle/>
+          <a:p>
+            <a:endParaRPr/>
+          </a:p>
         </p:txBody>
       </p:sp>
       <p:pic>
         <p:nvPicPr>
-          <p:cNvPr id="3" name="Image 0" descr="preencoded.png">    </p:cNvPr>
+          <p:cNvPr id="3" name="Image 0" descr="preencoded.png"/>
           <p:cNvPicPr>
             <a:picLocks noChangeAspect="1"/>
           </p:cNvPicPr>
           <p:nvPr/>
         </p:nvPicPr>
         <p:blipFill>
-          <a:blip r:embed="rId1"/>
+          <a:blip r:embed="rId3"/>
           <a:stretch>
             <a:fillRect/>
           </a:stretch>
@@ -7034,11 +6968,11 @@
           <a:bodyPr wrap="square" lIns="0" tIns="0" rIns="0" bIns="0" rtlCol="0" anchor="ctr"/>
           <a:lstStyle/>
           <a:p>
-            <a:pPr indent="0" marL="0">
-              <a:buNone/>
-            </a:pPr>
-            <a:r>
-              <a:rPr lang="en-US" sz="1050" b="1" spc="200" kern="0" dirty="0">
+            <a:pPr marL="0" indent="0">
+              <a:buNone/>
+            </a:pPr>
+            <a:r>
+              <a:rPr lang="en-US" sz="1050" b="1" kern="0" spc="200" dirty="0">
                 <a:solidFill>
                   <a:srgbClr val="2DD4BF"/>
                 </a:solidFill>
@@ -7073,7 +7007,7 @@
           <a:bodyPr wrap="square" lIns="0" tIns="0" rIns="0" bIns="0" rtlCol="0" anchor="ctr"/>
           <a:lstStyle/>
           <a:p>
-            <a:pPr indent="0" marL="0">
+            <a:pPr marL="0" indent="0">
               <a:buNone/>
             </a:pPr>
             <a:r>
@@ -7119,7 +7053,10 @@
         </p:spPr>
         <p:txBody>
           <a:bodyPr/>
-          <a:p/>
+          <a:lstStyle/>
+          <a:p>
+            <a:endParaRPr/>
+          </a:p>
         </p:txBody>
       </p:sp>
       <p:sp>
@@ -7143,7 +7080,7 @@
           <a:bodyPr wrap="square" lIns="0" tIns="0" rIns="0" bIns="0" rtlCol="0" anchor="ctr"/>
           <a:lstStyle/>
           <a:p>
-            <a:pPr indent="0" marL="0">
+            <a:pPr marL="0" indent="0">
               <a:lnSpc>
                 <a:spcPct val="112000"/>
               </a:lnSpc>
@@ -7163,7 +7100,7 @@
             <a:endParaRPr lang="en-US" sz="1150" dirty="0"/>
           </a:p>
           <a:p>
-            <a:pPr indent="0" marL="0">
+            <a:pPr marL="0" indent="0">
               <a:lnSpc>
                 <a:spcPct val="112000"/>
               </a:lnSpc>
@@ -7183,7 +7120,7 @@
             <a:endParaRPr lang="en-US" sz="1150" dirty="0"/>
           </a:p>
           <a:p>
-            <a:pPr indent="0" marL="0">
+            <a:pPr marL="0" indent="0">
               <a:lnSpc>
                 <a:spcPct val="112000"/>
               </a:lnSpc>
@@ -7203,7 +7140,7 @@
             <a:endParaRPr lang="en-US" sz="1150" dirty="0"/>
           </a:p>
           <a:p>
-            <a:pPr indent="0" marL="0">
+            <a:pPr marL="0" indent="0">
               <a:lnSpc>
                 <a:spcPct val="112000"/>
               </a:lnSpc>
@@ -7223,7 +7160,7 @@
             <a:endParaRPr lang="en-US" sz="1150" dirty="0"/>
           </a:p>
           <a:p>
-            <a:pPr indent="0" marL="0">
+            <a:pPr marL="0" indent="0">
               <a:lnSpc>
                 <a:spcPct val="112000"/>
               </a:lnSpc>
@@ -7232,7 +7169,7 @@
             <a:endParaRPr lang="en-US" sz="1150" dirty="0"/>
           </a:p>
           <a:p>
-            <a:pPr indent="0" marL="0">
+            <a:pPr marL="0" indent="0">
               <a:lnSpc>
                 <a:spcPct val="112000"/>
               </a:lnSpc>
@@ -7252,7 +7189,7 @@
             <a:endParaRPr lang="en-US" sz="1150" dirty="0"/>
           </a:p>
           <a:p>
-            <a:pPr indent="0" marL="0">
+            <a:pPr marL="0" indent="0">
               <a:lnSpc>
                 <a:spcPct val="112000"/>
               </a:lnSpc>
@@ -7272,7 +7209,7 @@
             <a:endParaRPr lang="en-US" sz="1150" dirty="0"/>
           </a:p>
           <a:p>
-            <a:pPr indent="0" marL="0">
+            <a:pPr marL="0" indent="0">
               <a:lnSpc>
                 <a:spcPct val="112000"/>
               </a:lnSpc>
@@ -7292,7 +7229,7 @@
             <a:endParaRPr lang="en-US" sz="1150" dirty="0"/>
           </a:p>
           <a:p>
-            <a:pPr indent="0" marL="0">
+            <a:pPr marL="0" indent="0">
               <a:lnSpc>
                 <a:spcPct val="112000"/>
               </a:lnSpc>
@@ -7312,7 +7249,7 @@
             <a:endParaRPr lang="en-US" sz="1150" dirty="0"/>
           </a:p>
           <a:p>
-            <a:pPr indent="0" marL="0">
+            <a:pPr marL="0" indent="0">
               <a:lnSpc>
                 <a:spcPct val="112000"/>
               </a:lnSpc>
@@ -7332,7 +7269,7 @@
             <a:endParaRPr lang="en-US" sz="1150" dirty="0"/>
           </a:p>
           <a:p>
-            <a:pPr indent="0" marL="0">
+            <a:pPr marL="0" indent="0">
               <a:lnSpc>
                 <a:spcPct val="112000"/>
               </a:lnSpc>
@@ -7341,7 +7278,7 @@
             <a:endParaRPr lang="en-US" sz="1150" dirty="0"/>
           </a:p>
           <a:p>
-            <a:pPr indent="0" marL="0">
+            <a:pPr marL="0" indent="0">
               <a:lnSpc>
                 <a:spcPct val="112000"/>
               </a:lnSpc>
@@ -7358,12 +7295,6 @@
               </a:rPr>
               <a:t>Overall: FAIL</a:t>
             </a:r>
-            <a:pPr indent="0" marL="0">
-              <a:lnSpc>
-                <a:spcPct val="112000"/>
-              </a:lnSpc>
-              <a:buNone/>
-            </a:pPr>
             <a:r>
               <a:rPr lang="en-US" sz="1150" dirty="0">
                 <a:solidFill>
@@ -7400,7 +7331,7 @@
           <a:bodyPr wrap="square" lIns="0" tIns="0" rIns="0" bIns="0" rtlCol="0" anchor="ctr"/>
           <a:lstStyle/>
           <a:p>
-            <a:pPr indent="0" marL="0">
+            <a:pPr marL="0" indent="0">
               <a:buNone/>
             </a:pPr>
             <a:r>
@@ -7439,7 +7370,7 @@
           <a:bodyPr wrap="square" lIns="0" tIns="0" rIns="0" bIns="0" rtlCol="0" anchor="ctr"/>
           <a:lstStyle/>
           <a:p>
-            <a:pPr indent="0" marL="0">
+            <a:pPr marL="0" indent="0">
               <a:lnSpc>
                 <a:spcPct val="110000"/>
               </a:lnSpc>
@@ -7481,7 +7412,7 @@
           <a:bodyPr wrap="square" lIns="0" tIns="0" rIns="0" bIns="0" rtlCol="0" anchor="ctr"/>
           <a:lstStyle/>
           <a:p>
-            <a:pPr indent="0" marL="0">
+            <a:pPr marL="0" indent="0">
               <a:lnSpc>
                 <a:spcPct val="110000"/>
               </a:lnSpc>
@@ -7498,12 +7429,6 @@
               </a:rPr>
               <a:t>A human finds it once. </a:t>
             </a:r>
-            <a:pPr indent="0" marL="0">
-              <a:lnSpc>
-                <a:spcPct val="110000"/>
-              </a:lnSpc>
-              <a:buNone/>
-            </a:pPr>
             <a:r>
               <a:rPr lang="en-US" sz="1300" b="1" i="1" dirty="0">
                 <a:solidFill>
@@ -7540,7 +7465,7 @@
           <a:bodyPr wrap="square" lIns="0" tIns="0" rIns="0" bIns="0" rtlCol="0" anchor="ctr"/>
           <a:lstStyle/>
           <a:p>
-            <a:pPr algn="l" indent="0" marL="0">
+            <a:pPr marL="0" indent="0" algn="l">
               <a:buNone/>
             </a:pPr>
             <a:r>
@@ -7579,7 +7504,7 @@
           <a:bodyPr wrap="square" lIns="0" tIns="0" rIns="0" bIns="0" rtlCol="0" anchor="ctr"/>
           <a:lstStyle/>
           <a:p>
-            <a:pPr algn="r" indent="0" marL="0">
+            <a:pPr marL="0" indent="0" algn="r">
               <a:buNone/>
             </a:pPr>
             <a:r>
@@ -7613,6 +7538,7 @@
         <a:solidFill>
           <a:srgbClr val="FFFFFF"/>
         </a:solidFill>
+        <a:effectLst/>
       </p:bgPr>
     </p:bg>
     <p:spTree>
@@ -7648,7 +7574,7 @@
           </a:solidFill>
           <a:ln/>
           <a:effectLst>
-            <a:outerShdw sx="100000" sy="100000" kx="0" ky="0" algn="bl" rotWithShape="0" blurRad="63500" dist="25400" dir="5400000">
+            <a:outerShdw blurRad="63500" dist="25400" dir="5400000" algn="bl" rotWithShape="0">
               <a:srgbClr val="0B2E29">
                 <a:alpha val="18000"/>
               </a:srgbClr>
@@ -7657,19 +7583,22 @@
         </p:spPr>
         <p:txBody>
           <a:bodyPr/>
-          <a:p/>
+          <a:lstStyle/>
+          <a:p>
+            <a:endParaRPr/>
+          </a:p>
         </p:txBody>
       </p:sp>
       <p:pic>
         <p:nvPicPr>
-          <p:cNvPr id="3" name="Image 0" descr="preencoded.png">    </p:cNvPr>
+          <p:cNvPr id="3" name="Image 0" descr="preencoded.png"/>
           <p:cNvPicPr>
             <a:picLocks noChangeAspect="1"/>
           </p:cNvPicPr>
           <p:nvPr/>
         </p:nvPicPr>
         <p:blipFill>
-          <a:blip r:embed="rId1"/>
+          <a:blip r:embed="rId3"/>
           <a:stretch>
             <a:fillRect/>
           </a:stretch>
@@ -7705,11 +7634,11 @@
           <a:bodyPr wrap="square" lIns="0" tIns="0" rIns="0" bIns="0" rtlCol="0" anchor="ctr"/>
           <a:lstStyle/>
           <a:p>
-            <a:pPr indent="0" marL="0">
-              <a:buNone/>
-            </a:pPr>
-            <a:r>
-              <a:rPr lang="en-US" sz="1050" b="1" spc="200" kern="0" dirty="0">
+            <a:pPr marL="0" indent="0">
+              <a:buNone/>
+            </a:pPr>
+            <a:r>
+              <a:rPr lang="en-US" sz="1050" b="1" kern="0" spc="200" dirty="0">
                 <a:solidFill>
                   <a:srgbClr val="0E7C66"/>
                 </a:solidFill>
@@ -7744,7 +7673,7 @@
           <a:bodyPr wrap="square" lIns="0" tIns="0" rIns="0" bIns="0" rtlCol="0" anchor="ctr"/>
           <a:lstStyle/>
           <a:p>
-            <a:pPr indent="0" marL="0">
+            <a:pPr marL="0" indent="0">
               <a:buNone/>
             </a:pPr>
             <a:r>
@@ -7783,7 +7712,7 @@
           <a:bodyPr wrap="square" lIns="0" tIns="0" rIns="0" bIns="0" rtlCol="0" anchor="ctr"/>
           <a:lstStyle/>
           <a:p>
-            <a:pPr indent="0" marL="0">
+            <a:pPr marL="0" indent="0">
               <a:lnSpc>
                 <a:spcPct val="105000"/>
               </a:lnSpc>
@@ -7830,7 +7759,7 @@
             <a:prstDash val="solid"/>
           </a:ln>
           <a:effectLst>
-            <a:outerShdw sx="100000" sy="100000" kx="0" ky="0" algn="bl" rotWithShape="0" blurRad="76200" dist="25400" dir="5400000">
+            <a:outerShdw blurRad="76200" dist="25400" dir="5400000" algn="bl" rotWithShape="0">
               <a:srgbClr val="0B2E29">
                 <a:alpha val="10000"/>
               </a:srgbClr>
@@ -7839,7 +7768,10 @@
         </p:spPr>
         <p:txBody>
           <a:bodyPr/>
-          <a:p/>
+          <a:lstStyle/>
+          <a:p>
+            <a:endParaRPr/>
+          </a:p>
         </p:txBody>
       </p:sp>
       <p:sp>
@@ -7863,7 +7795,7 @@
           <a:bodyPr wrap="square" lIns="0" tIns="0" rIns="0" bIns="0" rtlCol="0" anchor="ctr"/>
           <a:lstStyle/>
           <a:p>
-            <a:pPr indent="0" marL="0">
+            <a:pPr marL="0" indent="0">
               <a:buNone/>
             </a:pPr>
             <a:r>
@@ -7902,7 +7834,7 @@
           <a:bodyPr wrap="square" lIns="0" tIns="0" rIns="0" bIns="0" rtlCol="0" anchor="ctr"/>
           <a:lstStyle/>
           <a:p>
-            <a:pPr indent="0" marL="0">
+            <a:pPr marL="0" indent="0">
               <a:lnSpc>
                 <a:spcPct val="105000"/>
               </a:lnSpc>
@@ -7949,7 +7881,7 @@
             <a:prstDash val="solid"/>
           </a:ln>
           <a:effectLst>
-            <a:outerShdw sx="100000" sy="100000" kx="0" ky="0" algn="bl" rotWithShape="0" blurRad="76200" dist="25400" dir="5400000">
+            <a:outerShdw blurRad="76200" dist="25400" dir="5400000" algn="bl" rotWithShape="0">
               <a:srgbClr val="0B2E29">
                 <a:alpha val="10000"/>
               </a:srgbClr>
@@ -7958,7 +7890,10 @@
         </p:spPr>
         <p:txBody>
           <a:bodyPr/>
-          <a:p/>
+          <a:lstStyle/>
+          <a:p>
+            <a:endParaRPr/>
+          </a:p>
         </p:txBody>
       </p:sp>
       <p:sp>
@@ -7982,7 +7917,7 @@
           <a:bodyPr wrap="square" lIns="0" tIns="0" rIns="0" bIns="0" rtlCol="0" anchor="ctr"/>
           <a:lstStyle/>
           <a:p>
-            <a:pPr indent="0" marL="0">
+            <a:pPr marL="0" indent="0">
               <a:buNone/>
             </a:pPr>
             <a:r>
@@ -8021,7 +7956,7 @@
           <a:bodyPr wrap="square" lIns="0" tIns="0" rIns="0" bIns="0" rtlCol="0" anchor="ctr"/>
           <a:lstStyle/>
           <a:p>
-            <a:pPr indent="0" marL="0">
+            <a:pPr marL="0" indent="0">
               <a:lnSpc>
                 <a:spcPct val="105000"/>
               </a:lnSpc>
@@ -8068,7 +8003,7 @@
             <a:prstDash val="solid"/>
           </a:ln>
           <a:effectLst>
-            <a:outerShdw sx="100000" sy="100000" kx="0" ky="0" algn="bl" rotWithShape="0" blurRad="76200" dist="25400" dir="5400000">
+            <a:outerShdw blurRad="76200" dist="25400" dir="5400000" algn="bl" rotWithShape="0">
               <a:srgbClr val="0B2E29">
                 <a:alpha val="10000"/>
               </a:srgbClr>
@@ -8077,7 +8012,10 @@
         </p:spPr>
         <p:txBody>
           <a:bodyPr/>
-          <a:p/>
+          <a:lstStyle/>
+          <a:p>
+            <a:endParaRPr/>
+          </a:p>
         </p:txBody>
       </p:sp>
       <p:sp>
@@ -8101,7 +8039,7 @@
           <a:bodyPr wrap="square" lIns="0" tIns="0" rIns="0" bIns="0" rtlCol="0" anchor="ctr"/>
           <a:lstStyle/>
           <a:p>
-            <a:pPr indent="0" marL="0">
+            <a:pPr marL="0" indent="0">
               <a:buNone/>
             </a:pPr>
             <a:r>
@@ -8140,7 +8078,7 @@
           <a:bodyPr wrap="square" lIns="0" tIns="0" rIns="0" bIns="0" rtlCol="0" anchor="ctr"/>
           <a:lstStyle/>
           <a:p>
-            <a:pPr indent="0" marL="0">
+            <a:pPr marL="0" indent="0">
               <a:lnSpc>
                 <a:spcPct val="105000"/>
               </a:lnSpc>
@@ -8187,7 +8125,7 @@
             <a:prstDash val="solid"/>
           </a:ln>
           <a:effectLst>
-            <a:outerShdw sx="100000" sy="100000" kx="0" ky="0" algn="bl" rotWithShape="0" blurRad="76200" dist="25400" dir="5400000">
+            <a:outerShdw blurRad="76200" dist="25400" dir="5400000" algn="bl" rotWithShape="0">
               <a:srgbClr val="0B2E29">
                 <a:alpha val="10000"/>
               </a:srgbClr>
@@ -8196,7 +8134,10 @@
         </p:spPr>
         <p:txBody>
           <a:bodyPr/>
-          <a:p/>
+          <a:lstStyle/>
+          <a:p>
+            <a:endParaRPr/>
+          </a:p>
         </p:txBody>
       </p:sp>
       <p:sp>
@@ -8220,7 +8161,7 @@
           <a:bodyPr wrap="square" lIns="0" tIns="0" rIns="0" bIns="0" rtlCol="0" anchor="ctr"/>
           <a:lstStyle/>
           <a:p>
-            <a:pPr indent="0" marL="0">
+            <a:pPr marL="0" indent="0">
               <a:buNone/>
             </a:pPr>
             <a:r>
@@ -8259,7 +8200,7 @@
           <a:bodyPr wrap="square" lIns="0" tIns="0" rIns="0" bIns="0" rtlCol="0" anchor="ctr"/>
           <a:lstStyle/>
           <a:p>
-            <a:pPr indent="0" marL="0">
+            <a:pPr marL="0" indent="0">
               <a:lnSpc>
                 <a:spcPct val="105000"/>
               </a:lnSpc>
@@ -8306,7 +8247,7 @@
             <a:prstDash val="solid"/>
           </a:ln>
           <a:effectLst>
-            <a:outerShdw sx="100000" sy="100000" kx="0" ky="0" algn="bl" rotWithShape="0" blurRad="76200" dist="25400" dir="5400000">
+            <a:outerShdw blurRad="76200" dist="25400" dir="5400000" algn="bl" rotWithShape="0">
               <a:srgbClr val="0B2E29">
                 <a:alpha val="10000"/>
               </a:srgbClr>
@@ -8315,7 +8256,10 @@
         </p:spPr>
         <p:txBody>
           <a:bodyPr/>
-          <a:p/>
+          <a:lstStyle/>
+          <a:p>
+            <a:endParaRPr/>
+          </a:p>
         </p:txBody>
       </p:sp>
       <p:sp>
@@ -8339,7 +8283,7 @@
           <a:bodyPr wrap="square" lIns="0" tIns="0" rIns="0" bIns="0" rtlCol="0" anchor="ctr"/>
           <a:lstStyle/>
           <a:p>
-            <a:pPr indent="0" marL="0">
+            <a:pPr marL="0" indent="0">
               <a:lnSpc>
                 <a:spcPct val="108000"/>
               </a:lnSpc>
@@ -8356,12 +8300,6 @@
               </a:rPr>
               <a:t>Today: </a:t>
             </a:r>
-            <a:pPr indent="0" marL="0">
-              <a:lnSpc>
-                <a:spcPct val="108000"/>
-              </a:lnSpc>
-              <a:buNone/>
-            </a:pPr>
             <a:r>
               <a:rPr lang="en-US" sz="1200" dirty="0">
                 <a:solidFill>
@@ -8373,12 +8311,6 @@
               </a:rPr>
               <a:t>a versioned JSON + Markdown artifact in runs/.   </a:t>
             </a:r>
-            <a:pPr indent="0" marL="0">
-              <a:lnSpc>
-                <a:spcPct val="108000"/>
-              </a:lnSpc>
-              <a:buNone/>
-            </a:pPr>
             <a:r>
               <a:rPr lang="en-US" sz="1200" b="1" dirty="0">
                 <a:solidFill>
@@ -8390,12 +8322,6 @@
               </a:rPr>
               <a:t>At scale: </a:t>
             </a:r>
-            <a:pPr indent="0" marL="0">
-              <a:lnSpc>
-                <a:spcPct val="108000"/>
-              </a:lnSpc>
-              <a:buNone/>
-            </a:pPr>
             <a:r>
               <a:rPr lang="en-US" sz="1200" dirty="0">
                 <a:solidFill>
@@ -8432,7 +8358,7 @@
           <a:bodyPr wrap="square" lIns="0" tIns="0" rIns="0" bIns="0" rtlCol="0" anchor="ctr"/>
           <a:lstStyle/>
           <a:p>
-            <a:pPr algn="l" indent="0" marL="0">
+            <a:pPr marL="0" indent="0" algn="l">
               <a:buNone/>
             </a:pPr>
             <a:r>
@@ -8471,7 +8397,7 @@
           <a:bodyPr wrap="square" lIns="0" tIns="0" rIns="0" bIns="0" rtlCol="0" anchor="ctr"/>
           <a:lstStyle/>
           <a:p>
-            <a:pPr algn="l" indent="0" marL="0">
+            <a:pPr marL="0" indent="0" algn="l">
               <a:buNone/>
             </a:pPr>
             <a:r>
@@ -8510,7 +8436,7 @@
           <a:bodyPr wrap="square" lIns="0" tIns="0" rIns="0" bIns="0" rtlCol="0" anchor="ctr"/>
           <a:lstStyle/>
           <a:p>
-            <a:pPr algn="r" indent="0" marL="0">
+            <a:pPr marL="0" indent="0" algn="r">
               <a:buNone/>
             </a:pPr>
             <a:r>
@@ -8544,6 +8470,7 @@
         <a:solidFill>
           <a:srgbClr val="FFFFFF"/>
         </a:solidFill>
+        <a:effectLst/>
       </p:bgPr>
     </p:bg>
     <p:spTree>
@@ -8579,7 +8506,7 @@
           </a:solidFill>
           <a:ln/>
           <a:effectLst>
-            <a:outerShdw sx="100000" sy="100000" kx="0" ky="0" algn="bl" rotWithShape="0" blurRad="63500" dist="25400" dir="5400000">
+            <a:outerShdw blurRad="63500" dist="25400" dir="5400000" algn="bl" rotWithShape="0">
               <a:srgbClr val="0B2E29">
                 <a:alpha val="18000"/>
               </a:srgbClr>
@@ -8588,19 +8515,22 @@
         </p:spPr>
         <p:txBody>
           <a:bodyPr/>
-          <a:p/>
+          <a:lstStyle/>
+          <a:p>
+            <a:endParaRPr/>
+          </a:p>
         </p:txBody>
       </p:sp>
       <p:pic>
         <p:nvPicPr>
-          <p:cNvPr id="3" name="Image 0" descr="preencoded.png">    </p:cNvPr>
+          <p:cNvPr id="3" name="Image 0" descr="preencoded.png"/>
           <p:cNvPicPr>
             <a:picLocks noChangeAspect="1"/>
           </p:cNvPicPr>
           <p:nvPr/>
         </p:nvPicPr>
         <p:blipFill>
-          <a:blip r:embed="rId1"/>
+          <a:blip r:embed="rId3"/>
           <a:stretch>
             <a:fillRect/>
           </a:stretch>
@@ -8636,11 +8566,11 @@
           <a:bodyPr wrap="square" lIns="0" tIns="0" rIns="0" bIns="0" rtlCol="0" anchor="ctr"/>
           <a:lstStyle/>
           <a:p>
-            <a:pPr indent="0" marL="0">
-              <a:buNone/>
-            </a:pPr>
-            <a:r>
-              <a:rPr lang="en-US" sz="1050" b="1" spc="200" kern="0" dirty="0">
+            <a:pPr marL="0" indent="0">
+              <a:buNone/>
+            </a:pPr>
+            <a:r>
+              <a:rPr lang="en-US" sz="1050" b="1" kern="0" spc="200" dirty="0">
                 <a:solidFill>
                   <a:srgbClr val="0E7C66"/>
                 </a:solidFill>
@@ -8675,7 +8605,7 @@
           <a:bodyPr wrap="square" lIns="0" tIns="0" rIns="0" bIns="0" rtlCol="0" anchor="ctr"/>
           <a:lstStyle/>
           <a:p>
-            <a:pPr indent="0" marL="0">
+            <a:pPr marL="0" indent="0">
               <a:buNone/>
             </a:pPr>
             <a:r>
@@ -8719,7 +8649,7 @@
             <a:prstDash val="solid"/>
           </a:ln>
           <a:effectLst>
-            <a:outerShdw sx="100000" sy="100000" kx="0" ky="0" algn="bl" rotWithShape="0" blurRad="76200" dist="25400" dir="5400000">
+            <a:outerShdw blurRad="76200" dist="25400" dir="5400000" algn="bl" rotWithShape="0">
               <a:srgbClr val="0B2E29">
                 <a:alpha val="10000"/>
               </a:srgbClr>
@@ -8728,7 +8658,10 @@
         </p:spPr>
         <p:txBody>
           <a:bodyPr/>
-          <a:p/>
+          <a:lstStyle/>
+          <a:p>
+            <a:endParaRPr/>
+          </a:p>
         </p:txBody>
       </p:sp>
       <p:sp>
@@ -8752,7 +8685,7 @@
           <a:bodyPr wrap="square" lIns="0" tIns="0" rIns="0" bIns="0" rtlCol="0" anchor="ctr"/>
           <a:lstStyle/>
           <a:p>
-            <a:pPr algn="ctr" indent="0" marL="0">
+            <a:pPr marL="0" indent="0" algn="ctr">
               <a:buNone/>
             </a:pPr>
             <a:r>
@@ -8791,7 +8724,7 @@
           <a:bodyPr wrap="square" lIns="0" tIns="0" rIns="0" bIns="0" rtlCol="0" anchor="ctr"/>
           <a:lstStyle/>
           <a:p>
-            <a:pPr algn="ctr" indent="0" marL="0">
+            <a:pPr marL="0" indent="0" algn="ctr">
               <a:buNone/>
             </a:pPr>
             <a:r>
@@ -8834,7 +8767,10 @@
         </p:spPr>
         <p:txBody>
           <a:bodyPr/>
-          <a:p/>
+          <a:lstStyle/>
+          <a:p>
+            <a:endParaRPr/>
+          </a:p>
         </p:txBody>
       </p:sp>
       <p:sp>
@@ -8863,7 +8799,7 @@
             <a:prstDash val="solid"/>
           </a:ln>
           <a:effectLst>
-            <a:outerShdw sx="100000" sy="100000" kx="0" ky="0" algn="bl" rotWithShape="0" blurRad="76200" dist="25400" dir="5400000">
+            <a:outerShdw blurRad="76200" dist="25400" dir="5400000" algn="bl" rotWithShape="0">
               <a:srgbClr val="0B2E29">
                 <a:alpha val="10000"/>
               </a:srgbClr>
@@ -8872,7 +8808,10 @@
         </p:spPr>
         <p:txBody>
           <a:bodyPr/>
-          <a:p/>
+          <a:lstStyle/>
+          <a:p>
+            <a:endParaRPr/>
+          </a:p>
         </p:txBody>
       </p:sp>
       <p:sp>
@@ -8896,7 +8835,7 @@
           <a:bodyPr wrap="square" lIns="0" tIns="0" rIns="0" bIns="0" rtlCol="0" anchor="ctr"/>
           <a:lstStyle/>
           <a:p>
-            <a:pPr algn="ctr" indent="0" marL="0">
+            <a:pPr marL="0" indent="0" algn="ctr">
               <a:buNone/>
             </a:pPr>
             <a:r>
@@ -8935,7 +8874,7 @@
           <a:bodyPr wrap="square" lIns="0" tIns="0" rIns="0" bIns="0" rtlCol="0" anchor="ctr"/>
           <a:lstStyle/>
           <a:p>
-            <a:pPr algn="ctr" indent="0" marL="0">
+            <a:pPr marL="0" indent="0" algn="ctr">
               <a:buNone/>
             </a:pPr>
             <a:r>
@@ -8978,7 +8917,10 @@
         </p:spPr>
         <p:txBody>
           <a:bodyPr/>
-          <a:p/>
+          <a:lstStyle/>
+          <a:p>
+            <a:endParaRPr/>
+          </a:p>
         </p:txBody>
       </p:sp>
       <p:sp>
@@ -9007,7 +8949,7 @@
             <a:prstDash val="solid"/>
           </a:ln>
           <a:effectLst>
-            <a:outerShdw sx="100000" sy="100000" kx="0" ky="0" algn="bl" rotWithShape="0" blurRad="76200" dist="25400" dir="5400000">
+            <a:outerShdw blurRad="76200" dist="25400" dir="5400000" algn="bl" rotWithShape="0">
               <a:srgbClr val="0B2E29">
                 <a:alpha val="10000"/>
               </a:srgbClr>
@@ -9016,7 +8958,10 @@
         </p:spPr>
         <p:txBody>
           <a:bodyPr/>
-          <a:p/>
+          <a:lstStyle/>
+          <a:p>
+            <a:endParaRPr/>
+          </a:p>
         </p:txBody>
       </p:sp>
       <p:sp>
@@ -9040,7 +8985,7 @@
           <a:bodyPr wrap="square" lIns="0" tIns="0" rIns="0" bIns="0" rtlCol="0" anchor="ctr"/>
           <a:lstStyle/>
           <a:p>
-            <a:pPr algn="ctr" indent="0" marL="0">
+            <a:pPr marL="0" indent="0" algn="ctr">
               <a:buNone/>
             </a:pPr>
             <a:r>
@@ -9079,7 +9024,7 @@
           <a:bodyPr wrap="square" lIns="0" tIns="0" rIns="0" bIns="0" rtlCol="0" anchor="ctr"/>
           <a:lstStyle/>
           <a:p>
-            <a:pPr algn="ctr" indent="0" marL="0">
+            <a:pPr marL="0" indent="0" algn="ctr">
               <a:buNone/>
             </a:pPr>
             <a:r>
@@ -9118,7 +9063,7 @@
           <a:bodyPr wrap="square" lIns="0" tIns="0" rIns="0" bIns="0" rtlCol="0" anchor="ctr"/>
           <a:lstStyle/>
           <a:p>
-            <a:pPr algn="ctr" indent="0" marL="0">
+            <a:pPr marL="0" indent="0" algn="ctr">
               <a:buNone/>
             </a:pPr>
             <a:r>
@@ -9162,7 +9107,7 @@
             <a:prstDash val="solid"/>
           </a:ln>
           <a:effectLst>
-            <a:outerShdw sx="100000" sy="100000" kx="0" ky="0" algn="bl" rotWithShape="0" blurRad="76200" dist="25400" dir="5400000">
+            <a:outerShdw blurRad="76200" dist="25400" dir="5400000" algn="bl" rotWithShape="0">
               <a:srgbClr val="0B2E29">
                 <a:alpha val="10000"/>
               </a:srgbClr>
@@ -9171,7 +9116,10 @@
         </p:spPr>
         <p:txBody>
           <a:bodyPr/>
-          <a:p/>
+          <a:lstStyle/>
+          <a:p>
+            <a:endParaRPr/>
+          </a:p>
         </p:txBody>
       </p:sp>
       <p:sp>
@@ -9195,19 +9143,22 @@
         </p:spPr>
         <p:txBody>
           <a:bodyPr/>
-          <a:p/>
+          <a:lstStyle/>
+          <a:p>
+            <a:endParaRPr/>
+          </a:p>
         </p:txBody>
       </p:sp>
       <p:pic>
         <p:nvPicPr>
-          <p:cNvPr id="20" name="Image 1" descr="preencoded.png">    </p:cNvPr>
+          <p:cNvPr id="20" name="Image 1" descr="preencoded.png"/>
           <p:cNvPicPr>
             <a:picLocks noChangeAspect="1"/>
           </p:cNvPicPr>
           <p:nvPr/>
         </p:nvPicPr>
         <p:blipFill>
-          <a:blip r:embed="rId2"/>
+          <a:blip r:embed="rId4"/>
           <a:stretch>
             <a:fillRect/>
           </a:stretch>
@@ -9243,7 +9194,7 @@
           <a:bodyPr wrap="square" lIns="0" tIns="0" rIns="0" bIns="0" rtlCol="0" anchor="ctr"/>
           <a:lstStyle/>
           <a:p>
-            <a:pPr indent="0" marL="0">
+            <a:pPr marL="0" indent="0">
               <a:buNone/>
             </a:pPr>
             <a:r>
@@ -9282,7 +9233,7 @@
           <a:bodyPr wrap="square" lIns="0" tIns="0" rIns="0" bIns="0" rtlCol="0" anchor="ctr"/>
           <a:lstStyle/>
           <a:p>
-            <a:pPr indent="0" marL="0">
+            <a:pPr marL="0" indent="0">
               <a:lnSpc>
                 <a:spcPct val="104000"/>
               </a:lnSpc>
@@ -9329,7 +9280,7 @@
             <a:prstDash val="solid"/>
           </a:ln>
           <a:effectLst>
-            <a:outerShdw sx="100000" sy="100000" kx="0" ky="0" algn="bl" rotWithShape="0" blurRad="76200" dist="25400" dir="5400000">
+            <a:outerShdw blurRad="76200" dist="25400" dir="5400000" algn="bl" rotWithShape="0">
               <a:srgbClr val="0B2E29">
                 <a:alpha val="10000"/>
               </a:srgbClr>
@@ -9338,7 +9289,10 @@
         </p:spPr>
         <p:txBody>
           <a:bodyPr/>
-          <a:p/>
+          <a:lstStyle/>
+          <a:p>
+            <a:endParaRPr/>
+          </a:p>
         </p:txBody>
       </p:sp>
       <p:sp>
@@ -9362,19 +9316,22 @@
         </p:spPr>
         <p:txBody>
           <a:bodyPr/>
-          <a:p/>
+          <a:lstStyle/>
+          <a:p>
+            <a:endParaRPr/>
+          </a:p>
         </p:txBody>
       </p:sp>
       <p:pic>
         <p:nvPicPr>
-          <p:cNvPr id="25" name="Image 2" descr="preencoded.png">    </p:cNvPr>
+          <p:cNvPr id="25" name="Image 2" descr="preencoded.png"/>
           <p:cNvPicPr>
             <a:picLocks noChangeAspect="1"/>
           </p:cNvPicPr>
           <p:nvPr/>
         </p:nvPicPr>
         <p:blipFill>
-          <a:blip r:embed="rId3"/>
+          <a:blip r:embed="rId5"/>
           <a:stretch>
             <a:fillRect/>
           </a:stretch>
@@ -9410,7 +9367,7 @@
           <a:bodyPr wrap="square" lIns="0" tIns="0" rIns="0" bIns="0" rtlCol="0" anchor="ctr"/>
           <a:lstStyle/>
           <a:p>
-            <a:pPr indent="0" marL="0">
+            <a:pPr marL="0" indent="0">
               <a:buNone/>
             </a:pPr>
             <a:r>
@@ -9449,7 +9406,7 @@
           <a:bodyPr wrap="square" lIns="0" tIns="0" rIns="0" bIns="0" rtlCol="0" anchor="ctr"/>
           <a:lstStyle/>
           <a:p>
-            <a:pPr indent="0" marL="0">
+            <a:pPr marL="0" indent="0">
               <a:lnSpc>
                 <a:spcPct val="104000"/>
               </a:lnSpc>
@@ -9496,7 +9453,7 @@
             <a:prstDash val="solid"/>
           </a:ln>
           <a:effectLst>
-            <a:outerShdw sx="100000" sy="100000" kx="0" ky="0" algn="bl" rotWithShape="0" blurRad="76200" dist="25400" dir="5400000">
+            <a:outerShdw blurRad="76200" dist="25400" dir="5400000" algn="bl" rotWithShape="0">
               <a:srgbClr val="0B2E29">
                 <a:alpha val="10000"/>
               </a:srgbClr>
@@ -9505,7 +9462,10 @@
         </p:spPr>
         <p:txBody>
           <a:bodyPr/>
-          <a:p/>
+          <a:lstStyle/>
+          <a:p>
+            <a:endParaRPr/>
+          </a:p>
         </p:txBody>
       </p:sp>
       <p:sp>
@@ -9529,19 +9489,22 @@
         </p:spPr>
         <p:txBody>
           <a:bodyPr/>
-          <a:p/>
+          <a:lstStyle/>
+          <a:p>
+            <a:endParaRPr/>
+          </a:p>
         </p:txBody>
       </p:sp>
       <p:pic>
         <p:nvPicPr>
-          <p:cNvPr id="30" name="Image 3" descr="preencoded.png">    </p:cNvPr>
+          <p:cNvPr id="30" name="Image 3" descr="preencoded.png"/>
           <p:cNvPicPr>
             <a:picLocks noChangeAspect="1"/>
           </p:cNvPicPr>
           <p:nvPr/>
         </p:nvPicPr>
         <p:blipFill>
-          <a:blip r:embed="rId4"/>
+          <a:blip r:embed="rId6"/>
           <a:stretch>
             <a:fillRect/>
           </a:stretch>
@@ -9577,7 +9540,7 @@
           <a:bodyPr wrap="square" lIns="0" tIns="0" rIns="0" bIns="0" rtlCol="0" anchor="ctr"/>
           <a:lstStyle/>
           <a:p>
-            <a:pPr indent="0" marL="0">
+            <a:pPr marL="0" indent="0">
               <a:buNone/>
             </a:pPr>
             <a:r>
@@ -9616,7 +9579,7 @@
           <a:bodyPr wrap="square" lIns="0" tIns="0" rIns="0" bIns="0" rtlCol="0" anchor="ctr"/>
           <a:lstStyle/>
           <a:p>
-            <a:pPr indent="0" marL="0">
+            <a:pPr marL="0" indent="0">
               <a:lnSpc>
                 <a:spcPct val="104000"/>
               </a:lnSpc>
@@ -9658,7 +9621,7 @@
           <a:bodyPr wrap="square" lIns="0" tIns="0" rIns="0" bIns="0" rtlCol="0" anchor="ctr"/>
           <a:lstStyle/>
           <a:p>
-            <a:pPr algn="l" indent="0" marL="0">
+            <a:pPr marL="0" indent="0" algn="l">
               <a:buNone/>
             </a:pPr>
             <a:r>
@@ -9697,7 +9660,7 @@
           <a:bodyPr wrap="square" lIns="0" tIns="0" rIns="0" bIns="0" rtlCol="0" anchor="ctr"/>
           <a:lstStyle/>
           <a:p>
-            <a:pPr algn="r" indent="0" marL="0">
+            <a:pPr marL="0" indent="0" algn="r">
               <a:buNone/>
             </a:pPr>
             <a:r>
@@ -9731,6 +9694,7 @@
         <a:solidFill>
           <a:srgbClr val="0B2E29"/>
         </a:solidFill>
+        <a:effectLst/>
       </p:bgPr>
     </p:bg>
     <p:spTree>
@@ -9770,7 +9734,10 @@
         </p:spPr>
         <p:txBody>
           <a:bodyPr/>
-          <a:p/>
+          <a:lstStyle/>
+          <a:p>
+            <a:endParaRPr/>
+          </a:p>
         </p:txBody>
       </p:sp>
       <p:sp>
@@ -9796,7 +9763,10 @@
         </p:spPr>
         <p:txBody>
           <a:bodyPr/>
-          <a:p/>
+          <a:lstStyle/>
+          <a:p>
+            <a:endParaRPr/>
+          </a:p>
         </p:txBody>
       </p:sp>
       <p:sp>
@@ -9822,7 +9792,10 @@
         </p:spPr>
         <p:txBody>
           <a:bodyPr/>
-          <a:p/>
+          <a:lstStyle/>
+          <a:p>
+            <a:endParaRPr/>
+          </a:p>
         </p:txBody>
       </p:sp>
       <p:sp>
@@ -9848,7 +9821,10 @@
         </p:spPr>
         <p:txBody>
           <a:bodyPr/>
-          <a:p/>
+          <a:lstStyle/>
+          <a:p>
+            <a:endParaRPr/>
+          </a:p>
         </p:txBody>
       </p:sp>
       <p:sp>
@@ -9874,7 +9850,10 @@
         </p:spPr>
         <p:txBody>
           <a:bodyPr/>
-          <a:p/>
+          <a:lstStyle/>
+          <a:p>
+            <a:endParaRPr/>
+          </a:p>
         </p:txBody>
       </p:sp>
       <p:sp>
@@ -9900,7 +9879,10 @@
         </p:spPr>
         <p:txBody>
           <a:bodyPr/>
-          <a:p/>
+          <a:lstStyle/>
+          <a:p>
+            <a:endParaRPr/>
+          </a:p>
         </p:txBody>
       </p:sp>
       <p:sp>
@@ -9926,7 +9908,10 @@
         </p:spPr>
         <p:txBody>
           <a:bodyPr/>
-          <a:p/>
+          <a:lstStyle/>
+          <a:p>
+            <a:endParaRPr/>
+          </a:p>
         </p:txBody>
       </p:sp>
       <p:sp>
@@ -9952,7 +9937,10 @@
         </p:spPr>
         <p:txBody>
           <a:bodyPr/>
-          <a:p/>
+          <a:lstStyle/>
+          <a:p>
+            <a:endParaRPr/>
+          </a:p>
         </p:txBody>
       </p:sp>
       <p:sp>
@@ -9978,7 +9966,10 @@
         </p:spPr>
         <p:txBody>
           <a:bodyPr/>
-          <a:p/>
+          <a:lstStyle/>
+          <a:p>
+            <a:endParaRPr/>
+          </a:p>
         </p:txBody>
       </p:sp>
       <p:sp>
@@ -10004,7 +9995,10 @@
         </p:spPr>
         <p:txBody>
           <a:bodyPr/>
-          <a:p/>
+          <a:lstStyle/>
+          <a:p>
+            <a:endParaRPr/>
+          </a:p>
         </p:txBody>
       </p:sp>
       <p:sp>
@@ -10030,7 +10024,10 @@
         </p:spPr>
         <p:txBody>
           <a:bodyPr/>
-          <a:p/>
+          <a:lstStyle/>
+          <a:p>
+            <a:endParaRPr/>
+          </a:p>
         </p:txBody>
       </p:sp>
       <p:sp>
@@ -10056,7 +10053,10 @@
         </p:spPr>
         <p:txBody>
           <a:bodyPr/>
-          <a:p/>
+          <a:lstStyle/>
+          <a:p>
+            <a:endParaRPr/>
+          </a:p>
         </p:txBody>
       </p:sp>
       <p:sp>
@@ -10082,7 +10082,10 @@
         </p:spPr>
         <p:txBody>
           <a:bodyPr/>
-          <a:p/>
+          <a:lstStyle/>
+          <a:p>
+            <a:endParaRPr/>
+          </a:p>
         </p:txBody>
       </p:sp>
       <p:sp>
@@ -10108,7 +10111,10 @@
         </p:spPr>
         <p:txBody>
           <a:bodyPr/>
-          <a:p/>
+          <a:lstStyle/>
+          <a:p>
+            <a:endParaRPr/>
+          </a:p>
         </p:txBody>
       </p:sp>
       <p:sp>
@@ -10134,7 +10140,10 @@
         </p:spPr>
         <p:txBody>
           <a:bodyPr/>
-          <a:p/>
+          <a:lstStyle/>
+          <a:p>
+            <a:endParaRPr/>
+          </a:p>
         </p:txBody>
       </p:sp>
       <p:sp>
@@ -10160,7 +10169,10 @@
         </p:spPr>
         <p:txBody>
           <a:bodyPr/>
-          <a:p/>
+          <a:lstStyle/>
+          <a:p>
+            <a:endParaRPr/>
+          </a:p>
         </p:txBody>
       </p:sp>
       <p:sp>
@@ -10186,7 +10198,10 @@
         </p:spPr>
         <p:txBody>
           <a:bodyPr/>
-          <a:p/>
+          <a:lstStyle/>
+          <a:p>
+            <a:endParaRPr/>
+          </a:p>
         </p:txBody>
       </p:sp>
       <p:sp>
@@ -10212,7 +10227,10 @@
         </p:spPr>
         <p:txBody>
           <a:bodyPr/>
-          <a:p/>
+          <a:lstStyle/>
+          <a:p>
+            <a:endParaRPr/>
+          </a:p>
         </p:txBody>
       </p:sp>
       <p:sp>
@@ -10238,7 +10256,10 @@
         </p:spPr>
         <p:txBody>
           <a:bodyPr/>
-          <a:p/>
+          <a:lstStyle/>
+          <a:p>
+            <a:endParaRPr/>
+          </a:p>
         </p:txBody>
       </p:sp>
       <p:sp>
@@ -10264,7 +10285,10 @@
         </p:spPr>
         <p:txBody>
           <a:bodyPr/>
-          <a:p/>
+          <a:lstStyle/>
+          <a:p>
+            <a:endParaRPr/>
+          </a:p>
         </p:txBody>
       </p:sp>
       <p:sp>
@@ -10290,7 +10314,10 @@
         </p:spPr>
         <p:txBody>
           <a:bodyPr/>
-          <a:p/>
+          <a:lstStyle/>
+          <a:p>
+            <a:endParaRPr/>
+          </a:p>
         </p:txBody>
       </p:sp>
       <p:sp>
@@ -10316,7 +10343,10 @@
         </p:spPr>
         <p:txBody>
           <a:bodyPr/>
-          <a:p/>
+          <a:lstStyle/>
+          <a:p>
+            <a:endParaRPr/>
+          </a:p>
         </p:txBody>
       </p:sp>
       <p:sp>
@@ -10342,7 +10372,10 @@
         </p:spPr>
         <p:txBody>
           <a:bodyPr/>
-          <a:p/>
+          <a:lstStyle/>
+          <a:p>
+            <a:endParaRPr/>
+          </a:p>
         </p:txBody>
       </p:sp>
       <p:sp>
@@ -10368,7 +10401,10 @@
         </p:spPr>
         <p:txBody>
           <a:bodyPr/>
-          <a:p/>
+          <a:lstStyle/>
+          <a:p>
+            <a:endParaRPr/>
+          </a:p>
         </p:txBody>
       </p:sp>
       <p:sp>
@@ -10392,11 +10428,11 @@
           <a:bodyPr wrap="square" lIns="0" tIns="0" rIns="0" bIns="0" rtlCol="0" anchor="ctr"/>
           <a:lstStyle/>
           <a:p>
-            <a:pPr indent="0" marL="0">
-              <a:buNone/>
-            </a:pPr>
-            <a:r>
-              <a:rPr lang="en-US" sz="1200" b="1" spc="300" kern="0" dirty="0">
+            <a:pPr marL="0" indent="0">
+              <a:buNone/>
+            </a:pPr>
+            <a:r>
+              <a:rPr lang="en-US" sz="1200" b="1" kern="0" spc="300" dirty="0">
                 <a:solidFill>
                   <a:srgbClr val="2DD4BF"/>
                 </a:solidFill>
@@ -10431,7 +10467,10 @@
         </p:spPr>
         <p:txBody>
           <a:bodyPr/>
-          <a:p/>
+          <a:lstStyle/>
+          <a:p>
+            <a:endParaRPr/>
+          </a:p>
         </p:txBody>
       </p:sp>
       <p:sp>
@@ -10455,7 +10494,7 @@
           <a:bodyPr wrap="square" lIns="0" tIns="0" rIns="0" bIns="0" rtlCol="0" anchor="ctr"/>
           <a:lstStyle/>
           <a:p>
-            <a:pPr algn="ctr" indent="0" marL="0">
+            <a:pPr marL="0" indent="0" algn="ctr">
               <a:buNone/>
             </a:pPr>
             <a:r>
@@ -10494,7 +10533,7 @@
           <a:bodyPr wrap="square" lIns="0" tIns="0" rIns="0" bIns="0" rtlCol="0" anchor="ctr"/>
           <a:lstStyle/>
           <a:p>
-            <a:pPr indent="0" marL="0">
+            <a:pPr marL="0" indent="0">
               <a:buNone/>
             </a:pPr>
             <a:r>
@@ -10533,7 +10572,7 @@
           <a:bodyPr wrap="square" lIns="0" tIns="0" rIns="0" bIns="0" rtlCol="0" anchor="ctr"/>
           <a:lstStyle/>
           <a:p>
-            <a:pPr indent="0" marL="0">
+            <a:pPr marL="0" indent="0">
               <a:lnSpc>
                 <a:spcPct val="105000"/>
               </a:lnSpc>
@@ -10575,7 +10614,10 @@
         </p:spPr>
         <p:txBody>
           <a:bodyPr/>
-          <a:p/>
+          <a:lstStyle/>
+          <a:p>
+            <a:endParaRPr/>
+          </a:p>
         </p:txBody>
       </p:sp>
       <p:sp>
@@ -10599,7 +10641,7 @@
           <a:bodyPr wrap="square" lIns="0" tIns="0" rIns="0" bIns="0" rtlCol="0" anchor="ctr"/>
           <a:lstStyle/>
           <a:p>
-            <a:pPr algn="ctr" indent="0" marL="0">
+            <a:pPr marL="0" indent="0" algn="ctr">
               <a:buNone/>
             </a:pPr>
             <a:r>
@@ -10638,7 +10680,7 @@
           <a:bodyPr wrap="square" lIns="0" tIns="0" rIns="0" bIns="0" rtlCol="0" anchor="ctr"/>
           <a:lstStyle/>
           <a:p>
-            <a:pPr indent="0" marL="0">
+            <a:pPr marL="0" indent="0">
               <a:buNone/>
             </a:pPr>
             <a:r>
@@ -10677,7 +10719,7 @@
           <a:bodyPr wrap="square" lIns="0" tIns="0" rIns="0" bIns="0" rtlCol="0" anchor="ctr"/>
           <a:lstStyle/>
           <a:p>
-            <a:pPr indent="0" marL="0">
+            <a:pPr marL="0" indent="0">
               <a:lnSpc>
                 <a:spcPct val="105000"/>
               </a:lnSpc>
@@ -10719,7 +10761,10 @@
         </p:spPr>
         <p:txBody>
           <a:bodyPr/>
-          <a:p/>
+          <a:lstStyle/>
+          <a:p>
+            <a:endParaRPr/>
+          </a:p>
         </p:txBody>
       </p:sp>
       <p:sp>
@@ -10743,7 +10788,7 @@
           <a:bodyPr wrap="square" lIns="0" tIns="0" rIns="0" bIns="0" rtlCol="0" anchor="ctr"/>
           <a:lstStyle/>
           <a:p>
-            <a:pPr algn="ctr" indent="0" marL="0">
+            <a:pPr marL="0" indent="0" algn="ctr">
               <a:buNone/>
             </a:pPr>
             <a:r>
@@ -10782,7 +10827,7 @@
           <a:bodyPr wrap="square" lIns="0" tIns="0" rIns="0" bIns="0" rtlCol="0" anchor="ctr"/>
           <a:lstStyle/>
           <a:p>
-            <a:pPr indent="0" marL="0">
+            <a:pPr marL="0" indent="0">
               <a:buNone/>
             </a:pPr>
             <a:r>
@@ -10821,7 +10866,7 @@
           <a:bodyPr wrap="square" lIns="0" tIns="0" rIns="0" bIns="0" rtlCol="0" anchor="ctr"/>
           <a:lstStyle/>
           <a:p>
-            <a:pPr indent="0" marL="0">
+            <a:pPr marL="0" indent="0">
               <a:lnSpc>
                 <a:spcPct val="105000"/>
               </a:lnSpc>
@@ -10866,7 +10911,10 @@
         </p:spPr>
         <p:txBody>
           <a:bodyPr/>
-          <a:p/>
+          <a:lstStyle/>
+          <a:p>
+            <a:endParaRPr/>
+          </a:p>
         </p:txBody>
       </p:sp>
       <p:sp>
@@ -10890,7 +10938,7 @@
           <a:bodyPr wrap="square" lIns="0" tIns="0" rIns="0" bIns="0" rtlCol="0" anchor="ctr"/>
           <a:lstStyle/>
           <a:p>
-            <a:pPr indent="0" marL="0">
+            <a:pPr marL="0" indent="0">
               <a:buNone/>
             </a:pPr>
             <a:r>
@@ -10904,9 +10952,6 @@
               </a:rPr>
               <a:t>Resources   </a:t>
             </a:r>
-            <a:pPr indent="0" marL="0">
-              <a:buNone/>
-            </a:pPr>
             <a:r>
               <a:rPr lang="en-US" sz="1050" dirty="0">
                 <a:solidFill>
@@ -10943,7 +10988,7 @@
           <a:bodyPr wrap="square" lIns="0" tIns="0" rIns="0" bIns="0" rtlCol="0" anchor="ctr"/>
           <a:lstStyle/>
           <a:p>
-            <a:pPr indent="0" marL="0">
+            <a:pPr marL="0" indent="0">
               <a:buNone/>
             </a:pPr>
             <a:r>
@@ -10970,7 +11015,7 @@
 </file>
 
 <file path=ppt/slides/slide18.xml><?xml version="1.0" encoding="utf-8"?>
-<p:sld xmlns:a="http://schemas.openxmlformats.org/drawingml/2006/main" xmlns:p="http://schemas.openxmlformats.org/presentationml/2006/main" xmlns:r="http://schemas.openxmlformats.org/officeDocument/2006/relationships">
+<p:sld xmlns:a="http://schemas.openxmlformats.org/drawingml/2006/main" xmlns:r="http://schemas.openxmlformats.org/officeDocument/2006/relationships" xmlns:p="http://schemas.openxmlformats.org/presentationml/2006/main">
   <p:cSld>
     <p:spTree>
       <p:nvGrpSpPr>
@@ -10978,7 +11023,14 @@
         <p:cNvGrpSpPr/>
         <p:nvPr/>
       </p:nvGrpSpPr>
-      <p:grpSpPr/>
+      <p:grpSpPr>
+        <a:xfrm>
+          <a:off x="0" y="0"/>
+          <a:ext cx="0" cy="0"/>
+          <a:chOff x="0" y="0"/>
+          <a:chExt cx="0" cy="0"/>
+        </a:xfrm>
+      </p:grpSpPr>
       <p:sp>
         <p:nvSpPr>
           <p:cNvPr id="2" name="Shape 0"/>
@@ -10998,7 +11050,7 @@
           </a:solidFill>
           <a:ln/>
           <a:effectLst>
-            <a:outerShdw sx="100000" sy="100000" kx="0" ky="0" algn="bl" rotWithShape="0" blurRad="63500" dist="25400" dir="5400000">
+            <a:outerShdw blurRad="63500" dist="25400" dir="5400000" algn="bl" rotWithShape="0">
               <a:srgbClr val="0B2E29">
                 <a:alpha val="18000"/>
               </a:srgbClr>
@@ -11007,12 +11059,15 @@
         </p:spPr>
         <p:txBody>
           <a:bodyPr/>
-          <a:p/>
+          <a:lstStyle/>
+          <a:p>
+            <a:endParaRPr/>
+          </a:p>
         </p:txBody>
       </p:sp>
       <p:pic>
         <p:nvPicPr>
-          <p:cNvPr id="3" name="Image 0" descr="preencoded.png">    </p:cNvPr>
+          <p:cNvPr id="3" name="Image 0" descr="preencoded.png"/>
           <p:cNvPicPr>
             <a:picLocks noChangeAspect="1"/>
           </p:cNvPicPr>
@@ -11055,11 +11110,11 @@
           <a:bodyPr wrap="square" lIns="0" tIns="0" rIns="0" bIns="0" rtlCol="0" anchor="ctr"/>
           <a:lstStyle/>
           <a:p>
-            <a:pPr indent="0" marL="0">
-              <a:buNone/>
-            </a:pPr>
-            <a:r>
-              <a:rPr lang="en-US" sz="1050" b="1" spc="200" kern="0" dirty="0">
+            <a:pPr marL="0" indent="0">
+              <a:buNone/>
+            </a:pPr>
+            <a:r>
+              <a:rPr lang="en-US" sz="1050" b="1" kern="0" spc="200" dirty="0">
                 <a:solidFill>
                   <a:srgbClr val="0E7C66"/>
                 </a:solidFill>
@@ -11094,7 +11149,7 @@
           <a:bodyPr wrap="square" lIns="0" tIns="0" rIns="0" bIns="0" rtlCol="0" anchor="ctr"/>
           <a:lstStyle/>
           <a:p>
-            <a:pPr indent="0" marL="0">
+            <a:pPr marL="0" indent="0">
               <a:buNone/>
             </a:pPr>
             <a:r>
@@ -11138,7 +11193,7 @@
             <a:prstDash val="solid"/>
           </a:ln>
           <a:effectLst>
-            <a:outerShdw sx="100000" sy="100000" kx="0" ky="0" algn="bl" rotWithShape="0" blurRad="76200" dist="25400" dir="5400000">
+            <a:outerShdw blurRad="76200" dist="25400" dir="5400000" algn="bl" rotWithShape="0">
               <a:srgbClr val="0B2E29">
                 <a:alpha val="10000"/>
               </a:srgbClr>
@@ -11147,7 +11202,10 @@
         </p:spPr>
         <p:txBody>
           <a:bodyPr/>
-          <a:p/>
+          <a:lstStyle/>
+          <a:p>
+            <a:endParaRPr/>
+          </a:p>
         </p:txBody>
       </p:sp>
       <p:sp>
@@ -11171,12 +11229,15 @@
         </p:spPr>
         <p:txBody>
           <a:bodyPr/>
-          <a:p/>
+          <a:lstStyle/>
+          <a:p>
+            <a:endParaRPr/>
+          </a:p>
         </p:txBody>
       </p:sp>
       <p:pic>
         <p:nvPicPr>
-          <p:cNvPr id="8" name="Image 1" descr="preencoded.png">    </p:cNvPr>
+          <p:cNvPr id="8" name="Image 1" descr="preencoded.png"/>
           <p:cNvPicPr>
             <a:picLocks noChangeAspect="1"/>
           </p:cNvPicPr>
@@ -11219,7 +11280,7 @@
           <a:bodyPr wrap="square" lIns="0" tIns="0" rIns="0" bIns="0" rtlCol="0" anchor="ctr"/>
           <a:lstStyle/>
           <a:p>
-            <a:pPr indent="0" marL="0">
+            <a:pPr marL="0" indent="0">
               <a:buNone/>
             </a:pPr>
             <a:r>
@@ -11258,7 +11319,7 @@
           <a:bodyPr wrap="square" lIns="0" tIns="0" rIns="0" bIns="0" rtlCol="0" anchor="ctr"/>
           <a:lstStyle/>
           <a:p>
-            <a:pPr indent="0" marL="0">
+            <a:pPr marL="0" indent="0">
               <a:buNone/>
             </a:pPr>
             <a:r>
@@ -11304,7 +11365,10 @@
         </p:spPr>
         <p:txBody>
           <a:bodyPr/>
-          <a:p/>
+          <a:lstStyle/>
+          <a:p>
+            <a:endParaRPr/>
+          </a:p>
         </p:txBody>
       </p:sp>
       <p:sp>
@@ -11328,7 +11392,7 @@
           <a:bodyPr wrap="square" lIns="0" tIns="0" rIns="0" bIns="0" rtlCol="0" anchor="ctr"/>
           <a:lstStyle/>
           <a:p>
-            <a:pPr algn="ctr" indent="0" marL="0">
+            <a:pPr marL="0" indent="0" algn="ctr">
               <a:buNone/>
             </a:pPr>
             <a:r>
@@ -11367,7 +11431,7 @@
           <a:bodyPr wrap="square" lIns="0" tIns="0" rIns="0" bIns="0" rtlCol="0" anchor="ctr"/>
           <a:lstStyle/>
           <a:p>
-            <a:pPr indent="0" marL="0">
+            <a:pPr marL="0" indent="0">
               <a:lnSpc>
                 <a:spcPct val="103000"/>
               </a:lnSpc>
@@ -11414,7 +11478,7 @@
             <a:prstDash val="solid"/>
           </a:ln>
           <a:effectLst>
-            <a:outerShdw sx="100000" sy="100000" kx="0" ky="0" algn="bl" rotWithShape="0" blurRad="76200" dist="25400" dir="5400000">
+            <a:outerShdw blurRad="76200" dist="25400" dir="5400000" algn="bl" rotWithShape="0">
               <a:srgbClr val="0B2E29">
                 <a:alpha val="10000"/>
               </a:srgbClr>
@@ -11423,7 +11487,10 @@
         </p:spPr>
         <p:txBody>
           <a:bodyPr/>
-          <a:p/>
+          <a:lstStyle/>
+          <a:p>
+            <a:endParaRPr/>
+          </a:p>
         </p:txBody>
       </p:sp>
       <p:sp>
@@ -11447,12 +11514,15 @@
         </p:spPr>
         <p:txBody>
           <a:bodyPr/>
-          <a:p/>
+          <a:lstStyle/>
+          <a:p>
+            <a:endParaRPr/>
+          </a:p>
         </p:txBody>
       </p:sp>
       <p:pic>
         <p:nvPicPr>
-          <p:cNvPr id="16" name="Image 2" descr="preencoded.png">    </p:cNvPr>
+          <p:cNvPr id="16" name="Image 2" descr="preencoded.png"/>
           <p:cNvPicPr>
             <a:picLocks noChangeAspect="1"/>
           </p:cNvPicPr>
@@ -11495,7 +11565,7 @@
           <a:bodyPr wrap="square" lIns="0" tIns="0" rIns="0" bIns="0" rtlCol="0" anchor="ctr"/>
           <a:lstStyle/>
           <a:p>
-            <a:pPr indent="0" marL="0">
+            <a:pPr marL="0" indent="0">
               <a:buNone/>
             </a:pPr>
             <a:r>
@@ -11534,7 +11604,7 @@
           <a:bodyPr wrap="square" lIns="0" tIns="0" rIns="0" bIns="0" rtlCol="0" anchor="ctr"/>
           <a:lstStyle/>
           <a:p>
-            <a:pPr indent="0" marL="0">
+            <a:pPr marL="0" indent="0">
               <a:buNone/>
             </a:pPr>
             <a:r>
@@ -11580,7 +11650,10 @@
         </p:spPr>
         <p:txBody>
           <a:bodyPr/>
-          <a:p/>
+          <a:lstStyle/>
+          <a:p>
+            <a:endParaRPr/>
+          </a:p>
         </p:txBody>
       </p:sp>
       <p:sp>
@@ -11604,7 +11677,7 @@
           <a:bodyPr wrap="square" lIns="0" tIns="0" rIns="0" bIns="0" rtlCol="0" anchor="ctr"/>
           <a:lstStyle/>
           <a:p>
-            <a:pPr algn="ctr" indent="0" marL="0">
+            <a:pPr marL="0" indent="0" algn="ctr">
               <a:buNone/>
             </a:pPr>
             <a:r>
@@ -11643,7 +11716,7 @@
           <a:bodyPr wrap="square" lIns="0" tIns="0" rIns="0" bIns="0" rtlCol="0" anchor="ctr"/>
           <a:lstStyle/>
           <a:p>
-            <a:pPr indent="0" marL="0">
+            <a:pPr marL="0" indent="0">
               <a:lnSpc>
                 <a:spcPct val="103000"/>
               </a:lnSpc>
@@ -11690,7 +11763,7 @@
             <a:prstDash val="solid"/>
           </a:ln>
           <a:effectLst>
-            <a:outerShdw sx="100000" sy="100000" kx="0" ky="0" algn="bl" rotWithShape="0" blurRad="76200" dist="25400" dir="5400000">
+            <a:outerShdw blurRad="76200" dist="25400" dir="5400000" algn="bl" rotWithShape="0">
               <a:srgbClr val="0B2E29">
                 <a:alpha val="10000"/>
               </a:srgbClr>
@@ -11699,7 +11772,10 @@
         </p:spPr>
         <p:txBody>
           <a:bodyPr/>
-          <a:p/>
+          <a:lstStyle/>
+          <a:p>
+            <a:endParaRPr/>
+          </a:p>
         </p:txBody>
       </p:sp>
       <p:sp>
@@ -11723,19 +11799,22 @@
         </p:spPr>
         <p:txBody>
           <a:bodyPr/>
-          <a:p/>
+          <a:lstStyle/>
+          <a:p>
+            <a:endParaRPr/>
+          </a:p>
         </p:txBody>
       </p:sp>
       <p:pic>
         <p:nvPicPr>
-          <p:cNvPr id="24" name="Image 3" descr="preencoded.png">    </p:cNvPr>
+          <p:cNvPr id="24" name="Image 3" descr="preencoded.png"/>
           <p:cNvPicPr>
             <a:picLocks noChangeAspect="1"/>
           </p:cNvPicPr>
           <p:nvPr/>
         </p:nvPicPr>
         <p:blipFill>
-          <a:blip r:embed="rId5"/>
+          <a:blip r:embed="rId2"/>
           <a:stretch>
             <a:fillRect/>
           </a:stretch>
@@ -11771,7 +11850,7 @@
           <a:bodyPr wrap="square" lIns="0" tIns="0" rIns="0" bIns="0" rtlCol="0" anchor="ctr"/>
           <a:lstStyle/>
           <a:p>
-            <a:pPr indent="0" marL="0">
+            <a:pPr marL="0" indent="0">
               <a:buNone/>
             </a:pPr>
             <a:r>
@@ -11810,7 +11889,7 @@
           <a:bodyPr wrap="square" lIns="0" tIns="0" rIns="0" bIns="0" rtlCol="0" anchor="ctr"/>
           <a:lstStyle/>
           <a:p>
-            <a:pPr indent="0" marL="0">
+            <a:pPr marL="0" indent="0">
               <a:buNone/>
             </a:pPr>
             <a:r>
@@ -11856,7 +11935,10 @@
         </p:spPr>
         <p:txBody>
           <a:bodyPr/>
-          <a:p/>
+          <a:lstStyle/>
+          <a:p>
+            <a:endParaRPr/>
+          </a:p>
         </p:txBody>
       </p:sp>
       <p:sp>
@@ -11880,7 +11962,7 @@
           <a:bodyPr wrap="square" lIns="0" tIns="0" rIns="0" bIns="0" rtlCol="0" anchor="ctr"/>
           <a:lstStyle/>
           <a:p>
-            <a:pPr algn="ctr" indent="0" marL="0">
+            <a:pPr marL="0" indent="0" algn="ctr">
               <a:buNone/>
             </a:pPr>
             <a:r>
@@ -11919,7 +12001,7 @@
           <a:bodyPr wrap="square" lIns="0" tIns="0" rIns="0" bIns="0" rtlCol="0" anchor="ctr"/>
           <a:lstStyle/>
           <a:p>
-            <a:pPr indent="0" marL="0">
+            <a:pPr marL="0" indent="0">
               <a:lnSpc>
                 <a:spcPct val="103000"/>
               </a:lnSpc>
@@ -11961,7 +12043,7 @@
           <a:bodyPr wrap="square" lIns="0" tIns="0" rIns="0" bIns="0" rtlCol="0" anchor="ctr"/>
           <a:lstStyle/>
           <a:p>
-            <a:pPr indent="0" marL="0">
+            <a:pPr marL="0" indent="0">
               <a:buNone/>
             </a:pPr>
             <a:r>
@@ -12000,7 +12082,7 @@
           <a:bodyPr wrap="square" lIns="0" tIns="0" rIns="0" bIns="0" rtlCol="0" anchor="ctr"/>
           <a:lstStyle/>
           <a:p>
-            <a:pPr algn="l" indent="0" marL="0">
+            <a:pPr marL="0" indent="0" algn="l">
               <a:buNone/>
             </a:pPr>
             <a:r>
@@ -12039,7 +12121,7 @@
           <a:bodyPr wrap="square" lIns="0" tIns="0" rIns="0" bIns="0" rtlCol="0" anchor="ctr"/>
           <a:lstStyle/>
           <a:p>
-            <a:pPr algn="r" indent="0" marL="0">
+            <a:pPr marL="0" indent="0" algn="r">
               <a:buNone/>
             </a:pPr>
             <a:r>
@@ -12073,6 +12155,7 @@
         <a:solidFill>
           <a:srgbClr val="FFFFFF"/>
         </a:solidFill>
+        <a:effectLst/>
       </p:bgPr>
     </p:bg>
     <p:spTree>
@@ -12108,7 +12191,7 @@
           </a:solidFill>
           <a:ln/>
           <a:effectLst>
-            <a:outerShdw sx="100000" sy="100000" kx="0" ky="0" algn="bl" rotWithShape="0" blurRad="63500" dist="25400" dir="5400000">
+            <a:outerShdw blurRad="63500" dist="25400" dir="5400000" algn="bl" rotWithShape="0">
               <a:srgbClr val="0B2E29">
                 <a:alpha val="18000"/>
               </a:srgbClr>
@@ -12117,19 +12200,22 @@
         </p:spPr>
         <p:txBody>
           <a:bodyPr/>
-          <a:p/>
+          <a:lstStyle/>
+          <a:p>
+            <a:endParaRPr/>
+          </a:p>
         </p:txBody>
       </p:sp>
       <p:pic>
         <p:nvPicPr>
-          <p:cNvPr id="3" name="Image 0" descr="preencoded.png">    </p:cNvPr>
+          <p:cNvPr id="3" name="Image 0" descr="preencoded.png"/>
           <p:cNvPicPr>
             <a:picLocks noChangeAspect="1"/>
           </p:cNvPicPr>
           <p:nvPr/>
         </p:nvPicPr>
         <p:blipFill>
-          <a:blip r:embed="rId1"/>
+          <a:blip r:embed="rId3"/>
           <a:stretch>
             <a:fillRect/>
           </a:stretch>
@@ -12165,11 +12251,11 @@
           <a:bodyPr wrap="square" lIns="0" tIns="0" rIns="0" bIns="0" rtlCol="0" anchor="ctr"/>
           <a:lstStyle/>
           <a:p>
-            <a:pPr indent="0" marL="0">
-              <a:buNone/>
-            </a:pPr>
-            <a:r>
-              <a:rPr lang="en-US" sz="1050" b="1" spc="200" kern="0" dirty="0">
+            <a:pPr marL="0" indent="0">
+              <a:buNone/>
+            </a:pPr>
+            <a:r>
+              <a:rPr lang="en-US" sz="1050" b="1" kern="0" spc="200" dirty="0">
                 <a:solidFill>
                   <a:srgbClr val="0E7C66"/>
                 </a:solidFill>
@@ -12204,7 +12290,7 @@
           <a:bodyPr wrap="square" lIns="0" tIns="0" rIns="0" bIns="0" rtlCol="0" anchor="ctr"/>
           <a:lstStyle/>
           <a:p>
-            <a:pPr indent="0" marL="0">
+            <a:pPr marL="0" indent="0">
               <a:buNone/>
             </a:pPr>
             <a:r>
@@ -12230,8 +12316,8 @@
         </p:nvSpPr>
         <p:spPr>
           <a:xfrm>
-            <a:off x="502920" y="1417320"/>
-            <a:ext cx="2587752" cy="1554480"/>
+            <a:off x="512064" y="1163901"/>
+            <a:ext cx="2587752" cy="1807899"/>
           </a:xfrm>
           <a:prstGeom prst="roundRect">
             <a:avLst>
@@ -12248,7 +12334,7 @@
             <a:prstDash val="solid"/>
           </a:ln>
           <a:effectLst>
-            <a:outerShdw sx="100000" sy="100000" kx="0" ky="0" algn="bl" rotWithShape="0" blurRad="76200" dist="25400" dir="5400000">
+            <a:outerShdw blurRad="76200" dist="25400" dir="5400000" algn="bl" rotWithShape="0">
               <a:srgbClr val="0B2E29">
                 <a:alpha val="10000"/>
               </a:srgbClr>
@@ -12257,7 +12343,10 @@
         </p:spPr>
         <p:txBody>
           <a:bodyPr/>
-          <a:p/>
+          <a:lstStyle/>
+          <a:p>
+            <a:endParaRPr/>
+          </a:p>
         </p:txBody>
       </p:sp>
       <p:sp>
@@ -12268,7 +12357,7 @@
         </p:nvSpPr>
         <p:spPr>
           <a:xfrm>
-            <a:off x="704088" y="1591056"/>
+            <a:off x="704088" y="1276241"/>
             <a:ext cx="2185416" cy="502920"/>
           </a:xfrm>
           <a:prstGeom prst="rect">
@@ -12281,7 +12370,7 @@
           <a:bodyPr wrap="square" lIns="0" tIns="0" rIns="0" bIns="0" rtlCol="0" anchor="ctr"/>
           <a:lstStyle/>
           <a:p>
-            <a:pPr indent="0" marL="0">
+            <a:pPr marL="0" indent="0">
               <a:buNone/>
             </a:pPr>
             <a:r>
@@ -12307,7 +12396,7 @@
         </p:nvSpPr>
         <p:spPr>
           <a:xfrm>
-            <a:off x="704088" y="2139696"/>
+            <a:off x="749808" y="1775242"/>
             <a:ext cx="2185416" cy="274320"/>
           </a:xfrm>
           <a:prstGeom prst="rect">
@@ -12320,7 +12409,7 @@
           <a:bodyPr wrap="square" lIns="0" tIns="0" rIns="0" bIns="0" rtlCol="0" anchor="ctr"/>
           <a:lstStyle/>
           <a:p>
-            <a:pPr indent="0" marL="0">
+            <a:pPr marL="0" indent="0">
               <a:buNone/>
             </a:pPr>
             <a:r>
@@ -12346,22 +12435,19 @@
         </p:nvSpPr>
         <p:spPr>
           <a:xfrm>
-            <a:off x="704088" y="2414016"/>
-            <a:ext cx="2185416" cy="457200"/>
-          </a:xfrm>
-          <a:prstGeom prst="rect">
-            <a:avLst/>
-          </a:prstGeom>
-          <a:noFill/>
-          <a:ln/>
-        </p:spPr>
-        <p:txBody>
-          <a:bodyPr wrap="square" lIns="0" tIns="0" rIns="0" bIns="0" rtlCol="0" anchor="ctr"/>
-          <a:lstStyle/>
-          <a:p>
-            <a:pPr indent="0" marL="0">
-              <a:buNone/>
-            </a:pPr>
+            <a:off x="704088" y="2084831"/>
+            <a:ext cx="2258568" cy="787690"/>
+          </a:xfrm>
+          <a:prstGeom prst="rect">
+            <a:avLst/>
+          </a:prstGeom>
+          <a:noFill/>
+          <a:ln/>
+        </p:spPr>
+        <p:txBody>
+          <a:bodyPr wrap="square" lIns="0" tIns="0" rIns="0" bIns="0" rtlCol="0" anchor="ctr"/>
+          <a:lstStyle/>
+          <a:p>
             <a:r>
               <a:rPr lang="en-US" sz="1150" dirty="0">
                 <a:solidFill>
@@ -12371,7 +12457,30 @@
                 <a:ea typeface="Calibri" pitchFamily="34" charset="-122"/>
                 <a:cs typeface="Calibri" pitchFamily="34" charset="-120"/>
               </a:rPr>
-              <a:t>fully applicable across EU financial entities</a:t>
+              <a:t>Fully applicable across EU financial entities </a:t>
+            </a:r>
+            <a:r>
+              <a:rPr lang="en-US" sz="1150" dirty="0">
+                <a:solidFill>
+                  <a:srgbClr val="4F6B65"/>
+                </a:solidFill>
+                <a:latin typeface="Calibri" pitchFamily="34" charset="0"/>
+                <a:ea typeface="Calibri" pitchFamily="34" charset="-122"/>
+                <a:cs typeface="Calibri" pitchFamily="34" charset="-120"/>
+                <a:sym typeface="Wingdings" panose="05000000000000000000" pitchFamily="2" charset="2"/>
+              </a:rPr>
+              <a:t></a:t>
+            </a:r>
+            <a:r>
+              <a:rPr lang="en-US" sz="1150" dirty="0">
+                <a:solidFill>
+                  <a:srgbClr val="4F6B65"/>
+                </a:solidFill>
+                <a:latin typeface="Calibri" pitchFamily="34" charset="0"/>
+                <a:ea typeface="Calibri" pitchFamily="34" charset="-122"/>
+                <a:cs typeface="Calibri" pitchFamily="34" charset="-120"/>
+              </a:rPr>
+              <a:t> https://www.eiopa.europa.eu/digital-operational-resilience-act-dora_en</a:t>
             </a:r>
             <a:endParaRPr lang="en-US" sz="1150" dirty="0"/>
           </a:p>
@@ -12385,8 +12494,8 @@
         </p:nvSpPr>
         <p:spPr>
           <a:xfrm>
-            <a:off x="3273552" y="1417320"/>
-            <a:ext cx="2587752" cy="1554480"/>
+            <a:off x="3273552" y="1170432"/>
+            <a:ext cx="2587752" cy="1801368"/>
           </a:xfrm>
           <a:prstGeom prst="roundRect">
             <a:avLst>
@@ -12403,7 +12512,7 @@
             <a:prstDash val="solid"/>
           </a:ln>
           <a:effectLst>
-            <a:outerShdw sx="100000" sy="100000" kx="0" ky="0" algn="bl" rotWithShape="0" blurRad="76200" dist="25400" dir="5400000">
+            <a:outerShdw blurRad="76200" dist="25400" dir="5400000" algn="bl" rotWithShape="0">
               <a:srgbClr val="0B2E29">
                 <a:alpha val="10000"/>
               </a:srgbClr>
@@ -12412,7 +12521,10 @@
         </p:spPr>
         <p:txBody>
           <a:bodyPr/>
-          <a:p/>
+          <a:lstStyle/>
+          <a:p>
+            <a:endParaRPr/>
+          </a:p>
         </p:txBody>
       </p:sp>
       <p:sp>
@@ -12423,7 +12535,7 @@
         </p:nvSpPr>
         <p:spPr>
           <a:xfrm>
-            <a:off x="3474720" y="1591056"/>
+            <a:off x="3474720" y="1276241"/>
             <a:ext cx="2185416" cy="502920"/>
           </a:xfrm>
           <a:prstGeom prst="rect">
@@ -12436,7 +12548,7 @@
           <a:bodyPr wrap="square" lIns="0" tIns="0" rIns="0" bIns="0" rtlCol="0" anchor="ctr"/>
           <a:lstStyle/>
           <a:p>
-            <a:pPr indent="0" marL="0">
+            <a:pPr marL="0" indent="0">
               <a:buNone/>
             </a:pPr>
             <a:r>
@@ -12462,7 +12574,7 @@
         </p:nvSpPr>
         <p:spPr>
           <a:xfrm>
-            <a:off x="3474720" y="2139696"/>
+            <a:off x="3474720" y="1776549"/>
             <a:ext cx="2185416" cy="274320"/>
           </a:xfrm>
           <a:prstGeom prst="rect">
@@ -12475,7 +12587,7 @@
           <a:bodyPr wrap="square" lIns="0" tIns="0" rIns="0" bIns="0" rtlCol="0" anchor="ctr"/>
           <a:lstStyle/>
           <a:p>
-            <a:pPr indent="0" marL="0">
+            <a:pPr marL="0" indent="0">
               <a:buNone/>
             </a:pPr>
             <a:r>
@@ -12501,22 +12613,19 @@
         </p:nvSpPr>
         <p:spPr>
           <a:xfrm>
-            <a:off x="3474720" y="2414016"/>
-            <a:ext cx="2185416" cy="457200"/>
-          </a:xfrm>
-          <a:prstGeom prst="rect">
-            <a:avLst/>
-          </a:prstGeom>
-          <a:noFill/>
-          <a:ln/>
-        </p:spPr>
-        <p:txBody>
-          <a:bodyPr wrap="square" lIns="0" tIns="0" rIns="0" bIns="0" rtlCol="0" anchor="ctr"/>
-          <a:lstStyle/>
-          <a:p>
-            <a:pPr indent="0" marL="0">
-              <a:buNone/>
-            </a:pPr>
+            <a:off x="3474720" y="2063277"/>
+            <a:ext cx="2185416" cy="851045"/>
+          </a:xfrm>
+          <a:prstGeom prst="rect">
+            <a:avLst/>
+          </a:prstGeom>
+          <a:noFill/>
+          <a:ln/>
+        </p:spPr>
+        <p:txBody>
+          <a:bodyPr wrap="square" lIns="0" tIns="0" rIns="0" bIns="0" rtlCol="0" anchor="ctr"/>
+          <a:lstStyle/>
+          <a:p>
             <a:r>
               <a:rPr lang="en-US" sz="1150" dirty="0">
                 <a:solidFill>
@@ -12526,7 +12635,19 @@
                 <a:ea typeface="Calibri" pitchFamily="34" charset="-122"/>
                 <a:cs typeface="Calibri" pitchFamily="34" charset="-120"/>
               </a:rPr>
-              <a:t>operational-resilience transition period closed</a:t>
+              <a:t>Operational-resilience transition period closed </a:t>
+            </a:r>
+            <a:r>
+              <a:rPr lang="en-US" sz="1150" dirty="0">
+                <a:solidFill>
+                  <a:srgbClr val="4F6B65"/>
+                </a:solidFill>
+                <a:latin typeface="Calibri" pitchFamily="34" charset="0"/>
+                <a:ea typeface="Calibri" pitchFamily="34" charset="-122"/>
+                <a:cs typeface="Calibri" pitchFamily="34" charset="-120"/>
+                <a:sym typeface="Wingdings" panose="05000000000000000000" pitchFamily="2" charset="2"/>
+              </a:rPr>
+              <a:t> https://www.fca.org.uk/publications/policy-statements/ps21-3-building-operational-resilience</a:t>
             </a:r>
             <a:endParaRPr lang="en-US" sz="1150" dirty="0"/>
           </a:p>
@@ -12540,8 +12661,8 @@
         </p:nvSpPr>
         <p:spPr>
           <a:xfrm>
-            <a:off x="6044184" y="1417320"/>
-            <a:ext cx="2587752" cy="1554480"/>
+            <a:off x="6044184" y="1170432"/>
+            <a:ext cx="2587752" cy="1801368"/>
           </a:xfrm>
           <a:prstGeom prst="roundRect">
             <a:avLst>
@@ -12558,7 +12679,7 @@
             <a:prstDash val="solid"/>
           </a:ln>
           <a:effectLst>
-            <a:outerShdw sx="100000" sy="100000" kx="0" ky="0" algn="bl" rotWithShape="0" blurRad="76200" dist="25400" dir="5400000">
+            <a:outerShdw blurRad="76200" dist="25400" dir="5400000" algn="bl" rotWithShape="0">
               <a:srgbClr val="0B2E29">
                 <a:alpha val="10000"/>
               </a:srgbClr>
@@ -12567,7 +12688,10 @@
         </p:spPr>
         <p:txBody>
           <a:bodyPr/>
-          <a:p/>
+          <a:lstStyle/>
+          <a:p>
+            <a:endParaRPr dirty="0"/>
+          </a:p>
         </p:txBody>
       </p:sp>
       <p:sp>
@@ -12578,7 +12702,7 @@
         </p:nvSpPr>
         <p:spPr>
           <a:xfrm>
-            <a:off x="6245352" y="1591056"/>
+            <a:off x="6245352" y="1273629"/>
             <a:ext cx="2185416" cy="502920"/>
           </a:xfrm>
           <a:prstGeom prst="rect">
@@ -12591,7 +12715,7 @@
           <a:bodyPr wrap="square" lIns="0" tIns="0" rIns="0" bIns="0" rtlCol="0" anchor="ctr"/>
           <a:lstStyle/>
           <a:p>
-            <a:pPr indent="0" marL="0">
+            <a:pPr marL="0" indent="0">
               <a:buNone/>
             </a:pPr>
             <a:r>
@@ -12617,7 +12741,7 @@
         </p:nvSpPr>
         <p:spPr>
           <a:xfrm>
-            <a:off x="6245352" y="2139696"/>
+            <a:off x="6181344" y="1779161"/>
             <a:ext cx="2185416" cy="274320"/>
           </a:xfrm>
           <a:prstGeom prst="rect">
@@ -12630,7 +12754,7 @@
           <a:bodyPr wrap="square" lIns="0" tIns="0" rIns="0" bIns="0" rtlCol="0" anchor="ctr"/>
           <a:lstStyle/>
           <a:p>
-            <a:pPr indent="0" marL="0">
+            <a:pPr marL="0" indent="0">
               <a:buNone/>
             </a:pPr>
             <a:r>
@@ -12656,20 +12780,20 @@
         </p:nvSpPr>
         <p:spPr>
           <a:xfrm>
-            <a:off x="6245352" y="2414016"/>
-            <a:ext cx="2185416" cy="457200"/>
-          </a:xfrm>
-          <a:prstGeom prst="rect">
-            <a:avLst/>
-          </a:prstGeom>
-          <a:noFill/>
-          <a:ln/>
-        </p:spPr>
-        <p:txBody>
-          <a:bodyPr wrap="square" lIns="0" tIns="0" rIns="0" bIns="0" rtlCol="0" anchor="ctr"/>
-          <a:lstStyle/>
-          <a:p>
-            <a:pPr indent="0" marL="0">
+            <a:off x="6194407" y="2090382"/>
+            <a:ext cx="2300369" cy="703436"/>
+          </a:xfrm>
+          <a:prstGeom prst="rect">
+            <a:avLst/>
+          </a:prstGeom>
+          <a:noFill/>
+          <a:ln/>
+        </p:spPr>
+        <p:txBody>
+          <a:bodyPr wrap="square" lIns="0" tIns="0" rIns="0" bIns="0" rtlCol="0" anchor="ctr"/>
+          <a:lstStyle/>
+          <a:p>
+            <a:pPr marL="0" indent="0">
               <a:buNone/>
             </a:pPr>
             <a:r>
@@ -12681,9 +12805,41 @@
                 <a:ea typeface="Calibri" pitchFamily="34" charset="-122"/>
                 <a:cs typeface="Calibri" pitchFamily="34" charset="-120"/>
               </a:rPr>
-              <a:t>robustness, cybersecurity &amp; documented red-teaming</a:t>
-            </a:r>
-            <a:endParaRPr lang="en-US" sz="1150" dirty="0"/>
+              <a:t>Robustness, cybersecurity &amp; documented red-teaming </a:t>
+            </a:r>
+            <a:r>
+              <a:rPr lang="en-US" sz="1150" dirty="0">
+                <a:solidFill>
+                  <a:srgbClr val="4F6B65"/>
+                </a:solidFill>
+                <a:latin typeface="Calibri" pitchFamily="34" charset="0"/>
+                <a:ea typeface="Calibri" pitchFamily="34" charset="-122"/>
+                <a:cs typeface="Calibri" pitchFamily="34" charset="-120"/>
+                <a:sym typeface="Wingdings" panose="05000000000000000000" pitchFamily="2" charset="2"/>
+              </a:rPr>
+              <a:t></a:t>
+            </a:r>
+            <a:endParaRPr lang="en-US" sz="1150" dirty="0">
+              <a:solidFill>
+                <a:srgbClr val="4F6B65"/>
+              </a:solidFill>
+              <a:latin typeface="Calibri" pitchFamily="34" charset="0"/>
+              <a:ea typeface="Calibri" pitchFamily="34" charset="-122"/>
+              <a:cs typeface="Calibri" pitchFamily="34" charset="-120"/>
+            </a:endParaRPr>
+          </a:p>
+          <a:p>
+            <a:r>
+              <a:rPr lang="en-US" sz="1150" dirty="0">
+                <a:solidFill>
+                  <a:srgbClr val="4F6B65"/>
+                </a:solidFill>
+                <a:latin typeface="Calibri" pitchFamily="34" charset="0"/>
+                <a:ea typeface="Calibri" pitchFamily="34" charset="-122"/>
+                <a:cs typeface="Calibri" pitchFamily="34" charset="-120"/>
+              </a:rPr>
+              <a:t>https://artificialintelligenceact.eu/article/15/</a:t>
+            </a:r>
           </a:p>
         </p:txBody>
       </p:sp>
@@ -12713,7 +12869,7 @@
             <a:prstDash val="solid"/>
           </a:ln>
           <a:effectLst>
-            <a:outerShdw sx="100000" sy="100000" kx="0" ky="0" algn="bl" rotWithShape="0" blurRad="76200" dist="25400" dir="5400000">
+            <a:outerShdw blurRad="76200" dist="25400" dir="5400000" algn="bl" rotWithShape="0">
               <a:srgbClr val="0B2E29">
                 <a:alpha val="10000"/>
               </a:srgbClr>
@@ -12722,7 +12878,10 @@
         </p:spPr>
         <p:txBody>
           <a:bodyPr/>
-          <a:p/>
+          <a:lstStyle/>
+          <a:p>
+            <a:endParaRPr/>
+          </a:p>
         </p:txBody>
       </p:sp>
       <p:sp>
@@ -12746,7 +12905,7 @@
           <a:bodyPr wrap="square" lIns="0" tIns="0" rIns="0" bIns="0" rtlCol="0" anchor="ctr"/>
           <a:lstStyle/>
           <a:p>
-            <a:pPr indent="0" marL="0">
+            <a:pPr marL="0" indent="0">
               <a:buNone/>
             </a:pPr>
             <a:r>
@@ -12785,7 +12944,7 @@
           <a:bodyPr wrap="square" lIns="0" tIns="0" rIns="0" bIns="0" rtlCol="0" anchor="ctr"/>
           <a:lstStyle/>
           <a:p>
-            <a:pPr indent="0" marL="0">
+            <a:pPr marL="0" indent="0">
               <a:lnSpc>
                 <a:spcPct val="105000"/>
               </a:lnSpc>
@@ -12827,7 +12986,7 @@
           <a:bodyPr wrap="square" lIns="0" tIns="0" rIns="0" bIns="0" rtlCol="0" anchor="ctr"/>
           <a:lstStyle/>
           <a:p>
-            <a:pPr algn="l" indent="0" marL="0">
+            <a:pPr marL="0" indent="0" algn="l">
               <a:buNone/>
             </a:pPr>
             <a:r>
@@ -12866,7 +13025,7 @@
           <a:bodyPr wrap="square" lIns="0" tIns="0" rIns="0" bIns="0" rtlCol="0" anchor="ctr"/>
           <a:lstStyle/>
           <a:p>
-            <a:pPr algn="r" indent="0" marL="0">
+            <a:pPr marL="0" indent="0" algn="r">
               <a:buNone/>
             </a:pPr>
             <a:r>
@@ -12900,6 +13059,7 @@
         <a:solidFill>
           <a:srgbClr val="FFFFFF"/>
         </a:solidFill>
+        <a:effectLst/>
       </p:bgPr>
     </p:bg>
     <p:spTree>
@@ -12935,7 +13095,7 @@
           </a:solidFill>
           <a:ln/>
           <a:effectLst>
-            <a:outerShdw sx="100000" sy="100000" kx="0" ky="0" algn="bl" rotWithShape="0" blurRad="63500" dist="25400" dir="5400000">
+            <a:outerShdw blurRad="63500" dist="25400" dir="5400000" algn="bl" rotWithShape="0">
               <a:srgbClr val="0B2E29">
                 <a:alpha val="18000"/>
               </a:srgbClr>
@@ -12944,19 +13104,22 @@
         </p:spPr>
         <p:txBody>
           <a:bodyPr/>
-          <a:p/>
+          <a:lstStyle/>
+          <a:p>
+            <a:endParaRPr/>
+          </a:p>
         </p:txBody>
       </p:sp>
       <p:pic>
         <p:nvPicPr>
-          <p:cNvPr id="3" name="Image 0" descr="preencoded.png">    </p:cNvPr>
+          <p:cNvPr id="3" name="Image 0" descr="preencoded.png"/>
           <p:cNvPicPr>
             <a:picLocks noChangeAspect="1"/>
           </p:cNvPicPr>
           <p:nvPr/>
         </p:nvPicPr>
         <p:blipFill>
-          <a:blip r:embed="rId1"/>
+          <a:blip r:embed="rId3"/>
           <a:stretch>
             <a:fillRect/>
           </a:stretch>
@@ -12992,11 +13155,11 @@
           <a:bodyPr wrap="square" lIns="0" tIns="0" rIns="0" bIns="0" rtlCol="0" anchor="ctr"/>
           <a:lstStyle/>
           <a:p>
-            <a:pPr indent="0" marL="0">
-              <a:buNone/>
-            </a:pPr>
-            <a:r>
-              <a:rPr lang="en-US" sz="1050" b="1" spc="200" kern="0" dirty="0">
+            <a:pPr marL="0" indent="0">
+              <a:buNone/>
+            </a:pPr>
+            <a:r>
+              <a:rPr lang="en-US" sz="1050" b="1" kern="0" spc="200" dirty="0">
                 <a:solidFill>
                   <a:srgbClr val="0E7C66"/>
                 </a:solidFill>
@@ -13031,7 +13194,7 @@
           <a:bodyPr wrap="square" lIns="0" tIns="0" rIns="0" bIns="0" rtlCol="0" anchor="ctr"/>
           <a:lstStyle/>
           <a:p>
-            <a:pPr indent="0" marL="0">
+            <a:pPr marL="0" indent="0">
               <a:buNone/>
             </a:pPr>
             <a:r>
@@ -13070,7 +13233,7 @@
           <a:bodyPr wrap="square" lIns="0" tIns="0" rIns="0" bIns="0" rtlCol="0" anchor="ctr"/>
           <a:lstStyle/>
           <a:p>
-            <a:pPr indent="0" marL="0">
+            <a:pPr marL="0" indent="0">
               <a:buNone/>
             </a:pPr>
             <a:r>
@@ -13114,7 +13277,7 @@
             <a:prstDash val="solid"/>
           </a:ln>
           <a:effectLst>
-            <a:outerShdw sx="100000" sy="100000" kx="0" ky="0" algn="bl" rotWithShape="0" blurRad="76200" dist="25400" dir="5400000">
+            <a:outerShdw blurRad="76200" dist="25400" dir="5400000" algn="bl" rotWithShape="0">
               <a:srgbClr val="0B2E29">
                 <a:alpha val="10000"/>
               </a:srgbClr>
@@ -13123,7 +13286,10 @@
         </p:spPr>
         <p:txBody>
           <a:bodyPr/>
-          <a:p/>
+          <a:lstStyle/>
+          <a:p>
+            <a:endParaRPr/>
+          </a:p>
         </p:txBody>
       </p:sp>
       <p:sp>
@@ -13147,19 +13313,22 @@
         </p:spPr>
         <p:txBody>
           <a:bodyPr/>
-          <a:p/>
+          <a:lstStyle/>
+          <a:p>
+            <a:endParaRPr/>
+          </a:p>
         </p:txBody>
       </p:sp>
       <p:pic>
         <p:nvPicPr>
-          <p:cNvPr id="9" name="Image 1" descr="preencoded.png">    </p:cNvPr>
+          <p:cNvPr id="9" name="Image 1" descr="preencoded.png"/>
           <p:cNvPicPr>
             <a:picLocks noChangeAspect="1"/>
           </p:cNvPicPr>
           <p:nvPr/>
         </p:nvPicPr>
         <p:blipFill>
-          <a:blip r:embed="rId2"/>
+          <a:blip r:embed="rId4"/>
           <a:stretch>
             <a:fillRect/>
           </a:stretch>
@@ -13195,7 +13364,7 @@
           <a:bodyPr wrap="square" lIns="0" tIns="0" rIns="0" bIns="0" rtlCol="0" anchor="ctr"/>
           <a:lstStyle/>
           <a:p>
-            <a:pPr indent="0" marL="0">
+            <a:pPr marL="0" indent="0">
               <a:buNone/>
             </a:pPr>
             <a:r>
@@ -13234,7 +13403,7 @@
           <a:bodyPr wrap="square" lIns="0" tIns="0" rIns="0" bIns="0" rtlCol="0" anchor="ctr"/>
           <a:lstStyle/>
           <a:p>
-            <a:pPr indent="0" marL="0">
+            <a:pPr marL="0" indent="0">
               <a:lnSpc>
                 <a:spcPct val="105000"/>
               </a:lnSpc>
@@ -13281,7 +13450,7 @@
             <a:prstDash val="solid"/>
           </a:ln>
           <a:effectLst>
-            <a:outerShdw sx="100000" sy="100000" kx="0" ky="0" algn="bl" rotWithShape="0" blurRad="76200" dist="25400" dir="5400000">
+            <a:outerShdw blurRad="76200" dist="25400" dir="5400000" algn="bl" rotWithShape="0">
               <a:srgbClr val="0B2E29">
                 <a:alpha val="10000"/>
               </a:srgbClr>
@@ -13290,7 +13459,10 @@
         </p:spPr>
         <p:txBody>
           <a:bodyPr/>
-          <a:p/>
+          <a:lstStyle/>
+          <a:p>
+            <a:endParaRPr/>
+          </a:p>
         </p:txBody>
       </p:sp>
       <p:sp>
@@ -13314,19 +13486,22 @@
         </p:spPr>
         <p:txBody>
           <a:bodyPr/>
-          <a:p/>
+          <a:lstStyle/>
+          <a:p>
+            <a:endParaRPr/>
+          </a:p>
         </p:txBody>
       </p:sp>
       <p:pic>
         <p:nvPicPr>
-          <p:cNvPr id="14" name="Image 2" descr="preencoded.png">    </p:cNvPr>
+          <p:cNvPr id="14" name="Image 2" descr="preencoded.png"/>
           <p:cNvPicPr>
             <a:picLocks noChangeAspect="1"/>
           </p:cNvPicPr>
           <p:nvPr/>
         </p:nvPicPr>
         <p:blipFill>
-          <a:blip r:embed="rId3"/>
+          <a:blip r:embed="rId5"/>
           <a:stretch>
             <a:fillRect/>
           </a:stretch>
@@ -13362,7 +13537,7 @@
           <a:bodyPr wrap="square" lIns="0" tIns="0" rIns="0" bIns="0" rtlCol="0" anchor="ctr"/>
           <a:lstStyle/>
           <a:p>
-            <a:pPr indent="0" marL="0">
+            <a:pPr marL="0" indent="0">
               <a:buNone/>
             </a:pPr>
             <a:r>
@@ -13401,7 +13576,7 @@
           <a:bodyPr wrap="square" lIns="0" tIns="0" rIns="0" bIns="0" rtlCol="0" anchor="ctr"/>
           <a:lstStyle/>
           <a:p>
-            <a:pPr indent="0" marL="0">
+            <a:pPr marL="0" indent="0">
               <a:lnSpc>
                 <a:spcPct val="105000"/>
               </a:lnSpc>
@@ -13448,7 +13623,7 @@
             <a:prstDash val="solid"/>
           </a:ln>
           <a:effectLst>
-            <a:outerShdw sx="100000" sy="100000" kx="0" ky="0" algn="bl" rotWithShape="0" blurRad="76200" dist="25400" dir="5400000">
+            <a:outerShdw blurRad="76200" dist="25400" dir="5400000" algn="bl" rotWithShape="0">
               <a:srgbClr val="0B2E29">
                 <a:alpha val="10000"/>
               </a:srgbClr>
@@ -13457,7 +13632,10 @@
         </p:spPr>
         <p:txBody>
           <a:bodyPr/>
-          <a:p/>
+          <a:lstStyle/>
+          <a:p>
+            <a:endParaRPr/>
+          </a:p>
         </p:txBody>
       </p:sp>
       <p:sp>
@@ -13481,19 +13659,22 @@
         </p:spPr>
         <p:txBody>
           <a:bodyPr/>
-          <a:p/>
+          <a:lstStyle/>
+          <a:p>
+            <a:endParaRPr/>
+          </a:p>
         </p:txBody>
       </p:sp>
       <p:pic>
         <p:nvPicPr>
-          <p:cNvPr id="19" name="Image 3" descr="preencoded.png">    </p:cNvPr>
+          <p:cNvPr id="19" name="Image 3" descr="preencoded.png"/>
           <p:cNvPicPr>
             <a:picLocks noChangeAspect="1"/>
           </p:cNvPicPr>
           <p:nvPr/>
         </p:nvPicPr>
         <p:blipFill>
-          <a:blip r:embed="rId4"/>
+          <a:blip r:embed="rId6"/>
           <a:stretch>
             <a:fillRect/>
           </a:stretch>
@@ -13529,7 +13710,7 @@
           <a:bodyPr wrap="square" lIns="0" tIns="0" rIns="0" bIns="0" rtlCol="0" anchor="ctr"/>
           <a:lstStyle/>
           <a:p>
-            <a:pPr indent="0" marL="0">
+            <a:pPr marL="0" indent="0">
               <a:buNone/>
             </a:pPr>
             <a:r>
@@ -13568,7 +13749,7 @@
           <a:bodyPr wrap="square" lIns="0" tIns="0" rIns="0" bIns="0" rtlCol="0" anchor="ctr"/>
           <a:lstStyle/>
           <a:p>
-            <a:pPr indent="0" marL="0">
+            <a:pPr marL="0" indent="0">
               <a:lnSpc>
                 <a:spcPct val="105000"/>
               </a:lnSpc>
@@ -13610,7 +13791,7 @@
           <a:bodyPr wrap="square" lIns="0" tIns="0" rIns="0" bIns="0" rtlCol="0" anchor="ctr"/>
           <a:lstStyle/>
           <a:p>
-            <a:pPr indent="0" marL="0">
+            <a:pPr marL="0" indent="0">
               <a:buNone/>
             </a:pPr>
             <a:r>
@@ -13649,7 +13830,7 @@
           <a:bodyPr wrap="square" lIns="0" tIns="0" rIns="0" bIns="0" rtlCol="0" anchor="ctr"/>
           <a:lstStyle/>
           <a:p>
-            <a:pPr algn="l" indent="0" marL="0">
+            <a:pPr marL="0" indent="0" algn="l">
               <a:buNone/>
             </a:pPr>
             <a:r>
@@ -13688,7 +13869,7 @@
           <a:bodyPr wrap="square" lIns="0" tIns="0" rIns="0" bIns="0" rtlCol="0" anchor="ctr"/>
           <a:lstStyle/>
           <a:p>
-            <a:pPr algn="l" indent="0" marL="0">
+            <a:pPr marL="0" indent="0" algn="l">
               <a:buNone/>
             </a:pPr>
             <a:r>
@@ -13727,7 +13908,7 @@
           <a:bodyPr wrap="square" lIns="0" tIns="0" rIns="0" bIns="0" rtlCol="0" anchor="ctr"/>
           <a:lstStyle/>
           <a:p>
-            <a:pPr algn="r" indent="0" marL="0">
+            <a:pPr marL="0" indent="0" algn="r">
               <a:buNone/>
             </a:pPr>
             <a:r>
@@ -13761,6 +13942,7 @@
         <a:solidFill>
           <a:srgbClr val="FFFFFF"/>
         </a:solidFill>
+        <a:effectLst/>
       </p:bgPr>
     </p:bg>
     <p:spTree>
@@ -13796,7 +13978,7 @@
           </a:solidFill>
           <a:ln/>
           <a:effectLst>
-            <a:outerShdw sx="100000" sy="100000" kx="0" ky="0" algn="bl" rotWithShape="0" blurRad="63500" dist="25400" dir="5400000">
+            <a:outerShdw blurRad="63500" dist="25400" dir="5400000" algn="bl" rotWithShape="0">
               <a:srgbClr val="0B2E29">
                 <a:alpha val="18000"/>
               </a:srgbClr>
@@ -13805,19 +13987,22 @@
         </p:spPr>
         <p:txBody>
           <a:bodyPr/>
-          <a:p/>
+          <a:lstStyle/>
+          <a:p>
+            <a:endParaRPr/>
+          </a:p>
         </p:txBody>
       </p:sp>
       <p:pic>
         <p:nvPicPr>
-          <p:cNvPr id="3" name="Image 0" descr="preencoded.png">    </p:cNvPr>
+          <p:cNvPr id="3" name="Image 0" descr="preencoded.png"/>
           <p:cNvPicPr>
             <a:picLocks noChangeAspect="1"/>
           </p:cNvPicPr>
           <p:nvPr/>
         </p:nvPicPr>
         <p:blipFill>
-          <a:blip r:embed="rId1"/>
+          <a:blip r:embed="rId3"/>
           <a:stretch>
             <a:fillRect/>
           </a:stretch>
@@ -13853,11 +14038,11 @@
           <a:bodyPr wrap="square" lIns="0" tIns="0" rIns="0" bIns="0" rtlCol="0" anchor="ctr"/>
           <a:lstStyle/>
           <a:p>
-            <a:pPr indent="0" marL="0">
-              <a:buNone/>
-            </a:pPr>
-            <a:r>
-              <a:rPr lang="en-US" sz="1050" b="1" spc="200" kern="0" dirty="0">
+            <a:pPr marL="0" indent="0">
+              <a:buNone/>
+            </a:pPr>
+            <a:r>
+              <a:rPr lang="en-US" sz="1050" b="1" kern="0" spc="200" dirty="0">
                 <a:solidFill>
                   <a:srgbClr val="0E7C66"/>
                 </a:solidFill>
@@ -13892,7 +14077,7 @@
           <a:bodyPr wrap="square" lIns="0" tIns="0" rIns="0" bIns="0" rtlCol="0" anchor="ctr"/>
           <a:lstStyle/>
           <a:p>
-            <a:pPr indent="0" marL="0">
+            <a:pPr marL="0" indent="0">
               <a:buNone/>
             </a:pPr>
             <a:r>
@@ -13936,7 +14121,7 @@
             <a:prstDash val="solid"/>
           </a:ln>
           <a:effectLst>
-            <a:outerShdw sx="100000" sy="100000" kx="0" ky="0" algn="bl" rotWithShape="0" blurRad="76200" dist="25400" dir="5400000">
+            <a:outerShdw blurRad="76200" dist="25400" dir="5400000" algn="bl" rotWithShape="0">
               <a:srgbClr val="0B2E29">
                 <a:alpha val="10000"/>
               </a:srgbClr>
@@ -13945,7 +14130,10 @@
         </p:spPr>
         <p:txBody>
           <a:bodyPr/>
-          <a:p/>
+          <a:lstStyle/>
+          <a:p>
+            <a:endParaRPr/>
+          </a:p>
         </p:txBody>
       </p:sp>
       <p:sp>
@@ -13976,7 +14164,10 @@
         </p:spPr>
         <p:txBody>
           <a:bodyPr/>
-          <a:p/>
+          <a:lstStyle/>
+          <a:p>
+            <a:endParaRPr/>
+          </a:p>
         </p:txBody>
       </p:sp>
       <p:sp>
@@ -14000,7 +14191,7 @@
           <a:bodyPr wrap="square" lIns="0" tIns="0" rIns="0" bIns="0" rtlCol="0" anchor="ctr"/>
           <a:lstStyle/>
           <a:p>
-            <a:pPr algn="ctr" indent="0" marL="0">
+            <a:pPr marL="0" indent="0" algn="ctr">
               <a:buNone/>
             </a:pPr>
             <a:r>
@@ -14039,7 +14230,7 @@
           <a:bodyPr wrap="square" lIns="0" tIns="0" rIns="0" bIns="0" rtlCol="0" anchor="ctr"/>
           <a:lstStyle/>
           <a:p>
-            <a:pPr indent="0" marL="0">
+            <a:pPr marL="0" indent="0">
               <a:lnSpc>
                 <a:spcPct val="103000"/>
               </a:lnSpc>
@@ -14086,7 +14277,7 @@
             <a:prstDash val="solid"/>
           </a:ln>
           <a:effectLst>
-            <a:outerShdw sx="100000" sy="100000" kx="0" ky="0" algn="bl" rotWithShape="0" blurRad="76200" dist="25400" dir="5400000">
+            <a:outerShdw blurRad="76200" dist="25400" dir="5400000" algn="bl" rotWithShape="0">
               <a:srgbClr val="0B2E29">
                 <a:alpha val="10000"/>
               </a:srgbClr>
@@ -14095,7 +14286,10 @@
         </p:spPr>
         <p:txBody>
           <a:bodyPr/>
-          <a:p/>
+          <a:lstStyle/>
+          <a:p>
+            <a:endParaRPr/>
+          </a:p>
         </p:txBody>
       </p:sp>
       <p:sp>
@@ -14126,7 +14320,10 @@
         </p:spPr>
         <p:txBody>
           <a:bodyPr/>
-          <a:p/>
+          <a:lstStyle/>
+          <a:p>
+            <a:endParaRPr/>
+          </a:p>
         </p:txBody>
       </p:sp>
       <p:sp>
@@ -14150,7 +14347,7 @@
           <a:bodyPr wrap="square" lIns="0" tIns="0" rIns="0" bIns="0" rtlCol="0" anchor="ctr"/>
           <a:lstStyle/>
           <a:p>
-            <a:pPr algn="ctr" indent="0" marL="0">
+            <a:pPr marL="0" indent="0" algn="ctr">
               <a:buNone/>
             </a:pPr>
             <a:r>
@@ -14189,7 +14386,7 @@
           <a:bodyPr wrap="square" lIns="0" tIns="0" rIns="0" bIns="0" rtlCol="0" anchor="ctr"/>
           <a:lstStyle/>
           <a:p>
-            <a:pPr indent="0" marL="0">
+            <a:pPr marL="0" indent="0">
               <a:lnSpc>
                 <a:spcPct val="103000"/>
               </a:lnSpc>
@@ -14236,7 +14433,7 @@
             <a:prstDash val="solid"/>
           </a:ln>
           <a:effectLst>
-            <a:outerShdw sx="100000" sy="100000" kx="0" ky="0" algn="bl" rotWithShape="0" blurRad="76200" dist="25400" dir="5400000">
+            <a:outerShdw blurRad="76200" dist="25400" dir="5400000" algn="bl" rotWithShape="0">
               <a:srgbClr val="0B2E29">
                 <a:alpha val="10000"/>
               </a:srgbClr>
@@ -14245,7 +14442,10 @@
         </p:spPr>
         <p:txBody>
           <a:bodyPr/>
-          <a:p/>
+          <a:lstStyle/>
+          <a:p>
+            <a:endParaRPr/>
+          </a:p>
         </p:txBody>
       </p:sp>
       <p:sp>
@@ -14276,7 +14476,10 @@
         </p:spPr>
         <p:txBody>
           <a:bodyPr/>
-          <a:p/>
+          <a:lstStyle/>
+          <a:p>
+            <a:endParaRPr/>
+          </a:p>
         </p:txBody>
       </p:sp>
       <p:sp>
@@ -14300,7 +14503,7 @@
           <a:bodyPr wrap="square" lIns="0" tIns="0" rIns="0" bIns="0" rtlCol="0" anchor="ctr"/>
           <a:lstStyle/>
           <a:p>
-            <a:pPr algn="ctr" indent="0" marL="0">
+            <a:pPr marL="0" indent="0" algn="ctr">
               <a:buNone/>
             </a:pPr>
             <a:r>
@@ -14339,7 +14542,7 @@
           <a:bodyPr wrap="square" lIns="0" tIns="0" rIns="0" bIns="0" rtlCol="0" anchor="ctr"/>
           <a:lstStyle/>
           <a:p>
-            <a:pPr indent="0" marL="0">
+            <a:pPr marL="0" indent="0">
               <a:lnSpc>
                 <a:spcPct val="103000"/>
               </a:lnSpc>
@@ -14383,7 +14586,7 @@
           <a:bodyPr wrap="square" lIns="1524" tIns="1524" rIns="1524" bIns="1524" rtlCol="0" anchor="ctr"/>
           <a:lstStyle/>
           <a:p>
-            <a:pPr algn="l" indent="0" marL="0">
+            <a:pPr marL="0" indent="0" algn="l">
               <a:lnSpc>
                 <a:spcPct val="100000"/>
               </a:lnSpc>
@@ -14400,12 +14603,6 @@
               </a:rPr>
               <a:t>Engineering translation:  </a:t>
             </a:r>
-            <a:pPr algn="l" indent="0" marL="0">
-              <a:lnSpc>
-                <a:spcPct val="100000"/>
-              </a:lnSpc>
-              <a:buNone/>
-            </a:pPr>
             <a:r>
               <a:rPr lang="en-US" sz="1250" dirty="0">
                 <a:solidFill>
@@ -14442,7 +14639,7 @@
           <a:bodyPr wrap="square" lIns="0" tIns="0" rIns="0" bIns="0" rtlCol="0" anchor="ctr"/>
           <a:lstStyle/>
           <a:p>
-            <a:pPr algn="l" indent="0" marL="0">
+            <a:pPr marL="0" indent="0" algn="l">
               <a:buNone/>
             </a:pPr>
             <a:r>
@@ -14481,7 +14678,7 @@
           <a:bodyPr wrap="square" lIns="0" tIns="0" rIns="0" bIns="0" rtlCol="0" anchor="ctr"/>
           <a:lstStyle/>
           <a:p>
-            <a:pPr algn="r" indent="0" marL="0">
+            <a:pPr marL="0" indent="0" algn="r">
               <a:buNone/>
             </a:pPr>
             <a:r>
@@ -14515,6 +14712,7 @@
         <a:solidFill>
           <a:srgbClr val="FFFFFF"/>
         </a:solidFill>
+        <a:effectLst/>
       </p:bgPr>
     </p:bg>
     <p:spTree>
@@ -14550,7 +14748,7 @@
           </a:solidFill>
           <a:ln/>
           <a:effectLst>
-            <a:outerShdw sx="100000" sy="100000" kx="0" ky="0" algn="bl" rotWithShape="0" blurRad="63500" dist="25400" dir="5400000">
+            <a:outerShdw blurRad="63500" dist="25400" dir="5400000" algn="bl" rotWithShape="0">
               <a:srgbClr val="0B2E29">
                 <a:alpha val="18000"/>
               </a:srgbClr>
@@ -14559,19 +14757,22 @@
         </p:spPr>
         <p:txBody>
           <a:bodyPr/>
-          <a:p/>
+          <a:lstStyle/>
+          <a:p>
+            <a:endParaRPr/>
+          </a:p>
         </p:txBody>
       </p:sp>
       <p:pic>
         <p:nvPicPr>
-          <p:cNvPr id="3" name="Image 0" descr="preencoded.png">    </p:cNvPr>
+          <p:cNvPr id="3" name="Image 0" descr="preencoded.png"/>
           <p:cNvPicPr>
             <a:picLocks noChangeAspect="1"/>
           </p:cNvPicPr>
           <p:nvPr/>
         </p:nvPicPr>
         <p:blipFill>
-          <a:blip r:embed="rId1"/>
+          <a:blip r:embed="rId3"/>
           <a:stretch>
             <a:fillRect/>
           </a:stretch>
@@ -14607,11 +14808,11 @@
           <a:bodyPr wrap="square" lIns="0" tIns="0" rIns="0" bIns="0" rtlCol="0" anchor="ctr"/>
           <a:lstStyle/>
           <a:p>
-            <a:pPr indent="0" marL="0">
-              <a:buNone/>
-            </a:pPr>
-            <a:r>
-              <a:rPr lang="en-US" sz="1050" b="1" spc="200" kern="0" dirty="0">
+            <a:pPr marL="0" indent="0">
+              <a:buNone/>
+            </a:pPr>
+            <a:r>
+              <a:rPr lang="en-US" sz="1050" b="1" kern="0" spc="200" dirty="0">
                 <a:solidFill>
                   <a:srgbClr val="0E7C66"/>
                 </a:solidFill>
@@ -14646,7 +14847,7 @@
           <a:bodyPr wrap="square" lIns="0" tIns="0" rIns="0" bIns="0" rtlCol="0" anchor="ctr"/>
           <a:lstStyle/>
           <a:p>
-            <a:pPr indent="0" marL="0">
+            <a:pPr marL="0" indent="0">
               <a:buNone/>
             </a:pPr>
             <a:r>
@@ -14690,7 +14891,7 @@
             <a:prstDash val="solid"/>
           </a:ln>
           <a:effectLst>
-            <a:outerShdw sx="100000" sy="100000" kx="0" ky="0" algn="bl" rotWithShape="0" blurRad="76200" dist="25400" dir="5400000">
+            <a:outerShdw blurRad="76200" dist="25400" dir="5400000" algn="bl" rotWithShape="0">
               <a:srgbClr val="0B2E29">
                 <a:alpha val="10000"/>
               </a:srgbClr>
@@ -14699,7 +14900,10 @@
         </p:spPr>
         <p:txBody>
           <a:bodyPr/>
-          <a:p/>
+          <a:lstStyle/>
+          <a:p>
+            <a:endParaRPr/>
+          </a:p>
         </p:txBody>
       </p:sp>
       <p:sp>
@@ -14730,7 +14934,10 @@
         </p:spPr>
         <p:txBody>
           <a:bodyPr/>
-          <a:p/>
+          <a:lstStyle/>
+          <a:p>
+            <a:endParaRPr/>
+          </a:p>
         </p:txBody>
       </p:sp>
       <p:sp>
@@ -14754,7 +14961,7 @@
           <a:bodyPr wrap="square" lIns="0" tIns="0" rIns="0" bIns="0" rtlCol="0" anchor="ctr"/>
           <a:lstStyle/>
           <a:p>
-            <a:pPr algn="ctr" indent="0" marL="0">
+            <a:pPr marL="0" indent="0" algn="ctr">
               <a:buNone/>
             </a:pPr>
             <a:r>
@@ -14793,7 +15000,7 @@
           <a:bodyPr wrap="square" lIns="0" tIns="0" rIns="0" bIns="0" rtlCol="0" anchor="ctr"/>
           <a:lstStyle/>
           <a:p>
-            <a:pPr indent="0" marL="0">
+            <a:pPr marL="0" indent="0">
               <a:lnSpc>
                 <a:spcPct val="103000"/>
               </a:lnSpc>
@@ -14840,7 +15047,7 @@
             <a:prstDash val="solid"/>
           </a:ln>
           <a:effectLst>
-            <a:outerShdw sx="100000" sy="100000" kx="0" ky="0" algn="bl" rotWithShape="0" blurRad="76200" dist="25400" dir="5400000">
+            <a:outerShdw blurRad="76200" dist="25400" dir="5400000" algn="bl" rotWithShape="0">
               <a:srgbClr val="0B2E29">
                 <a:alpha val="10000"/>
               </a:srgbClr>
@@ -14849,7 +15056,10 @@
         </p:spPr>
         <p:txBody>
           <a:bodyPr/>
-          <a:p/>
+          <a:lstStyle/>
+          <a:p>
+            <a:endParaRPr/>
+          </a:p>
         </p:txBody>
       </p:sp>
       <p:sp>
@@ -14880,7 +15090,10 @@
         </p:spPr>
         <p:txBody>
           <a:bodyPr/>
-          <a:p/>
+          <a:lstStyle/>
+          <a:p>
+            <a:endParaRPr/>
+          </a:p>
         </p:txBody>
       </p:sp>
       <p:sp>
@@ -14904,7 +15117,7 @@
           <a:bodyPr wrap="square" lIns="0" tIns="0" rIns="0" bIns="0" rtlCol="0" anchor="ctr"/>
           <a:lstStyle/>
           <a:p>
-            <a:pPr algn="ctr" indent="0" marL="0">
+            <a:pPr marL="0" indent="0" algn="ctr">
               <a:buNone/>
             </a:pPr>
             <a:r>
@@ -14943,7 +15156,7 @@
           <a:bodyPr wrap="square" lIns="0" tIns="0" rIns="0" bIns="0" rtlCol="0" anchor="ctr"/>
           <a:lstStyle/>
           <a:p>
-            <a:pPr indent="0" marL="0">
+            <a:pPr marL="0" indent="0">
               <a:lnSpc>
                 <a:spcPct val="103000"/>
               </a:lnSpc>
@@ -14990,7 +15203,7 @@
             <a:prstDash val="solid"/>
           </a:ln>
           <a:effectLst>
-            <a:outerShdw sx="100000" sy="100000" kx="0" ky="0" algn="bl" rotWithShape="0" blurRad="76200" dist="25400" dir="5400000">
+            <a:outerShdw blurRad="76200" dist="25400" dir="5400000" algn="bl" rotWithShape="0">
               <a:srgbClr val="0B2E29">
                 <a:alpha val="10000"/>
               </a:srgbClr>
@@ -14999,7 +15212,10 @@
         </p:spPr>
         <p:txBody>
           <a:bodyPr/>
-          <a:p/>
+          <a:lstStyle/>
+          <a:p>
+            <a:endParaRPr/>
+          </a:p>
         </p:txBody>
       </p:sp>
       <p:sp>
@@ -15030,7 +15246,10 @@
         </p:spPr>
         <p:txBody>
           <a:bodyPr/>
-          <a:p/>
+          <a:lstStyle/>
+          <a:p>
+            <a:endParaRPr/>
+          </a:p>
         </p:txBody>
       </p:sp>
       <p:sp>
@@ -15054,7 +15273,7 @@
           <a:bodyPr wrap="square" lIns="0" tIns="0" rIns="0" bIns="0" rtlCol="0" anchor="ctr"/>
           <a:lstStyle/>
           <a:p>
-            <a:pPr algn="ctr" indent="0" marL="0">
+            <a:pPr marL="0" indent="0" algn="ctr">
               <a:buNone/>
             </a:pPr>
             <a:r>
@@ -15093,7 +15312,7 @@
           <a:bodyPr wrap="square" lIns="0" tIns="0" rIns="0" bIns="0" rtlCol="0" anchor="ctr"/>
           <a:lstStyle/>
           <a:p>
-            <a:pPr indent="0" marL="0">
+            <a:pPr marL="0" indent="0">
               <a:lnSpc>
                 <a:spcPct val="103000"/>
               </a:lnSpc>
@@ -15137,7 +15356,7 @@
           <a:bodyPr wrap="square" lIns="1524" tIns="1524" rIns="1524" bIns="1524" rtlCol="0" anchor="ctr"/>
           <a:lstStyle/>
           <a:p>
-            <a:pPr algn="l" indent="0" marL="0">
+            <a:pPr marL="0" indent="0" algn="l">
               <a:lnSpc>
                 <a:spcPct val="100000"/>
               </a:lnSpc>
@@ -15154,12 +15373,6 @@
               </a:rPr>
               <a:t>Engineering translation:  </a:t>
             </a:r>
-            <a:pPr algn="l" indent="0" marL="0">
-              <a:lnSpc>
-                <a:spcPct val="100000"/>
-              </a:lnSpc>
-              <a:buNone/>
-            </a:pPr>
             <a:r>
               <a:rPr lang="en-US" sz="1250" dirty="0">
                 <a:solidFill>
@@ -15196,7 +15409,7 @@
           <a:bodyPr wrap="square" lIns="0" tIns="0" rIns="0" bIns="0" rtlCol="0" anchor="ctr"/>
           <a:lstStyle/>
           <a:p>
-            <a:pPr algn="l" indent="0" marL="0">
+            <a:pPr marL="0" indent="0" algn="l">
               <a:buNone/>
             </a:pPr>
             <a:r>
@@ -15235,7 +15448,7 @@
           <a:bodyPr wrap="square" lIns="0" tIns="0" rIns="0" bIns="0" rtlCol="0" anchor="ctr"/>
           <a:lstStyle/>
           <a:p>
-            <a:pPr algn="r" indent="0" marL="0">
+            <a:pPr marL="0" indent="0" algn="r">
               <a:buNone/>
             </a:pPr>
             <a:r>
@@ -15269,6 +15482,7 @@
         <a:solidFill>
           <a:srgbClr val="FFFFFF"/>
         </a:solidFill>
+        <a:effectLst/>
       </p:bgPr>
     </p:bg>
     <p:spTree>
@@ -15304,7 +15518,7 @@
           </a:solidFill>
           <a:ln/>
           <a:effectLst>
-            <a:outerShdw sx="100000" sy="100000" kx="0" ky="0" algn="bl" rotWithShape="0" blurRad="63500" dist="25400" dir="5400000">
+            <a:outerShdw blurRad="63500" dist="25400" dir="5400000" algn="bl" rotWithShape="0">
               <a:srgbClr val="0B2E29">
                 <a:alpha val="18000"/>
               </a:srgbClr>
@@ -15313,19 +15527,22 @@
         </p:spPr>
         <p:txBody>
           <a:bodyPr/>
-          <a:p/>
+          <a:lstStyle/>
+          <a:p>
+            <a:endParaRPr/>
+          </a:p>
         </p:txBody>
       </p:sp>
       <p:pic>
         <p:nvPicPr>
-          <p:cNvPr id="3" name="Image 0" descr="preencoded.png">    </p:cNvPr>
+          <p:cNvPr id="3" name="Image 0" descr="preencoded.png"/>
           <p:cNvPicPr>
             <a:picLocks noChangeAspect="1"/>
           </p:cNvPicPr>
           <p:nvPr/>
         </p:nvPicPr>
         <p:blipFill>
-          <a:blip r:embed="rId1"/>
+          <a:blip r:embed="rId3"/>
           <a:stretch>
             <a:fillRect/>
           </a:stretch>
@@ -15361,11 +15578,11 @@
           <a:bodyPr wrap="square" lIns="0" tIns="0" rIns="0" bIns="0" rtlCol="0" anchor="ctr"/>
           <a:lstStyle/>
           <a:p>
-            <a:pPr indent="0" marL="0">
-              <a:buNone/>
-            </a:pPr>
-            <a:r>
-              <a:rPr lang="en-US" sz="1050" b="1" spc="200" kern="0" dirty="0">
+            <a:pPr marL="0" indent="0">
+              <a:buNone/>
+            </a:pPr>
+            <a:r>
+              <a:rPr lang="en-US" sz="1050" b="1" kern="0" spc="200" dirty="0">
                 <a:solidFill>
                   <a:srgbClr val="0E7C66"/>
                 </a:solidFill>
@@ -15400,7 +15617,7 @@
           <a:bodyPr wrap="square" lIns="0" tIns="0" rIns="0" bIns="0" rtlCol="0" anchor="ctr"/>
           <a:lstStyle/>
           <a:p>
-            <a:pPr indent="0" marL="0">
+            <a:pPr marL="0" indent="0">
               <a:buNone/>
             </a:pPr>
             <a:r>
@@ -15444,7 +15661,7 @@
             <a:prstDash val="solid"/>
           </a:ln>
           <a:effectLst>
-            <a:outerShdw sx="100000" sy="100000" kx="0" ky="0" algn="bl" rotWithShape="0" blurRad="76200" dist="25400" dir="5400000">
+            <a:outerShdw blurRad="76200" dist="25400" dir="5400000" algn="bl" rotWithShape="0">
               <a:srgbClr val="0B2E29">
                 <a:alpha val="10000"/>
               </a:srgbClr>
@@ -15453,7 +15670,10 @@
         </p:spPr>
         <p:txBody>
           <a:bodyPr/>
-          <a:p/>
+          <a:lstStyle/>
+          <a:p>
+            <a:endParaRPr/>
+          </a:p>
         </p:txBody>
       </p:sp>
       <p:sp>
@@ -15484,7 +15704,10 @@
         </p:spPr>
         <p:txBody>
           <a:bodyPr/>
-          <a:p/>
+          <a:lstStyle/>
+          <a:p>
+            <a:endParaRPr/>
+          </a:p>
         </p:txBody>
       </p:sp>
       <p:sp>
@@ -15508,7 +15731,7 @@
           <a:bodyPr wrap="square" lIns="0" tIns="0" rIns="0" bIns="0" rtlCol="0" anchor="ctr"/>
           <a:lstStyle/>
           <a:p>
-            <a:pPr algn="ctr" indent="0" marL="0">
+            <a:pPr marL="0" indent="0" algn="ctr">
               <a:buNone/>
             </a:pPr>
             <a:r>
@@ -15547,7 +15770,7 @@
           <a:bodyPr wrap="square" lIns="0" tIns="0" rIns="0" bIns="0" rtlCol="0" anchor="ctr"/>
           <a:lstStyle/>
           <a:p>
-            <a:pPr indent="0" marL="0">
+            <a:pPr marL="0" indent="0">
               <a:lnSpc>
                 <a:spcPct val="103000"/>
               </a:lnSpc>
@@ -15594,7 +15817,7 @@
             <a:prstDash val="solid"/>
           </a:ln>
           <a:effectLst>
-            <a:outerShdw sx="100000" sy="100000" kx="0" ky="0" algn="bl" rotWithShape="0" blurRad="76200" dist="25400" dir="5400000">
+            <a:outerShdw blurRad="76200" dist="25400" dir="5400000" algn="bl" rotWithShape="0">
               <a:srgbClr val="0B2E29">
                 <a:alpha val="10000"/>
               </a:srgbClr>
@@ -15603,7 +15826,10 @@
         </p:spPr>
         <p:txBody>
           <a:bodyPr/>
-          <a:p/>
+          <a:lstStyle/>
+          <a:p>
+            <a:endParaRPr/>
+          </a:p>
         </p:txBody>
       </p:sp>
       <p:sp>
@@ -15634,7 +15860,10 @@
         </p:spPr>
         <p:txBody>
           <a:bodyPr/>
-          <a:p/>
+          <a:lstStyle/>
+          <a:p>
+            <a:endParaRPr/>
+          </a:p>
         </p:txBody>
       </p:sp>
       <p:sp>
@@ -15658,7 +15887,7 @@
           <a:bodyPr wrap="square" lIns="0" tIns="0" rIns="0" bIns="0" rtlCol="0" anchor="ctr"/>
           <a:lstStyle/>
           <a:p>
-            <a:pPr algn="ctr" indent="0" marL="0">
+            <a:pPr marL="0" indent="0" algn="ctr">
               <a:buNone/>
             </a:pPr>
             <a:r>
@@ -15697,7 +15926,7 @@
           <a:bodyPr wrap="square" lIns="0" tIns="0" rIns="0" bIns="0" rtlCol="0" anchor="ctr"/>
           <a:lstStyle/>
           <a:p>
-            <a:pPr indent="0" marL="0">
+            <a:pPr marL="0" indent="0">
               <a:lnSpc>
                 <a:spcPct val="103000"/>
               </a:lnSpc>
@@ -15744,7 +15973,7 @@
             <a:prstDash val="solid"/>
           </a:ln>
           <a:effectLst>
-            <a:outerShdw sx="100000" sy="100000" kx="0" ky="0" algn="bl" rotWithShape="0" blurRad="76200" dist="25400" dir="5400000">
+            <a:outerShdw blurRad="76200" dist="25400" dir="5400000" algn="bl" rotWithShape="0">
               <a:srgbClr val="0B2E29">
                 <a:alpha val="10000"/>
               </a:srgbClr>
@@ -15753,7 +15982,10 @@
         </p:spPr>
         <p:txBody>
           <a:bodyPr/>
-          <a:p/>
+          <a:lstStyle/>
+          <a:p>
+            <a:endParaRPr/>
+          </a:p>
         </p:txBody>
       </p:sp>
       <p:sp>
@@ -15784,7 +16016,10 @@
         </p:spPr>
         <p:txBody>
           <a:bodyPr/>
-          <a:p/>
+          <a:lstStyle/>
+          <a:p>
+            <a:endParaRPr/>
+          </a:p>
         </p:txBody>
       </p:sp>
       <p:sp>
@@ -15808,7 +16043,7 @@
           <a:bodyPr wrap="square" lIns="0" tIns="0" rIns="0" bIns="0" rtlCol="0" anchor="ctr"/>
           <a:lstStyle/>
           <a:p>
-            <a:pPr algn="ctr" indent="0" marL="0">
+            <a:pPr marL="0" indent="0" algn="ctr">
               <a:buNone/>
             </a:pPr>
             <a:r>
@@ -15847,7 +16082,7 @@
           <a:bodyPr wrap="square" lIns="0" tIns="0" rIns="0" bIns="0" rtlCol="0" anchor="ctr"/>
           <a:lstStyle/>
           <a:p>
-            <a:pPr indent="0" marL="0">
+            <a:pPr marL="0" indent="0">
               <a:lnSpc>
                 <a:spcPct val="103000"/>
               </a:lnSpc>
@@ -15891,7 +16126,7 @@
           <a:bodyPr wrap="square" lIns="1524" tIns="1524" rIns="1524" bIns="1524" rtlCol="0" anchor="ctr"/>
           <a:lstStyle/>
           <a:p>
-            <a:pPr algn="l" indent="0" marL="0">
+            <a:pPr marL="0" indent="0" algn="l">
               <a:lnSpc>
                 <a:spcPct val="100000"/>
               </a:lnSpc>
@@ -15908,12 +16143,6 @@
               </a:rPr>
               <a:t>Engineering translation:  </a:t>
             </a:r>
-            <a:pPr algn="l" indent="0" marL="0">
-              <a:lnSpc>
-                <a:spcPct val="100000"/>
-              </a:lnSpc>
-              <a:buNone/>
-            </a:pPr>
             <a:r>
               <a:rPr lang="en-US" sz="1250" dirty="0">
                 <a:solidFill>
@@ -15950,7 +16179,7 @@
           <a:bodyPr wrap="square" lIns="0" tIns="0" rIns="0" bIns="0" rtlCol="0" anchor="ctr"/>
           <a:lstStyle/>
           <a:p>
-            <a:pPr algn="l" indent="0" marL="0">
+            <a:pPr marL="0" indent="0" algn="l">
               <a:buNone/>
             </a:pPr>
             <a:r>
@@ -15989,7 +16218,7 @@
           <a:bodyPr wrap="square" lIns="0" tIns="0" rIns="0" bIns="0" rtlCol="0" anchor="ctr"/>
           <a:lstStyle/>
           <a:p>
-            <a:pPr algn="r" indent="0" marL="0">
+            <a:pPr marL="0" indent="0" algn="r">
               <a:buNone/>
             </a:pPr>
             <a:r>
@@ -16023,6 +16252,7 @@
         <a:solidFill>
           <a:srgbClr val="FFFFFF"/>
         </a:solidFill>
+        <a:effectLst/>
       </p:bgPr>
     </p:bg>
     <p:spTree>
@@ -16058,7 +16288,7 @@
           </a:solidFill>
           <a:ln/>
           <a:effectLst>
-            <a:outerShdw sx="100000" sy="100000" kx="0" ky="0" algn="bl" rotWithShape="0" blurRad="63500" dist="25400" dir="5400000">
+            <a:outerShdw blurRad="63500" dist="25400" dir="5400000" algn="bl" rotWithShape="0">
               <a:srgbClr val="0B2E29">
                 <a:alpha val="18000"/>
               </a:srgbClr>
@@ -16067,19 +16297,22 @@
         </p:spPr>
         <p:txBody>
           <a:bodyPr/>
-          <a:p/>
+          <a:lstStyle/>
+          <a:p>
+            <a:endParaRPr/>
+          </a:p>
         </p:txBody>
       </p:sp>
       <p:pic>
         <p:nvPicPr>
-          <p:cNvPr id="3" name="Image 0" descr="preencoded.png">    </p:cNvPr>
+          <p:cNvPr id="3" name="Image 0" descr="preencoded.png"/>
           <p:cNvPicPr>
             <a:picLocks noChangeAspect="1"/>
           </p:cNvPicPr>
           <p:nvPr/>
         </p:nvPicPr>
         <p:blipFill>
-          <a:blip r:embed="rId1"/>
+          <a:blip r:embed="rId3"/>
           <a:stretch>
             <a:fillRect/>
           </a:stretch>
@@ -16115,11 +16348,11 @@
           <a:bodyPr wrap="square" lIns="0" tIns="0" rIns="0" bIns="0" rtlCol="0" anchor="ctr"/>
           <a:lstStyle/>
           <a:p>
-            <a:pPr indent="0" marL="0">
-              <a:buNone/>
-            </a:pPr>
-            <a:r>
-              <a:rPr lang="en-US" sz="1050" b="1" spc="200" kern="0" dirty="0">
+            <a:pPr marL="0" indent="0">
+              <a:buNone/>
+            </a:pPr>
+            <a:r>
+              <a:rPr lang="en-US" sz="1050" b="1" kern="0" spc="200" dirty="0">
                 <a:solidFill>
                   <a:srgbClr val="0E7C66"/>
                 </a:solidFill>
@@ -16154,7 +16387,7 @@
           <a:bodyPr wrap="square" lIns="0" tIns="0" rIns="0" bIns="0" rtlCol="0" anchor="ctr"/>
           <a:lstStyle/>
           <a:p>
-            <a:pPr indent="0" marL="0">
+            <a:pPr marL="0" indent="0">
               <a:buNone/>
             </a:pPr>
             <a:r>
@@ -16193,7 +16426,7 @@
           <a:bodyPr wrap="square" lIns="0" tIns="0" rIns="0" bIns="0" rtlCol="0" anchor="ctr"/>
           <a:lstStyle/>
           <a:p>
-            <a:pPr indent="0" marL="0">
+            <a:pPr marL="0" indent="0">
               <a:lnSpc>
                 <a:spcPct val="105000"/>
               </a:lnSpc>
@@ -16240,7 +16473,7 @@
             <a:prstDash val="solid"/>
           </a:ln>
           <a:effectLst>
-            <a:outerShdw sx="100000" sy="100000" kx="0" ky="0" algn="bl" rotWithShape="0" blurRad="76200" dist="25400" dir="5400000">
+            <a:outerShdw blurRad="76200" dist="25400" dir="5400000" algn="bl" rotWithShape="0">
               <a:srgbClr val="0B2E29">
                 <a:alpha val="10000"/>
               </a:srgbClr>
@@ -16249,7 +16482,10 @@
         </p:spPr>
         <p:txBody>
           <a:bodyPr/>
-          <a:p/>
+          <a:lstStyle/>
+          <a:p>
+            <a:endParaRPr/>
+          </a:p>
         </p:txBody>
       </p:sp>
       <p:sp>
@@ -16273,7 +16509,7 @@
           <a:bodyPr wrap="square" lIns="0" tIns="0" rIns="0" bIns="0" rtlCol="0" anchor="ctr"/>
           <a:lstStyle/>
           <a:p>
-            <a:pPr algn="ctr" indent="0" marL="0">
+            <a:pPr marL="0" indent="0" algn="ctr">
               <a:buNone/>
             </a:pPr>
             <a:r>
@@ -16315,7 +16551,10 @@
         </p:spPr>
         <p:txBody>
           <a:bodyPr/>
-          <a:p/>
+          <a:lstStyle/>
+          <a:p>
+            <a:endParaRPr/>
+          </a:p>
         </p:txBody>
       </p:sp>
       <p:sp>
@@ -16344,7 +16583,7 @@
             <a:prstDash val="solid"/>
           </a:ln>
           <a:effectLst>
-            <a:outerShdw sx="100000" sy="100000" kx="0" ky="0" algn="bl" rotWithShape="0" blurRad="76200" dist="25400" dir="5400000">
+            <a:outerShdw blurRad="76200" dist="25400" dir="5400000" algn="bl" rotWithShape="0">
               <a:srgbClr val="0B2E29">
                 <a:alpha val="10000"/>
               </a:srgbClr>
@@ -16353,7 +16592,10 @@
         </p:spPr>
         <p:txBody>
           <a:bodyPr/>
-          <a:p/>
+          <a:lstStyle/>
+          <a:p>
+            <a:endParaRPr/>
+          </a:p>
         </p:txBody>
       </p:sp>
       <p:sp>
@@ -16377,7 +16619,7 @@
           <a:bodyPr wrap="square" lIns="0" tIns="0" rIns="0" bIns="0" rtlCol="0" anchor="ctr"/>
           <a:lstStyle/>
           <a:p>
-            <a:pPr algn="ctr" indent="0" marL="0">
+            <a:pPr marL="0" indent="0" algn="ctr">
               <a:buNone/>
             </a:pPr>
             <a:r>
@@ -16416,7 +16658,7 @@
           <a:bodyPr wrap="square" lIns="0" tIns="0" rIns="0" bIns="0" rtlCol="0" anchor="ctr"/>
           <a:lstStyle/>
           <a:p>
-            <a:pPr algn="ctr" indent="0" marL="0">
+            <a:pPr marL="0" indent="0" algn="ctr">
               <a:buNone/>
             </a:pPr>
             <a:r>
@@ -16458,7 +16700,10 @@
         </p:spPr>
         <p:txBody>
           <a:bodyPr/>
-          <a:p/>
+          <a:lstStyle/>
+          <a:p>
+            <a:endParaRPr/>
+          </a:p>
         </p:txBody>
       </p:sp>
       <p:sp>
@@ -16487,7 +16732,7 @@
             <a:prstDash val="solid"/>
           </a:ln>
           <a:effectLst>
-            <a:outerShdw sx="100000" sy="100000" kx="0" ky="0" algn="bl" rotWithShape="0" blurRad="76200" dist="25400" dir="5400000">
+            <a:outerShdw blurRad="76200" dist="25400" dir="5400000" algn="bl" rotWithShape="0">
               <a:srgbClr val="0B2E29">
                 <a:alpha val="10000"/>
               </a:srgbClr>
@@ -16496,7 +16741,10 @@
         </p:spPr>
         <p:txBody>
           <a:bodyPr/>
-          <a:p/>
+          <a:lstStyle/>
+          <a:p>
+            <a:endParaRPr/>
+          </a:p>
         </p:txBody>
       </p:sp>
       <p:sp>
@@ -16520,7 +16768,7 @@
           <a:bodyPr wrap="square" lIns="0" tIns="0" rIns="0" bIns="0" rtlCol="0" anchor="ctr"/>
           <a:lstStyle/>
           <a:p>
-            <a:pPr algn="ctr" indent="0" marL="0">
+            <a:pPr marL="0" indent="0" algn="ctr">
               <a:buNone/>
             </a:pPr>
             <a:r>
@@ -16559,7 +16807,7 @@
           <a:bodyPr wrap="square" lIns="0" tIns="0" rIns="0" bIns="0" rtlCol="0" anchor="ctr"/>
           <a:lstStyle/>
           <a:p>
-            <a:pPr algn="ctr" indent="0" marL="0">
+            <a:pPr marL="0" indent="0" algn="ctr">
               <a:buNone/>
             </a:pPr>
             <a:r>
@@ -16601,7 +16849,10 @@
         </p:spPr>
         <p:txBody>
           <a:bodyPr/>
-          <a:p/>
+          <a:lstStyle/>
+          <a:p>
+            <a:endParaRPr/>
+          </a:p>
         </p:txBody>
       </p:sp>
       <p:sp>
@@ -16630,7 +16881,7 @@
             <a:prstDash val="solid"/>
           </a:ln>
           <a:effectLst>
-            <a:outerShdw sx="100000" sy="100000" kx="0" ky="0" algn="bl" rotWithShape="0" blurRad="76200" dist="25400" dir="5400000">
+            <a:outerShdw blurRad="76200" dist="25400" dir="5400000" algn="bl" rotWithShape="0">
               <a:srgbClr val="0B2E29">
                 <a:alpha val="10000"/>
               </a:srgbClr>
@@ -16639,7 +16890,10 @@
         </p:spPr>
         <p:txBody>
           <a:bodyPr/>
-          <a:p/>
+          <a:lstStyle/>
+          <a:p>
+            <a:endParaRPr/>
+          </a:p>
         </p:txBody>
       </p:sp>
       <p:sp>
@@ -16663,7 +16917,7 @@
           <a:bodyPr wrap="square" lIns="0" tIns="0" rIns="0" bIns="0" rtlCol="0" anchor="ctr"/>
           <a:lstStyle/>
           <a:p>
-            <a:pPr algn="ctr" indent="0" marL="0">
+            <a:pPr marL="0" indent="0" algn="ctr">
               <a:buNone/>
             </a:pPr>
             <a:r>
@@ -16702,7 +16956,7 @@
           <a:bodyPr wrap="square" lIns="0" tIns="0" rIns="0" bIns="0" rtlCol="0" anchor="ctr"/>
           <a:lstStyle/>
           <a:p>
-            <a:pPr algn="ctr" indent="0" marL="0">
+            <a:pPr marL="0" indent="0" algn="ctr">
               <a:buNone/>
             </a:pPr>
             <a:r>
@@ -16744,7 +16998,10 @@
         </p:spPr>
         <p:txBody>
           <a:bodyPr/>
-          <a:p/>
+          <a:lstStyle/>
+          <a:p>
+            <a:endParaRPr/>
+          </a:p>
         </p:txBody>
       </p:sp>
       <p:sp>
@@ -16773,7 +17030,7 @@
             <a:prstDash val="solid"/>
           </a:ln>
           <a:effectLst>
-            <a:outerShdw sx="100000" sy="100000" kx="0" ky="0" algn="bl" rotWithShape="0" blurRad="76200" dist="25400" dir="5400000">
+            <a:outerShdw blurRad="76200" dist="25400" dir="5400000" algn="bl" rotWithShape="0">
               <a:srgbClr val="0B2E29">
                 <a:alpha val="10000"/>
               </a:srgbClr>
@@ -16782,7 +17039,10 @@
         </p:spPr>
         <p:txBody>
           <a:bodyPr/>
-          <a:p/>
+          <a:lstStyle/>
+          <a:p>
+            <a:endParaRPr/>
+          </a:p>
         </p:txBody>
       </p:sp>
       <p:sp>
@@ -16806,7 +17066,7 @@
           <a:bodyPr wrap="square" lIns="0" tIns="0" rIns="0" bIns="0" rtlCol="0" anchor="ctr"/>
           <a:lstStyle/>
           <a:p>
-            <a:pPr algn="ctr" indent="0" marL="0">
+            <a:pPr marL="0" indent="0" algn="ctr">
               <a:buNone/>
             </a:pPr>
             <a:r>
@@ -16845,7 +17105,7 @@
           <a:bodyPr wrap="square" lIns="0" tIns="0" rIns="0" bIns="0" rtlCol="0" anchor="ctr"/>
           <a:lstStyle/>
           <a:p>
-            <a:pPr algn="ctr" indent="0" marL="0">
+            <a:pPr marL="0" indent="0" algn="ctr">
               <a:buNone/>
             </a:pPr>
             <a:r>
@@ -16887,7 +17147,10 @@
         </p:spPr>
         <p:txBody>
           <a:bodyPr/>
-          <a:p/>
+          <a:lstStyle/>
+          <a:p>
+            <a:endParaRPr/>
+          </a:p>
         </p:txBody>
       </p:sp>
       <p:sp>
@@ -16916,7 +17179,7 @@
             <a:prstDash val="solid"/>
           </a:ln>
           <a:effectLst>
-            <a:outerShdw sx="100000" sy="100000" kx="0" ky="0" algn="bl" rotWithShape="0" blurRad="76200" dist="25400" dir="5400000">
+            <a:outerShdw blurRad="76200" dist="25400" dir="5400000" algn="bl" rotWithShape="0">
               <a:srgbClr val="0B2E29">
                 <a:alpha val="10000"/>
               </a:srgbClr>
@@ -16925,7 +17188,10 @@
         </p:spPr>
         <p:txBody>
           <a:bodyPr/>
-          <a:p/>
+          <a:lstStyle/>
+          <a:p>
+            <a:endParaRPr/>
+          </a:p>
         </p:txBody>
       </p:sp>
       <p:sp>
@@ -16949,7 +17215,7 @@
           <a:bodyPr wrap="square" lIns="0" tIns="0" rIns="0" bIns="0" rtlCol="0" anchor="ctr"/>
           <a:lstStyle/>
           <a:p>
-            <a:pPr algn="ctr" indent="0" marL="0">
+            <a:pPr marL="0" indent="0" algn="ctr">
               <a:buNone/>
             </a:pPr>
             <a:r>
@@ -16988,7 +17254,7 @@
           <a:bodyPr wrap="square" lIns="0" tIns="0" rIns="0" bIns="0" rtlCol="0" anchor="ctr"/>
           <a:lstStyle/>
           <a:p>
-            <a:pPr algn="ctr" indent="0" marL="0">
+            <a:pPr marL="0" indent="0" algn="ctr">
               <a:buNone/>
             </a:pPr>
             <a:r>
@@ -17027,7 +17293,7 @@
           <a:bodyPr wrap="square" lIns="0" tIns="0" rIns="0" bIns="0" rtlCol="0" anchor="ctr"/>
           <a:lstStyle/>
           <a:p>
-            <a:pPr indent="0" marL="0">
+            <a:pPr marL="0" indent="0">
               <a:buNone/>
             </a:pPr>
             <a:r>
@@ -17041,9 +17307,6 @@
               </a:rPr>
               <a:t>In code today: </a:t>
             </a:r>
-            <a:pPr indent="0" marL="0">
-              <a:buNone/>
-            </a:pPr>
             <a:r>
               <a:rPr lang="en-US" sz="1150" dirty="0">
                 <a:solidFill>
@@ -17055,9 +17318,6 @@
               </a:rPr>
               <a:t>EU AI Act · DORA · FCA.  </a:t>
             </a:r>
-            <a:pPr indent="0" marL="0">
-              <a:buNone/>
-            </a:pPr>
             <a:r>
               <a:rPr lang="en-US" sz="1150" dirty="0">
                 <a:solidFill>
@@ -17094,7 +17354,7 @@
           <a:bodyPr wrap="square" lIns="0" tIns="0" rIns="0" bIns="0" rtlCol="0" anchor="ctr"/>
           <a:lstStyle/>
           <a:p>
-            <a:pPr algn="l" indent="0" marL="0">
+            <a:pPr marL="0" indent="0" algn="l">
               <a:buNone/>
             </a:pPr>
             <a:r>
@@ -17133,7 +17393,7 @@
           <a:bodyPr wrap="square" lIns="0" tIns="0" rIns="0" bIns="0" rtlCol="0" anchor="ctr"/>
           <a:lstStyle/>
           <a:p>
-            <a:pPr algn="l" indent="0" marL="0">
+            <a:pPr marL="0" indent="0" algn="l">
               <a:buNone/>
             </a:pPr>
             <a:r>
@@ -17172,7 +17432,7 @@
           <a:bodyPr wrap="square" lIns="0" tIns="0" rIns="0" bIns="0" rtlCol="0" anchor="ctr"/>
           <a:lstStyle/>
           <a:p>
-            <a:pPr algn="r" indent="0" marL="0">
+            <a:pPr marL="0" indent="0" algn="r">
               <a:buNone/>
             </a:pPr>
             <a:r>
@@ -17206,6 +17466,7 @@
         <a:solidFill>
           <a:srgbClr val="FFFFFF"/>
         </a:solidFill>
+        <a:effectLst/>
       </p:bgPr>
     </p:bg>
     <p:spTree>
@@ -17241,7 +17502,7 @@
           </a:solidFill>
           <a:ln/>
           <a:effectLst>
-            <a:outerShdw sx="100000" sy="100000" kx="0" ky="0" algn="bl" rotWithShape="0" blurRad="63500" dist="25400" dir="5400000">
+            <a:outerShdw blurRad="63500" dist="25400" dir="5400000" algn="bl" rotWithShape="0">
               <a:srgbClr val="0B2E29">
                 <a:alpha val="18000"/>
               </a:srgbClr>
@@ -17250,19 +17511,22 @@
         </p:spPr>
         <p:txBody>
           <a:bodyPr/>
-          <a:p/>
+          <a:lstStyle/>
+          <a:p>
+            <a:endParaRPr/>
+          </a:p>
         </p:txBody>
       </p:sp>
       <p:pic>
         <p:nvPicPr>
-          <p:cNvPr id="3" name="Image 0" descr="preencoded.png">    </p:cNvPr>
+          <p:cNvPr id="3" name="Image 0" descr="preencoded.png"/>
           <p:cNvPicPr>
             <a:picLocks noChangeAspect="1"/>
           </p:cNvPicPr>
           <p:nvPr/>
         </p:nvPicPr>
         <p:blipFill>
-          <a:blip r:embed="rId1"/>
+          <a:blip r:embed="rId3"/>
           <a:stretch>
             <a:fillRect/>
           </a:stretch>
@@ -17298,11 +17562,11 @@
           <a:bodyPr wrap="square" lIns="0" tIns="0" rIns="0" bIns="0" rtlCol="0" anchor="ctr"/>
           <a:lstStyle/>
           <a:p>
-            <a:pPr indent="0" marL="0">
-              <a:buNone/>
-            </a:pPr>
-            <a:r>
-              <a:rPr lang="en-US" sz="1050" b="1" spc="200" kern="0" dirty="0">
+            <a:pPr marL="0" indent="0">
+              <a:buNone/>
+            </a:pPr>
+            <a:r>
+              <a:rPr lang="en-US" sz="1050" b="1" kern="0" spc="200" dirty="0">
                 <a:solidFill>
                   <a:srgbClr val="0E7C66"/>
                 </a:solidFill>
@@ -17337,7 +17601,7 @@
           <a:bodyPr wrap="square" lIns="0" tIns="0" rIns="0" bIns="0" rtlCol="0" anchor="ctr"/>
           <a:lstStyle/>
           <a:p>
-            <a:pPr indent="0" marL="0">
+            <a:pPr marL="0" indent="0">
               <a:buNone/>
             </a:pPr>
             <a:r>
@@ -17381,7 +17645,7 @@
             <a:prstDash val="solid"/>
           </a:ln>
           <a:effectLst>
-            <a:outerShdw sx="100000" sy="100000" kx="0" ky="0" algn="bl" rotWithShape="0" blurRad="76200" dist="25400" dir="5400000">
+            <a:outerShdw blurRad="76200" dist="25400" dir="5400000" algn="bl" rotWithShape="0">
               <a:srgbClr val="0B2E29">
                 <a:alpha val="10000"/>
               </a:srgbClr>
@@ -17390,7 +17654,10 @@
         </p:spPr>
         <p:txBody>
           <a:bodyPr/>
-          <a:p/>
+          <a:lstStyle/>
+          <a:p>
+            <a:endParaRPr/>
+          </a:p>
         </p:txBody>
       </p:sp>
       <p:sp>
@@ -17414,19 +17681,22 @@
         </p:spPr>
         <p:txBody>
           <a:bodyPr/>
-          <a:p/>
+          <a:lstStyle/>
+          <a:p>
+            <a:endParaRPr/>
+          </a:p>
         </p:txBody>
       </p:sp>
       <p:pic>
         <p:nvPicPr>
-          <p:cNvPr id="8" name="Image 1" descr="preencoded.png">    </p:cNvPr>
+          <p:cNvPr id="8" name="Image 1" descr="preencoded.png"/>
           <p:cNvPicPr>
             <a:picLocks noChangeAspect="1"/>
           </p:cNvPicPr>
           <p:nvPr/>
         </p:nvPicPr>
         <p:blipFill>
-          <a:blip r:embed="rId2"/>
+          <a:blip r:embed="rId4"/>
           <a:stretch>
             <a:fillRect/>
           </a:stretch>
@@ -17462,7 +17732,7 @@
           <a:bodyPr wrap="square" lIns="0" tIns="0" rIns="0" bIns="0" rtlCol="0" anchor="ctr"/>
           <a:lstStyle/>
           <a:p>
-            <a:pPr indent="0" marL="0">
+            <a:pPr marL="0" indent="0">
               <a:buNone/>
             </a:pPr>
             <a:r>
@@ -17501,7 +17771,7 @@
           <a:bodyPr wrap="square" lIns="0" tIns="0" rIns="0" bIns="0" rtlCol="0" anchor="ctr"/>
           <a:lstStyle/>
           <a:p>
-            <a:pPr indent="0" marL="0">
+            <a:pPr marL="0" indent="0">
               <a:buNone/>
             </a:pPr>
             <a:r>
@@ -17547,7 +17817,10 @@
         </p:spPr>
         <p:txBody>
           <a:bodyPr/>
-          <a:p/>
+          <a:lstStyle/>
+          <a:p>
+            <a:endParaRPr/>
+          </a:p>
         </p:txBody>
       </p:sp>
       <p:sp>
@@ -17571,7 +17844,7 @@
           <a:bodyPr wrap="square" lIns="0" tIns="0" rIns="0" bIns="0" rtlCol="0" anchor="ctr"/>
           <a:lstStyle/>
           <a:p>
-            <a:pPr algn="ctr" indent="0" marL="0">
+            <a:pPr marL="0" indent="0" algn="ctr">
               <a:buNone/>
             </a:pPr>
             <a:r>
@@ -17610,7 +17883,7 @@
           <a:bodyPr wrap="square" lIns="0" tIns="0" rIns="0" bIns="0" rtlCol="0" anchor="ctr"/>
           <a:lstStyle/>
           <a:p>
-            <a:pPr indent="0" marL="0">
+            <a:pPr marL="0" indent="0">
               <a:lnSpc>
                 <a:spcPct val="103000"/>
               </a:lnSpc>
@@ -17657,7 +17930,7 @@
             <a:prstDash val="solid"/>
           </a:ln>
           <a:effectLst>
-            <a:outerShdw sx="100000" sy="100000" kx="0" ky="0" algn="bl" rotWithShape="0" blurRad="76200" dist="25400" dir="5400000">
+            <a:outerShdw blurRad="76200" dist="25400" dir="5400000" algn="bl" rotWithShape="0">
               <a:srgbClr val="0B2E29">
                 <a:alpha val="10000"/>
               </a:srgbClr>
@@ -17666,7 +17939,10 @@
         </p:spPr>
         <p:txBody>
           <a:bodyPr/>
-          <a:p/>
+          <a:lstStyle/>
+          <a:p>
+            <a:endParaRPr/>
+          </a:p>
         </p:txBody>
       </p:sp>
       <p:sp>
@@ -17690,19 +17966,22 @@
         </p:spPr>
         <p:txBody>
           <a:bodyPr/>
-          <a:p/>
+          <a:lstStyle/>
+          <a:p>
+            <a:endParaRPr/>
+          </a:p>
         </p:txBody>
       </p:sp>
       <p:pic>
         <p:nvPicPr>
-          <p:cNvPr id="16" name="Image 2" descr="preencoded.png">    </p:cNvPr>
+          <p:cNvPr id="16" name="Image 2" descr="preencoded.png"/>
           <p:cNvPicPr>
             <a:picLocks noChangeAspect="1"/>
           </p:cNvPicPr>
           <p:nvPr/>
         </p:nvPicPr>
         <p:blipFill>
-          <a:blip r:embed="rId3"/>
+          <a:blip r:embed="rId5"/>
           <a:stretch>
             <a:fillRect/>
           </a:stretch>
@@ -17738,7 +18017,7 @@
           <a:bodyPr wrap="square" lIns="0" tIns="0" rIns="0" bIns="0" rtlCol="0" anchor="ctr"/>
           <a:lstStyle/>
           <a:p>
-            <a:pPr indent="0" marL="0">
+            <a:pPr marL="0" indent="0">
               <a:buNone/>
             </a:pPr>
             <a:r>
@@ -17777,7 +18056,7 @@
           <a:bodyPr wrap="square" lIns="0" tIns="0" rIns="0" bIns="0" rtlCol="0" anchor="ctr"/>
           <a:lstStyle/>
           <a:p>
-            <a:pPr indent="0" marL="0">
+            <a:pPr marL="0" indent="0">
               <a:buNone/>
             </a:pPr>
             <a:r>
@@ -17823,7 +18102,10 @@
         </p:spPr>
         <p:txBody>
           <a:bodyPr/>
-          <a:p/>
+          <a:lstStyle/>
+          <a:p>
+            <a:endParaRPr/>
+          </a:p>
         </p:txBody>
       </p:sp>
       <p:sp>
@@ -17847,7 +18129,7 @@
           <a:bodyPr wrap="square" lIns="0" tIns="0" rIns="0" bIns="0" rtlCol="0" anchor="ctr"/>
           <a:lstStyle/>
           <a:p>
-            <a:pPr algn="ctr" indent="0" marL="0">
+            <a:pPr marL="0" indent="0" algn="ctr">
               <a:buNone/>
             </a:pPr>
             <a:r>
@@ -17886,7 +18168,7 @@
           <a:bodyPr wrap="square" lIns="0" tIns="0" rIns="0" bIns="0" rtlCol="0" anchor="ctr"/>
           <a:lstStyle/>
           <a:p>
-            <a:pPr indent="0" marL="0">
+            <a:pPr marL="0" indent="0">
               <a:lnSpc>
                 <a:spcPct val="103000"/>
               </a:lnSpc>
@@ -17933,7 +18215,7 @@
             <a:prstDash val="solid"/>
           </a:ln>
           <a:effectLst>
-            <a:outerShdw sx="100000" sy="100000" kx="0" ky="0" algn="bl" rotWithShape="0" blurRad="76200" dist="25400" dir="5400000">
+            <a:outerShdw blurRad="76200" dist="25400" dir="5400000" algn="bl" rotWithShape="0">
               <a:srgbClr val="0B2E29">
                 <a:alpha val="10000"/>
               </a:srgbClr>
@@ -17942,7 +18224,10 @@
         </p:spPr>
         <p:txBody>
           <a:bodyPr/>
-          <a:p/>
+          <a:lstStyle/>
+          <a:p>
+            <a:endParaRPr/>
+          </a:p>
         </p:txBody>
       </p:sp>
       <p:sp>
@@ -17966,19 +18251,22 @@
         </p:spPr>
         <p:txBody>
           <a:bodyPr/>
-          <a:p/>
+          <a:lstStyle/>
+          <a:p>
+            <a:endParaRPr/>
+          </a:p>
         </p:txBody>
       </p:sp>
       <p:pic>
         <p:nvPicPr>
-          <p:cNvPr id="24" name="Image 3" descr="preencoded.png">    </p:cNvPr>
+          <p:cNvPr id="24" name="Image 3" descr="preencoded.png"/>
           <p:cNvPicPr>
             <a:picLocks noChangeAspect="1"/>
           </p:cNvPicPr>
           <p:nvPr/>
         </p:nvPicPr>
         <p:blipFill>
-          <a:blip r:embed="rId4"/>
+          <a:blip r:embed="rId3"/>
           <a:stretch>
             <a:fillRect/>
           </a:stretch>
@@ -18014,7 +18302,7 @@
           <a:bodyPr wrap="square" lIns="0" tIns="0" rIns="0" bIns="0" rtlCol="0" anchor="ctr"/>
           <a:lstStyle/>
           <a:p>
-            <a:pPr indent="0" marL="0">
+            <a:pPr marL="0" indent="0">
               <a:buNone/>
             </a:pPr>
             <a:r>
@@ -18053,7 +18341,7 @@
           <a:bodyPr wrap="square" lIns="0" tIns="0" rIns="0" bIns="0" rtlCol="0" anchor="ctr"/>
           <a:lstStyle/>
           <a:p>
-            <a:pPr indent="0" marL="0">
+            <a:pPr marL="0" indent="0">
               <a:buNone/>
             </a:pPr>
             <a:r>
@@ -18099,7 +18387,10 @@
         </p:spPr>
         <p:txBody>
           <a:bodyPr/>
-          <a:p/>
+          <a:lstStyle/>
+          <a:p>
+            <a:endParaRPr/>
+          </a:p>
         </p:txBody>
       </p:sp>
       <p:sp>
@@ -18123,7 +18414,7 @@
           <a:bodyPr wrap="square" lIns="0" tIns="0" rIns="0" bIns="0" rtlCol="0" anchor="ctr"/>
           <a:lstStyle/>
           <a:p>
-            <a:pPr algn="ctr" indent="0" marL="0">
+            <a:pPr marL="0" indent="0" algn="ctr">
               <a:buNone/>
             </a:pPr>
             <a:r>
@@ -18162,7 +18453,7 @@
           <a:bodyPr wrap="square" lIns="0" tIns="0" rIns="0" bIns="0" rtlCol="0" anchor="ctr"/>
           <a:lstStyle/>
           <a:p>
-            <a:pPr indent="0" marL="0">
+            <a:pPr marL="0" indent="0">
               <a:lnSpc>
                 <a:spcPct val="103000"/>
               </a:lnSpc>
@@ -18204,7 +18495,7 @@
           <a:bodyPr wrap="square" lIns="0" tIns="0" rIns="0" bIns="0" rtlCol="0" anchor="ctr"/>
           <a:lstStyle/>
           <a:p>
-            <a:pPr indent="0" marL="0">
+            <a:pPr marL="0" indent="0">
               <a:buNone/>
             </a:pPr>
             <a:r>
@@ -18243,7 +18534,7 @@
           <a:bodyPr wrap="square" lIns="0" tIns="0" rIns="0" bIns="0" rtlCol="0" anchor="ctr"/>
           <a:lstStyle/>
           <a:p>
-            <a:pPr algn="l" indent="0" marL="0">
+            <a:pPr marL="0" indent="0" algn="l">
               <a:buNone/>
             </a:pPr>
             <a:r>
@@ -18282,7 +18573,7 @@
           <a:bodyPr wrap="square" lIns="0" tIns="0" rIns="0" bIns="0" rtlCol="0" anchor="ctr"/>
           <a:lstStyle/>
           <a:p>
-            <a:pPr algn="r" indent="0" marL="0">
+            <a:pPr marL="0" indent="0" algn="r">
               <a:buNone/>
             </a:pPr>
             <a:r>
@@ -18316,6 +18607,7 @@
         <a:solidFill>
           <a:srgbClr val="FFFFFF"/>
         </a:solidFill>
+        <a:effectLst/>
       </p:bgPr>
     </p:bg>
     <p:spTree>
@@ -18351,7 +18643,7 @@
           </a:solidFill>
           <a:ln/>
           <a:effectLst>
-            <a:outerShdw sx="100000" sy="100000" kx="0" ky="0" algn="bl" rotWithShape="0" blurRad="63500" dist="25400" dir="5400000">
+            <a:outerShdw blurRad="63500" dist="25400" dir="5400000" algn="bl" rotWithShape="0">
               <a:srgbClr val="0B2E29">
                 <a:alpha val="18000"/>
               </a:srgbClr>
@@ -18360,19 +18652,22 @@
         </p:spPr>
         <p:txBody>
           <a:bodyPr/>
-          <a:p/>
+          <a:lstStyle/>
+          <a:p>
+            <a:endParaRPr/>
+          </a:p>
         </p:txBody>
       </p:sp>
       <p:pic>
         <p:nvPicPr>
-          <p:cNvPr id="3" name="Image 0" descr="preencoded.png">    </p:cNvPr>
+          <p:cNvPr id="3" name="Image 0" descr="preencoded.png"/>
           <p:cNvPicPr>
             <a:picLocks noChangeAspect="1"/>
           </p:cNvPicPr>
           <p:nvPr/>
         </p:nvPicPr>
         <p:blipFill>
-          <a:blip r:embed="rId1"/>
+          <a:blip r:embed="rId3"/>
           <a:stretch>
             <a:fillRect/>
           </a:stretch>
@@ -18408,11 +18703,11 @@
           <a:bodyPr wrap="square" lIns="0" tIns="0" rIns="0" bIns="0" rtlCol="0" anchor="ctr"/>
           <a:lstStyle/>
           <a:p>
-            <a:pPr indent="0" marL="0">
-              <a:buNone/>
-            </a:pPr>
-            <a:r>
-              <a:rPr lang="en-US" sz="1050" b="1" spc="200" kern="0" dirty="0">
+            <a:pPr marL="0" indent="0">
+              <a:buNone/>
+            </a:pPr>
+            <a:r>
+              <a:rPr lang="en-US" sz="1050" b="1" kern="0" spc="200" dirty="0">
                 <a:solidFill>
                   <a:srgbClr val="0E7C66"/>
                 </a:solidFill>
@@ -18447,7 +18742,7 @@
           <a:bodyPr wrap="square" lIns="0" tIns="0" rIns="0" bIns="0" rtlCol="0" anchor="ctr"/>
           <a:lstStyle/>
           <a:p>
-            <a:pPr indent="0" marL="0">
+            <a:pPr marL="0" indent="0">
               <a:buNone/>
             </a:pPr>
             <a:r>
@@ -18491,7 +18786,7 @@
             <a:prstDash val="solid"/>
           </a:ln>
           <a:effectLst>
-            <a:outerShdw sx="100000" sy="100000" kx="0" ky="0" algn="bl" rotWithShape="0" blurRad="76200" dist="25400" dir="5400000">
+            <a:outerShdw blurRad="76200" dist="25400" dir="5400000" algn="bl" rotWithShape="0">
               <a:srgbClr val="0B2E29">
                 <a:alpha val="10000"/>
               </a:srgbClr>
@@ -18500,7 +18795,10 @@
         </p:spPr>
         <p:txBody>
           <a:bodyPr/>
-          <a:p/>
+          <a:lstStyle/>
+          <a:p>
+            <a:endParaRPr/>
+          </a:p>
         </p:txBody>
       </p:sp>
       <p:sp>
@@ -18524,7 +18822,7 @@
           <a:bodyPr wrap="square" lIns="0" tIns="0" rIns="0" bIns="0" rtlCol="0" anchor="ctr"/>
           <a:lstStyle/>
           <a:p>
-            <a:pPr indent="0" marL="0">
+            <a:pPr marL="0" indent="0">
               <a:buNone/>
             </a:pPr>
             <a:r>
@@ -18563,7 +18861,7 @@
           <a:bodyPr wrap="square" lIns="0" tIns="0" rIns="0" bIns="0" rtlCol="0" anchor="ctr"/>
           <a:lstStyle/>
           <a:p>
-            <a:pPr indent="0" marL="0">
+            <a:pPr marL="0" indent="0">
               <a:lnSpc>
                 <a:spcPct val="105000"/>
               </a:lnSpc>
@@ -18583,7 +18881,7 @@
             <a:endParaRPr lang="en-US" sz="1250" dirty="0"/>
           </a:p>
           <a:p>
-            <a:pPr indent="0" marL="0">
+            <a:pPr marL="0" indent="0">
               <a:lnSpc>
                 <a:spcPct val="105000"/>
               </a:lnSpc>
@@ -18603,7 +18901,7 @@
             <a:endParaRPr lang="en-US" sz="1250" dirty="0"/>
           </a:p>
           <a:p>
-            <a:pPr indent="0" marL="0">
+            <a:pPr marL="0" indent="0">
               <a:lnSpc>
                 <a:spcPct val="105000"/>
               </a:lnSpc>
@@ -18612,7 +18910,7 @@
             <a:endParaRPr lang="en-US" sz="1250" dirty="0"/>
           </a:p>
           <a:p>
-            <a:pPr indent="0" marL="0">
+            <a:pPr marL="0" indent="0">
               <a:lnSpc>
                 <a:spcPct val="105000"/>
               </a:lnSpc>
@@ -18632,7 +18930,7 @@
             <a:endParaRPr lang="en-US" sz="1250" dirty="0"/>
           </a:p>
           <a:p>
-            <a:pPr indent="0" marL="0">
+            <a:pPr marL="0" indent="0">
               <a:lnSpc>
                 <a:spcPct val="105000"/>
               </a:lnSpc>
@@ -18652,7 +18950,7 @@
             <a:endParaRPr lang="en-US" sz="1250" dirty="0"/>
           </a:p>
           <a:p>
-            <a:pPr indent="0" marL="0">
+            <a:pPr marL="0" indent="0">
               <a:lnSpc>
                 <a:spcPct val="105000"/>
               </a:lnSpc>
@@ -18661,7 +18959,7 @@
             <a:endParaRPr lang="en-US" sz="1250" dirty="0"/>
           </a:p>
           <a:p>
-            <a:pPr indent="0" marL="0">
+            <a:pPr marL="0" indent="0">
               <a:lnSpc>
                 <a:spcPct val="105000"/>
               </a:lnSpc>
@@ -18708,7 +19006,7 @@
             <a:prstDash val="solid"/>
           </a:ln>
           <a:effectLst>
-            <a:outerShdw sx="100000" sy="100000" kx="0" ky="0" algn="bl" rotWithShape="0" blurRad="76200" dist="25400" dir="5400000">
+            <a:outerShdw blurRad="76200" dist="25400" dir="5400000" algn="bl" rotWithShape="0">
               <a:srgbClr val="0B2E29">
                 <a:alpha val="10000"/>
               </a:srgbClr>
@@ -18717,7 +19015,10 @@
         </p:spPr>
         <p:txBody>
           <a:bodyPr/>
-          <a:p/>
+          <a:lstStyle/>
+          <a:p>
+            <a:endParaRPr/>
+          </a:p>
         </p:txBody>
       </p:sp>
       <p:sp>
@@ -18741,7 +19042,10 @@
         </p:spPr>
         <p:txBody>
           <a:bodyPr/>
-          <a:p/>
+          <a:lstStyle/>
+          <a:p>
+            <a:endParaRPr/>
+          </a:p>
         </p:txBody>
       </p:sp>
       <p:sp>
@@ -18765,7 +19069,7 @@
           <a:bodyPr wrap="square" lIns="0" tIns="0" rIns="0" bIns="0" rtlCol="0" anchor="ctr"/>
           <a:lstStyle/>
           <a:p>
-            <a:pPr algn="ctr" indent="0" marL="0">
+            <a:pPr marL="0" indent="0" algn="ctr">
               <a:buNone/>
             </a:pPr>
             <a:r>
@@ -18804,7 +19108,7 @@
           <a:bodyPr wrap="square" lIns="0" tIns="0" rIns="0" bIns="0" rtlCol="0" anchor="ctr"/>
           <a:lstStyle/>
           <a:p>
-            <a:pPr indent="0" marL="0">
+            <a:pPr marL="0" indent="0">
               <a:buNone/>
             </a:pPr>
             <a:r>
@@ -18843,7 +19147,7 @@
           <a:bodyPr wrap="square" lIns="0" tIns="0" rIns="0" bIns="0" rtlCol="0" anchor="ctr"/>
           <a:lstStyle/>
           <a:p>
-            <a:pPr indent="0" marL="0">
+            <a:pPr marL="0" indent="0">
               <a:lnSpc>
                 <a:spcPct val="108000"/>
               </a:lnSpc>
@@ -18863,7 +19167,7 @@
             <a:endParaRPr lang="en-US" sz="1250" dirty="0"/>
           </a:p>
           <a:p>
-            <a:pPr indent="0" marL="0">
+            <a:pPr marL="0" indent="0">
               <a:lnSpc>
                 <a:spcPct val="108000"/>
               </a:lnSpc>
@@ -18883,7 +19187,7 @@
             <a:endParaRPr lang="en-US" sz="1250" dirty="0"/>
           </a:p>
           <a:p>
-            <a:pPr indent="0" marL="0">
+            <a:pPr marL="0" indent="0">
               <a:lnSpc>
                 <a:spcPct val="108000"/>
               </a:lnSpc>
@@ -18903,7 +19207,7 @@
             <a:endParaRPr lang="en-US" sz="1250" dirty="0"/>
           </a:p>
           <a:p>
-            <a:pPr indent="0" marL="0">
+            <a:pPr marL="0" indent="0">
               <a:lnSpc>
                 <a:spcPct val="108000"/>
               </a:lnSpc>
@@ -18912,7 +19216,7 @@
             <a:endParaRPr lang="en-US" sz="1250" dirty="0"/>
           </a:p>
           <a:p>
-            <a:pPr indent="0" marL="0">
+            <a:pPr marL="0" indent="0">
               <a:lnSpc>
                 <a:spcPct val="108000"/>
               </a:lnSpc>
@@ -18954,7 +19258,7 @@
           <a:bodyPr wrap="square" lIns="0" tIns="0" rIns="0" bIns="0" rtlCol="0" anchor="ctr"/>
           <a:lstStyle/>
           <a:p>
-            <a:pPr algn="l" indent="0" marL="0">
+            <a:pPr marL="0" indent="0" algn="l">
               <a:buNone/>
             </a:pPr>
             <a:r>
@@ -18993,7 +19297,7 @@
           <a:bodyPr wrap="square" lIns="0" tIns="0" rIns="0" bIns="0" rtlCol="0" anchor="ctr"/>
           <a:lstStyle/>
           <a:p>
-            <a:pPr algn="r" indent="0" marL="0">
+            <a:pPr marL="0" indent="0" algn="r">
               <a:buNone/>
             </a:pPr>
             <a:r>
@@ -19312,4 +19616,319 @@
     </a:ext>
   </a:extLst>
 </a:theme>
+</file>
+
+<file path=ppt/theme/theme2.xml><?xml version="1.0" encoding="utf-8"?>
+<a:theme xmlns:a="http://schemas.openxmlformats.org/drawingml/2006/main" name="Office Theme">
+  <a:themeElements>
+    <a:clrScheme name="Office">
+      <a:dk1>
+        <a:sysClr val="windowText" lastClr="000000"/>
+      </a:dk1>
+      <a:lt1>
+        <a:sysClr val="window" lastClr="FFFFFF"/>
+      </a:lt1>
+      <a:dk2>
+        <a:srgbClr val="0E2841"/>
+      </a:dk2>
+      <a:lt2>
+        <a:srgbClr val="E8E8E8"/>
+      </a:lt2>
+      <a:accent1>
+        <a:srgbClr val="156082"/>
+      </a:accent1>
+      <a:accent2>
+        <a:srgbClr val="E97132"/>
+      </a:accent2>
+      <a:accent3>
+        <a:srgbClr val="196B24"/>
+      </a:accent3>
+      <a:accent4>
+        <a:srgbClr val="0F9ED5"/>
+      </a:accent4>
+      <a:accent5>
+        <a:srgbClr val="A02B93"/>
+      </a:accent5>
+      <a:accent6>
+        <a:srgbClr val="4EA72E"/>
+      </a:accent6>
+      <a:hlink>
+        <a:srgbClr val="467886"/>
+      </a:hlink>
+      <a:folHlink>
+        <a:srgbClr val="96607D"/>
+      </a:folHlink>
+    </a:clrScheme>
+    <a:fontScheme name="Office">
+      <a:majorFont>
+        <a:latin typeface="Aptos Display" panose="02110004020202020204"/>
+        <a:ea typeface=""/>
+        <a:cs typeface=""/>
+        <a:font script="Jpan" typeface="游ゴシック Light"/>
+        <a:font script="Hang" typeface="맑은 고딕"/>
+        <a:font script="Hans" typeface="等线 Light"/>
+        <a:font script="Hant" typeface="新細明體"/>
+        <a:font script="Arab" typeface="Times New Roman"/>
+        <a:font script="Hebr" typeface="Times New Roman"/>
+        <a:font script="Thai" typeface="Angsana New"/>
+        <a:font script="Ethi" typeface="Nyala"/>
+        <a:font script="Beng" typeface="Vrinda"/>
+        <a:font script="Gujr" typeface="Shruti"/>
+        <a:font script="Khmr" typeface="MoolBoran"/>
+        <a:font script="Knda" typeface="Tunga"/>
+        <a:font script="Guru" typeface="Raavi"/>
+        <a:font script="Cans" typeface="Euphemia"/>
+        <a:font script="Cher" typeface="Plantagenet Cherokee"/>
+        <a:font script="Yiii" typeface="Microsoft Yi Baiti"/>
+        <a:font script="Tibt" typeface="Microsoft Himalaya"/>
+        <a:font script="Thaa" typeface="MV Boli"/>
+        <a:font script="Deva" typeface="Mangal"/>
+        <a:font script="Telu" typeface="Gautami"/>
+        <a:font script="Taml" typeface="Latha"/>
+        <a:font script="Syrc" typeface="Estrangelo Edessa"/>
+        <a:font script="Orya" typeface="Kalinga"/>
+        <a:font script="Mlym" typeface="Kartika"/>
+        <a:font script="Laoo" typeface="DokChampa"/>
+        <a:font script="Sinh" typeface="Iskoola Pota"/>
+        <a:font script="Mong" typeface="Mongolian Baiti"/>
+        <a:font script="Viet" typeface="Times New Roman"/>
+        <a:font script="Uigh" typeface="Microsoft Uighur"/>
+        <a:font script="Geor" typeface="Sylfaen"/>
+        <a:font script="Armn" typeface="Arial"/>
+        <a:font script="Bugi" typeface="Leelawadee UI"/>
+        <a:font script="Bopo" typeface="Microsoft JhengHei"/>
+        <a:font script="Java" typeface="Javanese Text"/>
+        <a:font script="Lisu" typeface="Segoe UI"/>
+        <a:font script="Mymr" typeface="Myanmar Text"/>
+        <a:font script="Nkoo" typeface="Ebrima"/>
+        <a:font script="Olck" typeface="Nirmala UI"/>
+        <a:font script="Osma" typeface="Ebrima"/>
+        <a:font script="Phag" typeface="Phagspa"/>
+        <a:font script="Syrn" typeface="Estrangelo Edessa"/>
+        <a:font script="Syrj" typeface="Estrangelo Edessa"/>
+        <a:font script="Syre" typeface="Estrangelo Edessa"/>
+        <a:font script="Sora" typeface="Nirmala UI"/>
+        <a:font script="Tale" typeface="Microsoft Tai Le"/>
+        <a:font script="Talu" typeface="Microsoft New Tai Lue"/>
+        <a:font script="Tfng" typeface="Ebrima"/>
+      </a:majorFont>
+      <a:minorFont>
+        <a:latin typeface="Aptos" panose="02110004020202020204"/>
+        <a:ea typeface=""/>
+        <a:cs typeface=""/>
+        <a:font script="Jpan" typeface="游ゴシック"/>
+        <a:font script="Hang" typeface="맑은 고딕"/>
+        <a:font script="Hans" typeface="等线"/>
+        <a:font script="Hant" typeface="新細明體"/>
+        <a:font script="Arab" typeface="Arial"/>
+        <a:font script="Hebr" typeface="Arial"/>
+        <a:font script="Thai" typeface="Cordia New"/>
+        <a:font script="Ethi" typeface="Nyala"/>
+        <a:font script="Beng" typeface="Vrinda"/>
+        <a:font script="Gujr" typeface="Shruti"/>
+        <a:font script="Khmr" typeface="DaunPenh"/>
+        <a:font script="Knda" typeface="Tunga"/>
+        <a:font script="Guru" typeface="Raavi"/>
+        <a:font script="Cans" typeface="Euphemia"/>
+        <a:font script="Cher" typeface="Plantagenet Cherokee"/>
+        <a:font script="Yiii" typeface="Microsoft Yi Baiti"/>
+        <a:font script="Tibt" typeface="Microsoft Himalaya"/>
+        <a:font script="Thaa" typeface="MV Boli"/>
+        <a:font script="Deva" typeface="Mangal"/>
+        <a:font script="Telu" typeface="Gautami"/>
+        <a:font script="Taml" typeface="Latha"/>
+        <a:font script="Syrc" typeface="Estrangelo Edessa"/>
+        <a:font script="Orya" typeface="Kalinga"/>
+        <a:font script="Mlym" typeface="Kartika"/>
+        <a:font script="Laoo" typeface="DokChampa"/>
+        <a:font script="Sinh" typeface="Iskoola Pota"/>
+        <a:font script="Mong" typeface="Mongolian Baiti"/>
+        <a:font script="Viet" typeface="Arial"/>
+        <a:font script="Uigh" typeface="Microsoft Uighur"/>
+        <a:font script="Geor" typeface="Sylfaen"/>
+        <a:font script="Armn" typeface="Arial"/>
+        <a:font script="Bugi" typeface="Leelawadee UI"/>
+        <a:font script="Bopo" typeface="Microsoft JhengHei"/>
+        <a:font script="Java" typeface="Javanese Text"/>
+        <a:font script="Lisu" typeface="Segoe UI"/>
+        <a:font script="Mymr" typeface="Myanmar Text"/>
+        <a:font script="Nkoo" typeface="Ebrima"/>
+        <a:font script="Olck" typeface="Nirmala UI"/>
+        <a:font script="Osma" typeface="Ebrima"/>
+        <a:font script="Phag" typeface="Phagspa"/>
+        <a:font script="Syrn" typeface="Estrangelo Edessa"/>
+        <a:font script="Syrj" typeface="Estrangelo Edessa"/>
+        <a:font script="Syre" typeface="Estrangelo Edessa"/>
+        <a:font script="Sora" typeface="Nirmala UI"/>
+        <a:font script="Tale" typeface="Microsoft Tai Le"/>
+        <a:font script="Talu" typeface="Microsoft New Tai Lue"/>
+        <a:font script="Tfng" typeface="Ebrima"/>
+      </a:minorFont>
+    </a:fontScheme>
+    <a:fmtScheme name="Office">
+      <a:fillStyleLst>
+        <a:solidFill>
+          <a:schemeClr val="phClr"/>
+        </a:solidFill>
+        <a:gradFill rotWithShape="1">
+          <a:gsLst>
+            <a:gs pos="0">
+              <a:schemeClr val="phClr">
+                <a:lumMod val="110000"/>
+                <a:satMod val="105000"/>
+                <a:tint val="67000"/>
+              </a:schemeClr>
+            </a:gs>
+            <a:gs pos="50000">
+              <a:schemeClr val="phClr">
+                <a:lumMod val="105000"/>
+                <a:satMod val="103000"/>
+                <a:tint val="73000"/>
+              </a:schemeClr>
+            </a:gs>
+            <a:gs pos="100000">
+              <a:schemeClr val="phClr">
+                <a:lumMod val="105000"/>
+                <a:satMod val="109000"/>
+                <a:tint val="81000"/>
+              </a:schemeClr>
+            </a:gs>
+          </a:gsLst>
+          <a:lin ang="5400000" scaled="0"/>
+        </a:gradFill>
+        <a:gradFill rotWithShape="1">
+          <a:gsLst>
+            <a:gs pos="0">
+              <a:schemeClr val="phClr">
+                <a:satMod val="103000"/>
+                <a:lumMod val="102000"/>
+                <a:tint val="94000"/>
+              </a:schemeClr>
+            </a:gs>
+            <a:gs pos="50000">
+              <a:schemeClr val="phClr">
+                <a:satMod val="110000"/>
+                <a:lumMod val="100000"/>
+                <a:shade val="100000"/>
+              </a:schemeClr>
+            </a:gs>
+            <a:gs pos="100000">
+              <a:schemeClr val="phClr">
+                <a:lumMod val="99000"/>
+                <a:satMod val="120000"/>
+                <a:shade val="78000"/>
+              </a:schemeClr>
+            </a:gs>
+          </a:gsLst>
+          <a:lin ang="5400000" scaled="0"/>
+        </a:gradFill>
+      </a:fillStyleLst>
+      <a:lnStyleLst>
+        <a:ln w="12700" cap="flat" cmpd="sng" algn="ctr">
+          <a:solidFill>
+            <a:schemeClr val="phClr"/>
+          </a:solidFill>
+          <a:prstDash val="solid"/>
+          <a:miter lim="800000"/>
+        </a:ln>
+        <a:ln w="19050" cap="flat" cmpd="sng" algn="ctr">
+          <a:solidFill>
+            <a:schemeClr val="phClr"/>
+          </a:solidFill>
+          <a:prstDash val="solid"/>
+          <a:miter lim="800000"/>
+        </a:ln>
+        <a:ln w="25400" cap="flat" cmpd="sng" algn="ctr">
+          <a:solidFill>
+            <a:schemeClr val="phClr"/>
+          </a:solidFill>
+          <a:prstDash val="solid"/>
+          <a:miter lim="800000"/>
+        </a:ln>
+      </a:lnStyleLst>
+      <a:effectStyleLst>
+        <a:effectStyle>
+          <a:effectLst/>
+        </a:effectStyle>
+        <a:effectStyle>
+          <a:effectLst/>
+        </a:effectStyle>
+        <a:effectStyle>
+          <a:effectLst>
+            <a:outerShdw blurRad="57150" dist="19050" dir="5400000" algn="ctr" rotWithShape="0">
+              <a:srgbClr val="000000">
+                <a:alpha val="63000"/>
+              </a:srgbClr>
+            </a:outerShdw>
+          </a:effectLst>
+        </a:effectStyle>
+      </a:effectStyleLst>
+      <a:bgFillStyleLst>
+        <a:solidFill>
+          <a:schemeClr val="phClr"/>
+        </a:solidFill>
+        <a:solidFill>
+          <a:schemeClr val="phClr">
+            <a:tint val="95000"/>
+            <a:satMod val="170000"/>
+          </a:schemeClr>
+        </a:solidFill>
+        <a:gradFill rotWithShape="1">
+          <a:gsLst>
+            <a:gs pos="0">
+              <a:schemeClr val="phClr">
+                <a:tint val="93000"/>
+                <a:satMod val="150000"/>
+                <a:shade val="98000"/>
+                <a:lumMod val="102000"/>
+              </a:schemeClr>
+            </a:gs>
+            <a:gs pos="50000">
+              <a:schemeClr val="phClr">
+                <a:tint val="98000"/>
+                <a:satMod val="130000"/>
+                <a:shade val="90000"/>
+                <a:lumMod val="103000"/>
+              </a:schemeClr>
+            </a:gs>
+            <a:gs pos="100000">
+              <a:schemeClr val="phClr">
+                <a:shade val="63000"/>
+                <a:satMod val="120000"/>
+              </a:schemeClr>
+            </a:gs>
+          </a:gsLst>
+          <a:lin ang="5400000" scaled="0"/>
+        </a:gradFill>
+      </a:bgFillStyleLst>
+    </a:fmtScheme>
+  </a:themeElements>
+  <a:objectDefaults>
+    <a:lnDef>
+      <a:spPr/>
+      <a:bodyPr/>
+      <a:lstStyle/>
+      <a:style>
+        <a:lnRef idx="2">
+          <a:schemeClr val="accent1"/>
+        </a:lnRef>
+        <a:fillRef idx="0">
+          <a:schemeClr val="accent1"/>
+        </a:fillRef>
+        <a:effectRef idx="1">
+          <a:schemeClr val="accent1"/>
+        </a:effectRef>
+        <a:fontRef idx="minor">
+          <a:schemeClr val="tx1"/>
+        </a:fontRef>
+      </a:style>
+    </a:lnDef>
+  </a:objectDefaults>
+  <a:extraClrSchemeLst/>
+  <a:extLst>
+    <a:ext uri="{05A4C25C-085E-4340-85A3-A5531E510DB2}">
+      <thm15:themeFamily xmlns:thm15="http://schemas.microsoft.com/office/thememl/2012/main" name="Office Theme" id="{2E142A2C-CD16-42D6-873A-C26D2A0506FA}" vid="{1BDDFF52-6CD6-40A5-AB3C-68EB2F1E4D0A}"/>
+    </a:ext>
+  </a:extLst>
+</a:theme>
 </file>